--- a/docs/Job-Scam-Detection-presentation.pptx
+++ b/docs/Job-Scam-Detection-presentation.pptx
@@ -9,19 +9,19 @@
   </p:notesMasterIdLst>
   <p:sldIdLst>
     <p:sldId id="256" r:id="rId2"/>
-    <p:sldId id="257" r:id="rId3"/>
-    <p:sldId id="258" r:id="rId4"/>
-    <p:sldId id="259" r:id="rId5"/>
-    <p:sldId id="260" r:id="rId6"/>
-    <p:sldId id="261" r:id="rId7"/>
-    <p:sldId id="262" r:id="rId8"/>
+    <p:sldId id="272" r:id="rId3"/>
+    <p:sldId id="257" r:id="rId4"/>
+    <p:sldId id="258" r:id="rId5"/>
+    <p:sldId id="259" r:id="rId6"/>
+    <p:sldId id="260" r:id="rId7"/>
+    <p:sldId id="261" r:id="rId8"/>
     <p:sldId id="263" r:id="rId9"/>
     <p:sldId id="264" r:id="rId10"/>
-    <p:sldId id="266" r:id="rId11"/>
-    <p:sldId id="267" r:id="rId12"/>
-    <p:sldId id="268" r:id="rId13"/>
-    <p:sldId id="269" r:id="rId14"/>
-    <p:sldId id="270" r:id="rId15"/>
+    <p:sldId id="262" r:id="rId11"/>
+    <p:sldId id="266" r:id="rId12"/>
+    <p:sldId id="267" r:id="rId13"/>
+    <p:sldId id="268" r:id="rId14"/>
+    <p:sldId id="269" r:id="rId15"/>
     <p:sldId id="271" r:id="rId16"/>
   </p:sldIdLst>
   <p:sldSz cx="12192000" cy="6858000"/>
@@ -406,7 +406,7 @@
           <a:p>
             <a:fld id="{F7021451-1387-4CA6-816F-3879F97B5CBC}" type="slidenum">
               <a:rPr lang="en-US"/>
-              <a:t>10</a:t>
+              <a:t>11</a:t>
             </a:fld>
             <a:endParaRPr lang="en-US"/>
           </a:p>
@@ -490,7 +490,7 @@
           <a:p>
             <a:fld id="{F7021451-1387-4CA6-816F-3879F97B5CBC}" type="slidenum">
               <a:rPr lang="en-US"/>
-              <a:t>11</a:t>
+              <a:t>12</a:t>
             </a:fld>
             <a:endParaRPr lang="en-US"/>
           </a:p>
@@ -574,7 +574,7 @@
           <a:p>
             <a:fld id="{F7021451-1387-4CA6-816F-3879F97B5CBC}" type="slidenum">
               <a:rPr lang="en-US"/>
-              <a:t>12</a:t>
+              <a:t>13</a:t>
             </a:fld>
             <a:endParaRPr lang="en-US"/>
           </a:p>
@@ -661,7 +661,7 @@
           <a:p>
             <a:fld id="{F7021451-1387-4CA6-816F-3879F97B5CBC}" type="slidenum">
               <a:rPr lang="en-US"/>
-              <a:t>13</a:t>
+              <a:t>14</a:t>
             </a:fld>
             <a:endParaRPr lang="en-US"/>
           </a:p>
@@ -724,93 +724,6 @@
           <a:bodyPr/>
           <a:lstStyle/>
           <a:p>
-            <a:r>
-              <a:rPr lang="en-US" dirty="0"/>
-              <a:t>Avoid presenting the system as ready for fully automated enforcement. It is a deployed decision-support tool validated on a benchmark, and local Kenyan-market ground truth remains limited.</a:t>
-            </a:r>
-          </a:p>
-        </p:txBody>
-      </p:sp>
-      <p:sp>
-        <p:nvSpPr>
-          <p:cNvPr id="4" name="Slide Number Placeholder 3"/>
-          <p:cNvSpPr>
-            <a:spLocks noGrp="1"/>
-          </p:cNvSpPr>
-          <p:nvPr>
-            <p:ph type="sldNum" sz="quarter" idx="10"/>
-          </p:nvPr>
-        </p:nvSpPr>
-        <p:spPr/>
-        <p:txBody>
-          <a:bodyPr/>
-          <a:lstStyle/>
-          <a:p>
-            <a:fld id="{F7021451-1387-4CA6-816F-3879F97B5CBC}" type="slidenum">
-              <a:rPr lang="en-US"/>
-              <a:t>14</a:t>
-            </a:fld>
-            <a:endParaRPr lang="en-US"/>
-          </a:p>
-        </p:txBody>
-      </p:sp>
-    </p:spTree>
-    <p:extLst>
-      <p:ext uri="{BB962C8B-B14F-4D97-AF65-F5344CB8AC3E}">
-        <p14:creationId xmlns:p14="http://schemas.microsoft.com/office/powerpoint/2010/main" val="1024086991"/>
-      </p:ext>
-    </p:extLst>
-  </p:cSld>
-  <p:clrMapOvr>
-    <a:masterClrMapping/>
-  </p:clrMapOvr>
-</p:notes>
-</file>
-
-<file path=ppt/notesSlides/notesSlide15.xml><?xml version="1.0" encoding="utf-8"?>
-<p:notes xmlns:a="http://schemas.openxmlformats.org/drawingml/2006/main" xmlns:r="http://schemas.openxmlformats.org/officeDocument/2006/relationships" xmlns:p="http://schemas.openxmlformats.org/presentationml/2006/main">
-  <p:cSld>
-    <p:spTree>
-      <p:nvGrpSpPr>
-        <p:cNvPr id="1" name=""/>
-        <p:cNvGrpSpPr/>
-        <p:nvPr/>
-      </p:nvGrpSpPr>
-      <p:grpSpPr>
-        <a:xfrm>
-          <a:off x="0" y="0"/>
-          <a:ext cx="0" cy="0"/>
-          <a:chOff x="0" y="0"/>
-          <a:chExt cx="0" cy="0"/>
-        </a:xfrm>
-      </p:grpSpPr>
-      <p:sp>
-        <p:nvSpPr>
-          <p:cNvPr id="2" name="Slide Image Placeholder 1"/>
-          <p:cNvSpPr>
-            <a:spLocks noGrp="1" noRot="1" noChangeAspect="1"/>
-          </p:cNvSpPr>
-          <p:nvPr>
-            <p:ph type="sldImg"/>
-          </p:nvPr>
-        </p:nvSpPr>
-        <p:spPr/>
-      </p:sp>
-      <p:sp>
-        <p:nvSpPr>
-          <p:cNvPr id="3" name="Notes Placeholder 2"/>
-          <p:cNvSpPr>
-            <a:spLocks noGrp="1"/>
-          </p:cNvSpPr>
-          <p:nvPr>
-            <p:ph type="body" idx="1"/>
-          </p:nvPr>
-        </p:nvSpPr>
-        <p:spPr/>
-        <p:txBody>
-          <a:bodyPr/>
-          <a:lstStyle/>
-          <a:p>
             <a:endParaRPr lang="en-US" dirty="0"/>
           </a:p>
         </p:txBody>
@@ -919,7 +832,7 @@
           <a:p>
             <a:fld id="{F7021451-1387-4CA6-816F-3879F97B5CBC}" type="slidenum">
               <a:rPr lang="en-US"/>
-              <a:t>2</a:t>
+              <a:t>3</a:t>
             </a:fld>
             <a:endParaRPr lang="en-US"/>
           </a:p>
@@ -1006,7 +919,7 @@
           <a:p>
             <a:fld id="{F7021451-1387-4CA6-816F-3879F97B5CBC}" type="slidenum">
               <a:rPr lang="en-US"/>
-              <a:t>3</a:t>
+              <a:t>4</a:t>
             </a:fld>
             <a:endParaRPr lang="en-US"/>
           </a:p>
@@ -1093,7 +1006,7 @@
           <a:p>
             <a:fld id="{F7021451-1387-4CA6-816F-3879F97B5CBC}" type="slidenum">
               <a:rPr lang="en-US"/>
-              <a:t>4</a:t>
+              <a:t>5</a:t>
             </a:fld>
             <a:endParaRPr lang="en-US"/>
           </a:p>
@@ -1180,7 +1093,7 @@
           <a:p>
             <a:fld id="{F7021451-1387-4CA6-816F-3879F97B5CBC}" type="slidenum">
               <a:rPr lang="en-US"/>
-              <a:t>5</a:t>
+              <a:t>6</a:t>
             </a:fld>
             <a:endParaRPr lang="en-US"/>
           </a:p>
@@ -1267,7 +1180,7 @@
           <a:p>
             <a:fld id="{F7021451-1387-4CA6-816F-3879F97B5CBC}" type="slidenum">
               <a:rPr lang="en-US"/>
-              <a:t>6</a:t>
+              <a:t>7</a:t>
             </a:fld>
             <a:endParaRPr lang="en-US"/>
           </a:p>
@@ -1330,10 +1243,7 @@
           <a:bodyPr/>
           <a:lstStyle/>
           <a:p>
-            <a:r>
-              <a:rPr lang="en-US" dirty="0"/>
-              <a:t>The three-class-to-binary mapping was applied consistently across EMSCAD (harmonized from its native binary label) and the synthetic dataset (native 3-class).</a:t>
-            </a:r>
+            <a:endParaRPr lang="en-US" dirty="0"/>
           </a:p>
         </p:txBody>
       </p:sp>
@@ -1354,7 +1264,7 @@
           <a:p>
             <a:fld id="{F7021451-1387-4CA6-816F-3879F97B5CBC}" type="slidenum">
               <a:rPr lang="en-US"/>
-              <a:t>7</a:t>
+              <a:t>8</a:t>
             </a:fld>
             <a:endParaRPr lang="en-US"/>
           </a:p>
@@ -1438,7 +1348,7 @@
           <a:p>
             <a:fld id="{F7021451-1387-4CA6-816F-3879F97B5CBC}" type="slidenum">
               <a:rPr lang="en-US"/>
-              <a:t>8</a:t>
+              <a:t>9</a:t>
             </a:fld>
             <a:endParaRPr lang="en-US"/>
           </a:p>
@@ -1501,7 +1411,10 @@
           <a:bodyPr/>
           <a:lstStyle/>
           <a:p>
-            <a:endParaRPr lang="en-US" dirty="0"/>
+            <a:r>
+              <a:rPr lang="en-US" dirty="0"/>
+              <a:t>The three-class-to-binary mapping was applied consistently across EMSCAD (harmonized from its native binary label) and the synthetic dataset (native 3-class).</a:t>
+            </a:r>
           </a:p>
         </p:txBody>
       </p:sp>
@@ -1522,7 +1435,7 @@
           <a:p>
             <a:fld id="{F7021451-1387-4CA6-816F-3879F97B5CBC}" type="slidenum">
               <a:rPr lang="en-US"/>
-              <a:t>9</a:t>
+              <a:t>10</a:t>
             </a:fld>
             <a:endParaRPr lang="en-US"/>
           </a:p>
@@ -1859,7 +1772,7 @@
     <p:bg>
       <p:bgPr>
         <a:solidFill>
-          <a:srgbClr val="1B2A4A"/>
+          <a:srgbClr val="1B2B41"/>
         </a:solidFill>
         <a:effectLst/>
       </p:bgPr>
@@ -1878,683 +1791,76 @@
           <a:chExt cx="0" cy="0"/>
         </a:xfrm>
       </p:grpSpPr>
-      <p:pic>
-        <p:nvPicPr>
-          <p:cNvPr id="2" name="Image 0" descr="preencoded.png"/>
-          <p:cNvPicPr>
-            <a:picLocks noChangeAspect="1"/>
-          </p:cNvPicPr>
-          <p:nvPr/>
-        </p:nvPicPr>
-        <p:blipFill>
-          <a:blip r:embed="rId3">
-            <a:alphaModFix amt="12000"/>
-          </a:blip>
-          <a:stretch>
-            <a:fillRect/>
-          </a:stretch>
-        </p:blipFill>
-        <p:spPr>
-          <a:xfrm>
-            <a:off x="8869680" y="4023360"/>
-            <a:ext cx="2926080" cy="2926080"/>
-          </a:xfrm>
-          <a:prstGeom prst="rect">
-            <a:avLst/>
-          </a:prstGeom>
-        </p:spPr>
-      </p:pic>
-      <p:sp>
-        <p:nvSpPr>
-          <p:cNvPr id="3" name="Shape 0"/>
-          <p:cNvSpPr/>
-          <p:nvPr/>
-        </p:nvSpPr>
-        <p:spPr>
-          <a:xfrm>
-            <a:off x="548640" y="457200"/>
-            <a:ext cx="640080" cy="640080"/>
-          </a:xfrm>
-          <a:prstGeom prst="ellipse">
-            <a:avLst/>
-          </a:prstGeom>
-          <a:solidFill>
-            <a:srgbClr val="4A6FA5"/>
-          </a:solidFill>
-          <a:ln/>
-        </p:spPr>
-      </p:sp>
-      <p:pic>
-        <p:nvPicPr>
-          <p:cNvPr id="4" name="Image 1" descr="preencoded.png"/>
-          <p:cNvPicPr>
-            <a:picLocks noChangeAspect="1"/>
-          </p:cNvPicPr>
-          <p:nvPr/>
-        </p:nvPicPr>
-        <p:blipFill>
-          <a:blip r:embed="rId3"/>
-          <a:stretch>
-            <a:fillRect/>
-          </a:stretch>
-        </p:blipFill>
-        <p:spPr>
-          <a:xfrm>
-            <a:off x="713232" y="621792"/>
-            <a:ext cx="310896" cy="310896"/>
-          </a:xfrm>
-          <a:prstGeom prst="rect">
-            <a:avLst/>
-          </a:prstGeom>
-        </p:spPr>
-      </p:pic>
-      <p:sp>
-        <p:nvSpPr>
-          <p:cNvPr id="5" name="Text 1"/>
+      <p:sp>
+        <p:nvSpPr>
+          <p:cNvPr id="2" name="TextBox 1"/>
           <p:cNvSpPr txBox="1"/>
           <p:nvPr/>
         </p:nvSpPr>
         <p:spPr>
           <a:xfrm>
-            <a:off x="1676400" y="1019429"/>
-            <a:ext cx="10515600" cy="911924"/>
+            <a:off x="914400" y="2423160"/>
+            <a:ext cx="10332720" cy="1097280"/>
           </a:xfrm>
           <a:prstGeom prst="rect">
             <a:avLst/>
           </a:prstGeom>
           <a:noFill/>
-          <a:ln/>
-        </p:spPr>
-        <p:txBody>
-          <a:bodyPr wrap="square" lIns="0" tIns="0" rIns="0" bIns="0" rtlCol="0" anchor="ctr"/>
-          <a:lstStyle/>
-          <a:p>
-            <a:pPr marL="0" indent="0">
-              <a:buNone/>
-            </a:pPr>
-            <a:r>
-              <a:rPr lang="en-US" sz="3800" b="1" dirty="0">
+        </p:spPr>
+        <p:txBody>
+          <a:bodyPr wrap="none">
+            <a:spAutoFit/>
+          </a:bodyPr>
+          <a:lstStyle/>
+          <a:p>
+            <a:pPr algn="ctr">
+              <a:defRPr sz="3400" b="1">
                 <a:solidFill>
                   <a:srgbClr val="FFFFFF"/>
                 </a:solidFill>
-                <a:latin typeface="Times New Roman" panose="02020603050405020304" pitchFamily="18" charset="0"/>
-                <a:ea typeface="Cambria" pitchFamily="34" charset="-122"/>
-                <a:cs typeface="Times New Roman" panose="02020603050405020304" pitchFamily="18" charset="0"/>
-              </a:rPr>
+                <a:latin typeface="Aptos Display"/>
+              </a:defRPr>
+            </a:pPr>
+            <a:r>
               <a:t>AI-Powered Job Scam Detection System</a:t>
             </a:r>
-            <a:endParaRPr lang="en-US" sz="3800" dirty="0">
-              <a:latin typeface="Times New Roman" panose="02020603050405020304" pitchFamily="18" charset="0"/>
-              <a:cs typeface="Times New Roman" panose="02020603050405020304" pitchFamily="18" charset="0"/>
-            </a:endParaRPr>
-          </a:p>
-        </p:txBody>
-      </p:sp>
-      <p:sp>
-        <p:nvSpPr>
-          <p:cNvPr id="6" name="Text 2"/>
+          </a:p>
+        </p:txBody>
+      </p:sp>
+      <p:sp>
+        <p:nvSpPr>
+          <p:cNvPr id="3" name="TextBox 2"/>
           <p:cNvSpPr txBox="1"/>
           <p:nvPr/>
         </p:nvSpPr>
         <p:spPr>
           <a:xfrm>
-            <a:off x="2649220" y="2314988"/>
-            <a:ext cx="10515600" cy="502920"/>
+            <a:off x="4690796" y="3657600"/>
+            <a:ext cx="2779927" cy="646331"/>
           </a:xfrm>
           <a:prstGeom prst="rect">
             <a:avLst/>
           </a:prstGeom>
           <a:noFill/>
-          <a:ln/>
-        </p:spPr>
-        <p:txBody>
-          <a:bodyPr wrap="square" lIns="0" tIns="0" rIns="0" bIns="0" rtlCol="0" anchor="ctr"/>
-          <a:lstStyle/>
-          <a:p>
-            <a:pPr marL="0" indent="0">
-              <a:buNone/>
-            </a:pPr>
-            <a:r>
-              <a:rPr lang="en-US" sz="1700" i="1" dirty="0">
-                <a:solidFill>
-                  <a:srgbClr val="CADCFC"/>
-                </a:solidFill>
-                <a:latin typeface="Times New Roman" panose="02020603050405020304" pitchFamily="18" charset="0"/>
-                <a:ea typeface="Calibri" pitchFamily="34" charset="-122"/>
-                <a:cs typeface="Times New Roman" panose="02020603050405020304" pitchFamily="18" charset="0"/>
-              </a:rPr>
-              <a:t>A Machine-Learning Classifier for Fraudulent Job Postings in Kenya</a:t>
-            </a:r>
-            <a:endParaRPr lang="en-US" sz="1700" dirty="0">
-              <a:latin typeface="Times New Roman" panose="02020603050405020304" pitchFamily="18" charset="0"/>
-              <a:cs typeface="Times New Roman" panose="02020603050405020304" pitchFamily="18" charset="0"/>
-            </a:endParaRPr>
-          </a:p>
-        </p:txBody>
-      </p:sp>
-      <p:sp>
-        <p:nvSpPr>
-          <p:cNvPr id="7" name="Text 3"/>
-          <p:cNvSpPr txBox="1"/>
-          <p:nvPr/>
-        </p:nvSpPr>
-        <p:spPr>
-          <a:xfrm>
-            <a:off x="647700" y="1989392"/>
-            <a:ext cx="10515600" cy="320040"/>
-          </a:xfrm>
-          <a:prstGeom prst="rect">
-            <a:avLst/>
-          </a:prstGeom>
-          <a:noFill/>
-          <a:ln/>
-        </p:spPr>
-        <p:txBody>
-          <a:bodyPr wrap="square" lIns="0" tIns="0" rIns="0" bIns="0" rtlCol="0" anchor="ctr"/>
-          <a:lstStyle/>
-          <a:p>
-            <a:pPr marL="0" indent="0" algn="ctr">
-              <a:buNone/>
-            </a:pPr>
-            <a:r>
-              <a:rPr lang="en-US" sz="1300" dirty="0">
-                <a:solidFill>
-                  <a:srgbClr val="CADCFC"/>
-                </a:solidFill>
-                <a:latin typeface="Times New Roman" panose="02020603050405020304" pitchFamily="18" charset="0"/>
-                <a:ea typeface="Calibri" pitchFamily="34" charset="-122"/>
-                <a:cs typeface="Times New Roman" panose="02020603050405020304" pitchFamily="18" charset="0"/>
-              </a:rPr>
-              <a:t> </a:t>
-            </a:r>
-            <a:r>
-              <a:rPr lang="en-US" sz="3200" dirty="0">
-                <a:solidFill>
-                  <a:srgbClr val="CADCFC"/>
-                </a:solidFill>
-                <a:latin typeface="Times New Roman" panose="02020603050405020304" pitchFamily="18" charset="0"/>
-                <a:ea typeface="Calibri" pitchFamily="34" charset="-122"/>
-                <a:cs typeface="Times New Roman" panose="02020603050405020304" pitchFamily="18" charset="0"/>
-              </a:rPr>
+        </p:spPr>
+        <p:txBody>
+          <a:bodyPr wrap="none">
+            <a:spAutoFit/>
+          </a:bodyPr>
+          <a:lstStyle/>
+          <a:p>
+            <a:pPr algn="ctr">
+              <a:defRPr sz="2400" b="1">
+                <a:solidFill>
+                  <a:srgbClr val="FFFFFF"/>
+                </a:solidFill>
+                <a:latin typeface="Aptos"/>
+              </a:defRPr>
+            </a:pPr>
+            <a:r>
+              <a:rPr sz="3600" dirty="0"/>
               <a:t>HAKIKI HIRE</a:t>
             </a:r>
-            <a:endParaRPr lang="en-US" sz="3200" dirty="0">
-              <a:latin typeface="Times New Roman" panose="02020603050405020304" pitchFamily="18" charset="0"/>
-              <a:cs typeface="Times New Roman" panose="02020603050405020304" pitchFamily="18" charset="0"/>
-            </a:endParaRPr>
-          </a:p>
-        </p:txBody>
-      </p:sp>
-      <p:sp>
-        <p:nvSpPr>
-          <p:cNvPr id="8" name="Text 4"/>
-          <p:cNvSpPr txBox="1"/>
-          <p:nvPr/>
-        </p:nvSpPr>
-        <p:spPr>
-          <a:xfrm>
-            <a:off x="4434840" y="3201543"/>
-            <a:ext cx="6159137" cy="234695"/>
-          </a:xfrm>
-          <a:prstGeom prst="rect">
-            <a:avLst/>
-          </a:prstGeom>
-          <a:noFill/>
-          <a:ln/>
-        </p:spPr>
-        <p:txBody>
-          <a:bodyPr wrap="square" lIns="0" tIns="0" rIns="0" bIns="0" rtlCol="0" anchor="ctr"/>
-          <a:lstStyle/>
-          <a:p>
-            <a:pPr marL="0" indent="0">
-              <a:buNone/>
-            </a:pPr>
-            <a:r>
-              <a:rPr lang="en-US" sz="1100" i="1" dirty="0">
-                <a:solidFill>
-                  <a:srgbClr val="8FA6C9"/>
-                </a:solidFill>
-                <a:latin typeface="Times New Roman" panose="02020603050405020304" pitchFamily="18" charset="0"/>
-                <a:ea typeface="Calibri" pitchFamily="34" charset="-122"/>
-                <a:cs typeface="Times New Roman" panose="02020603050405020304" pitchFamily="18" charset="0"/>
-              </a:rPr>
-              <a:t>Dataset Research and Search — Whole Team</a:t>
-            </a:r>
-            <a:endParaRPr lang="en-US" sz="1100" dirty="0">
-              <a:latin typeface="Times New Roman" panose="02020603050405020304" pitchFamily="18" charset="0"/>
-              <a:cs typeface="Times New Roman" panose="02020603050405020304" pitchFamily="18" charset="0"/>
-            </a:endParaRPr>
-          </a:p>
-        </p:txBody>
-      </p:sp>
-      <p:sp>
-        <p:nvSpPr>
-          <p:cNvPr id="9" name="Text 5"/>
-          <p:cNvSpPr txBox="1"/>
-          <p:nvPr/>
-        </p:nvSpPr>
-        <p:spPr>
-          <a:xfrm>
-            <a:off x="548640" y="3931920"/>
-            <a:ext cx="3383280" cy="292608"/>
-          </a:xfrm>
-          <a:prstGeom prst="rect">
-            <a:avLst/>
-          </a:prstGeom>
-          <a:noFill/>
-          <a:ln/>
-        </p:spPr>
-        <p:txBody>
-          <a:bodyPr wrap="square" lIns="0" tIns="0" rIns="0" bIns="0" rtlCol="0" anchor="ctr"/>
-          <a:lstStyle/>
-          <a:p>
-            <a:pPr marL="0" indent="0">
-              <a:buNone/>
-            </a:pPr>
-            <a:r>
-              <a:rPr lang="en-US" sz="1400" b="1" dirty="0">
-                <a:solidFill>
-                  <a:srgbClr val="FFFFFF"/>
-                </a:solidFill>
-                <a:latin typeface="Times New Roman" panose="02020603050405020304" pitchFamily="18" charset="0"/>
-                <a:ea typeface="Calibri" pitchFamily="34" charset="-122"/>
-                <a:cs typeface="Times New Roman" panose="02020603050405020304" pitchFamily="18" charset="0"/>
-              </a:rPr>
-              <a:t>Melisa Achieng</a:t>
-            </a:r>
-            <a:endParaRPr lang="en-US" sz="1400" dirty="0">
-              <a:latin typeface="Times New Roman" panose="02020603050405020304" pitchFamily="18" charset="0"/>
-              <a:cs typeface="Times New Roman" panose="02020603050405020304" pitchFamily="18" charset="0"/>
-            </a:endParaRPr>
-          </a:p>
-        </p:txBody>
-      </p:sp>
-      <p:sp>
-        <p:nvSpPr>
-          <p:cNvPr id="10" name="Text 6"/>
-          <p:cNvSpPr txBox="1"/>
-          <p:nvPr/>
-        </p:nvSpPr>
-        <p:spPr>
-          <a:xfrm>
-            <a:off x="548640" y="4242816"/>
-            <a:ext cx="3383280" cy="365760"/>
-          </a:xfrm>
-          <a:prstGeom prst="rect">
-            <a:avLst/>
-          </a:prstGeom>
-          <a:noFill/>
-          <a:ln/>
-        </p:spPr>
-        <p:txBody>
-          <a:bodyPr wrap="square" lIns="0" tIns="0" rIns="0" bIns="0" rtlCol="0" anchor="ctr"/>
-          <a:lstStyle/>
-          <a:p>
-            <a:pPr marL="0" indent="0">
-              <a:buNone/>
-            </a:pPr>
-            <a:r>
-              <a:rPr lang="en-US" sz="1050" dirty="0">
-                <a:solidFill>
-                  <a:srgbClr val="CADCFC"/>
-                </a:solidFill>
-                <a:latin typeface="Times New Roman" panose="02020603050405020304" pitchFamily="18" charset="0"/>
-                <a:ea typeface="Calibri" pitchFamily="34" charset="-122"/>
-                <a:cs typeface="Times New Roman" panose="02020603050405020304" pitchFamily="18" charset="0"/>
-              </a:rPr>
-              <a:t>Data Loading &amp; Cleaning</a:t>
-            </a:r>
-            <a:endParaRPr lang="en-US" sz="1050" dirty="0">
-              <a:latin typeface="Times New Roman" panose="02020603050405020304" pitchFamily="18" charset="0"/>
-              <a:cs typeface="Times New Roman" panose="02020603050405020304" pitchFamily="18" charset="0"/>
-            </a:endParaRPr>
-          </a:p>
-        </p:txBody>
-      </p:sp>
-      <p:sp>
-        <p:nvSpPr>
-          <p:cNvPr id="11" name="Text 7"/>
-          <p:cNvSpPr txBox="1"/>
-          <p:nvPr/>
-        </p:nvSpPr>
-        <p:spPr>
-          <a:xfrm>
-            <a:off x="7439660" y="3926332"/>
-            <a:ext cx="3383280" cy="292608"/>
-          </a:xfrm>
-          <a:prstGeom prst="rect">
-            <a:avLst/>
-          </a:prstGeom>
-          <a:noFill/>
-          <a:ln/>
-        </p:spPr>
-        <p:txBody>
-          <a:bodyPr wrap="square" lIns="0" tIns="0" rIns="0" bIns="0" rtlCol="0" anchor="ctr"/>
-          <a:lstStyle/>
-          <a:p>
-            <a:pPr marL="0" indent="0">
-              <a:buNone/>
-            </a:pPr>
-            <a:r>
-              <a:rPr lang="en-US" sz="1400" b="1" dirty="0">
-                <a:solidFill>
-                  <a:srgbClr val="FFFFFF"/>
-                </a:solidFill>
-                <a:latin typeface="Times New Roman" panose="02020603050405020304" pitchFamily="18" charset="0"/>
-                <a:ea typeface="Calibri" pitchFamily="34" charset="-122"/>
-                <a:cs typeface="Times New Roman" panose="02020603050405020304" pitchFamily="18" charset="0"/>
-              </a:rPr>
-              <a:t>Briannah Chelangat</a:t>
-            </a:r>
-            <a:endParaRPr lang="en-US" sz="1400" dirty="0">
-              <a:latin typeface="Times New Roman" panose="02020603050405020304" pitchFamily="18" charset="0"/>
-              <a:cs typeface="Times New Roman" panose="02020603050405020304" pitchFamily="18" charset="0"/>
-            </a:endParaRPr>
-          </a:p>
-        </p:txBody>
-      </p:sp>
-      <p:sp>
-        <p:nvSpPr>
-          <p:cNvPr id="13" name="Text 9"/>
-          <p:cNvSpPr txBox="1"/>
-          <p:nvPr/>
-        </p:nvSpPr>
-        <p:spPr>
-          <a:xfrm>
-            <a:off x="314960" y="4782312"/>
-            <a:ext cx="3383280" cy="292608"/>
-          </a:xfrm>
-          <a:prstGeom prst="rect">
-            <a:avLst/>
-          </a:prstGeom>
-          <a:noFill/>
-          <a:ln/>
-        </p:spPr>
-        <p:txBody>
-          <a:bodyPr wrap="square" lIns="0" tIns="0" rIns="0" bIns="0" rtlCol="0" anchor="ctr"/>
-          <a:lstStyle/>
-          <a:p>
-            <a:pPr marL="0" indent="0">
-              <a:buNone/>
-            </a:pPr>
-            <a:r>
-              <a:rPr lang="en-US" sz="1400" b="1" dirty="0">
-                <a:solidFill>
-                  <a:srgbClr val="FFFFFF"/>
-                </a:solidFill>
-                <a:latin typeface="Times New Roman" panose="02020603050405020304" pitchFamily="18" charset="0"/>
-                <a:ea typeface="Calibri" pitchFamily="34" charset="-122"/>
-                <a:cs typeface="Times New Roman" panose="02020603050405020304" pitchFamily="18" charset="0"/>
-              </a:rPr>
-              <a:t>Christopher Kariuki</a:t>
-            </a:r>
-            <a:endParaRPr lang="en-US" sz="1400" dirty="0">
-              <a:latin typeface="Times New Roman" panose="02020603050405020304" pitchFamily="18" charset="0"/>
-              <a:cs typeface="Times New Roman" panose="02020603050405020304" pitchFamily="18" charset="0"/>
-            </a:endParaRPr>
-          </a:p>
-        </p:txBody>
-      </p:sp>
-      <p:sp>
-        <p:nvSpPr>
-          <p:cNvPr id="14" name="Text 10"/>
-          <p:cNvSpPr txBox="1"/>
-          <p:nvPr/>
-        </p:nvSpPr>
-        <p:spPr>
-          <a:xfrm>
-            <a:off x="314960" y="5010912"/>
-            <a:ext cx="3383280" cy="365760"/>
-          </a:xfrm>
-          <a:prstGeom prst="rect">
-            <a:avLst/>
-          </a:prstGeom>
-          <a:noFill/>
-          <a:ln/>
-        </p:spPr>
-        <p:txBody>
-          <a:bodyPr wrap="square" lIns="0" tIns="0" rIns="0" bIns="0" rtlCol="0" anchor="ctr"/>
-          <a:lstStyle/>
-          <a:p>
-            <a:pPr marL="0" indent="0">
-              <a:buNone/>
-            </a:pPr>
-            <a:r>
-              <a:rPr lang="en-US" sz="1050" dirty="0">
-                <a:solidFill>
-                  <a:srgbClr val="CADCFC"/>
-                </a:solidFill>
-                <a:latin typeface="Times New Roman" panose="02020603050405020304" pitchFamily="18" charset="0"/>
-                <a:ea typeface="Calibri" pitchFamily="34" charset="-122"/>
-                <a:cs typeface="Times New Roman" panose="02020603050405020304" pitchFamily="18" charset="0"/>
-              </a:rPr>
-              <a:t>EDA &amp; Project Documentation &amp; PowerPoint </a:t>
-            </a:r>
-            <a:r>
-              <a:rPr lang="en-US" sz="1050">
-                <a:solidFill>
-                  <a:srgbClr val="CADCFC"/>
-                </a:solidFill>
-                <a:latin typeface="Times New Roman" panose="02020603050405020304" pitchFamily="18" charset="0"/>
-                <a:ea typeface="Calibri" pitchFamily="34" charset="-122"/>
-                <a:cs typeface="Times New Roman" panose="02020603050405020304" pitchFamily="18" charset="0"/>
-              </a:rPr>
-              <a:t>creration</a:t>
-            </a:r>
-            <a:endParaRPr lang="en-US" sz="1050" dirty="0">
-              <a:latin typeface="Times New Roman" panose="02020603050405020304" pitchFamily="18" charset="0"/>
-              <a:cs typeface="Times New Roman" panose="02020603050405020304" pitchFamily="18" charset="0"/>
-            </a:endParaRPr>
-          </a:p>
-        </p:txBody>
-      </p:sp>
-      <p:sp>
-        <p:nvSpPr>
-          <p:cNvPr id="15" name="Text 11"/>
-          <p:cNvSpPr txBox="1"/>
-          <p:nvPr/>
-        </p:nvSpPr>
-        <p:spPr>
-          <a:xfrm>
-            <a:off x="4114800" y="3922776"/>
-            <a:ext cx="3383280" cy="292608"/>
-          </a:xfrm>
-          <a:prstGeom prst="rect">
-            <a:avLst/>
-          </a:prstGeom>
-          <a:noFill/>
-          <a:ln/>
-        </p:spPr>
-        <p:txBody>
-          <a:bodyPr wrap="square" lIns="0" tIns="0" rIns="0" bIns="0" rtlCol="0" anchor="ctr"/>
-          <a:lstStyle/>
-          <a:p>
-            <a:pPr marL="0" indent="0">
-              <a:buNone/>
-            </a:pPr>
-            <a:r>
-              <a:rPr lang="en-US" sz="1400" b="1" dirty="0">
-                <a:solidFill>
-                  <a:srgbClr val="FFFFFF"/>
-                </a:solidFill>
-                <a:latin typeface="Times New Roman" panose="02020603050405020304" pitchFamily="18" charset="0"/>
-                <a:ea typeface="Calibri" pitchFamily="34" charset="-122"/>
-                <a:cs typeface="Times New Roman" panose="02020603050405020304" pitchFamily="18" charset="0"/>
-              </a:rPr>
-              <a:t>Cleopas Karanja</a:t>
-            </a:r>
-            <a:endParaRPr lang="en-US" sz="1400" dirty="0">
-              <a:latin typeface="Times New Roman" panose="02020603050405020304" pitchFamily="18" charset="0"/>
-              <a:cs typeface="Times New Roman" panose="02020603050405020304" pitchFamily="18" charset="0"/>
-            </a:endParaRPr>
-          </a:p>
-        </p:txBody>
-      </p:sp>
-      <p:sp>
-        <p:nvSpPr>
-          <p:cNvPr id="16" name="Text 12"/>
-          <p:cNvSpPr txBox="1"/>
-          <p:nvPr/>
-        </p:nvSpPr>
-        <p:spPr>
-          <a:xfrm>
-            <a:off x="4297680" y="4206240"/>
-            <a:ext cx="3383280" cy="365760"/>
-          </a:xfrm>
-          <a:prstGeom prst="rect">
-            <a:avLst/>
-          </a:prstGeom>
-          <a:noFill/>
-          <a:ln/>
-        </p:spPr>
-        <p:txBody>
-          <a:bodyPr wrap="square" lIns="0" tIns="0" rIns="0" bIns="0" rtlCol="0" anchor="ctr"/>
-          <a:lstStyle/>
-          <a:p>
-            <a:pPr marL="0" indent="0">
-              <a:buNone/>
-            </a:pPr>
-            <a:r>
-              <a:rPr lang="en-US" sz="1050" dirty="0">
-                <a:solidFill>
-                  <a:srgbClr val="CADCFC"/>
-                </a:solidFill>
-                <a:latin typeface="Times New Roman" panose="02020603050405020304" pitchFamily="18" charset="0"/>
-                <a:ea typeface="Calibri" pitchFamily="34" charset="-122"/>
-                <a:cs typeface="Times New Roman" panose="02020603050405020304" pitchFamily="18" charset="0"/>
-              </a:rPr>
-              <a:t>Modelling</a:t>
-            </a:r>
-            <a:endParaRPr lang="en-US" sz="1050" dirty="0">
-              <a:latin typeface="Times New Roman" panose="02020603050405020304" pitchFamily="18" charset="0"/>
-              <a:cs typeface="Times New Roman" panose="02020603050405020304" pitchFamily="18" charset="0"/>
-            </a:endParaRPr>
-          </a:p>
-        </p:txBody>
-      </p:sp>
-      <p:sp>
-        <p:nvSpPr>
-          <p:cNvPr id="17" name="Text 13"/>
-          <p:cNvSpPr txBox="1"/>
-          <p:nvPr/>
-        </p:nvSpPr>
-        <p:spPr>
-          <a:xfrm>
-            <a:off x="4213860" y="4764024"/>
-            <a:ext cx="3383280" cy="292608"/>
-          </a:xfrm>
-          <a:prstGeom prst="rect">
-            <a:avLst/>
-          </a:prstGeom>
-          <a:noFill/>
-          <a:ln/>
-        </p:spPr>
-        <p:txBody>
-          <a:bodyPr wrap="square" lIns="0" tIns="0" rIns="0" bIns="0" rtlCol="0" anchor="ctr"/>
-          <a:lstStyle/>
-          <a:p>
-            <a:pPr marL="0" indent="0">
-              <a:buNone/>
-            </a:pPr>
-            <a:r>
-              <a:rPr lang="en-US" sz="1400" b="1" dirty="0">
-                <a:solidFill>
-                  <a:srgbClr val="FFFFFF"/>
-                </a:solidFill>
-                <a:latin typeface="Times New Roman" panose="02020603050405020304" pitchFamily="18" charset="0"/>
-                <a:ea typeface="Calibri" pitchFamily="34" charset="-122"/>
-                <a:cs typeface="Times New Roman" panose="02020603050405020304" pitchFamily="18" charset="0"/>
-              </a:rPr>
-              <a:t>Alex Kinyua</a:t>
-            </a:r>
-            <a:endParaRPr lang="en-US" sz="1400" dirty="0">
-              <a:latin typeface="Times New Roman" panose="02020603050405020304" pitchFamily="18" charset="0"/>
-              <a:cs typeface="Times New Roman" panose="02020603050405020304" pitchFamily="18" charset="0"/>
-            </a:endParaRPr>
-          </a:p>
-        </p:txBody>
-      </p:sp>
-      <p:sp>
-        <p:nvSpPr>
-          <p:cNvPr id="18" name="Text 14"/>
-          <p:cNvSpPr txBox="1"/>
-          <p:nvPr/>
-        </p:nvSpPr>
-        <p:spPr>
-          <a:xfrm>
-            <a:off x="4056380" y="5031994"/>
-            <a:ext cx="3383280" cy="365760"/>
-          </a:xfrm>
-          <a:prstGeom prst="rect">
-            <a:avLst/>
-          </a:prstGeom>
-          <a:noFill/>
-          <a:ln/>
-        </p:spPr>
-        <p:txBody>
-          <a:bodyPr wrap="square" lIns="0" tIns="0" rIns="0" bIns="0" rtlCol="0" anchor="ctr"/>
-          <a:lstStyle/>
-          <a:p>
-            <a:pPr marL="0" indent="0">
-              <a:buNone/>
-            </a:pPr>
-            <a:r>
-              <a:rPr lang="en-US" sz="1050" dirty="0">
-                <a:solidFill>
-                  <a:srgbClr val="CADCFC"/>
-                </a:solidFill>
-                <a:latin typeface="Times New Roman" panose="02020603050405020304" pitchFamily="18" charset="0"/>
-                <a:ea typeface="Calibri" pitchFamily="34" charset="-122"/>
-                <a:cs typeface="Times New Roman" panose="02020603050405020304" pitchFamily="18" charset="0"/>
-              </a:rPr>
-              <a:t>Backend, Repository Admin &amp; Deployment</a:t>
-            </a:r>
-            <a:endParaRPr lang="en-US" sz="1050" dirty="0">
-              <a:latin typeface="Times New Roman" panose="02020603050405020304" pitchFamily="18" charset="0"/>
-              <a:cs typeface="Times New Roman" panose="02020603050405020304" pitchFamily="18" charset="0"/>
-            </a:endParaRPr>
-          </a:p>
-        </p:txBody>
-      </p:sp>
-      <p:sp>
-        <p:nvSpPr>
-          <p:cNvPr id="20" name="Text 16"/>
-          <p:cNvSpPr txBox="1"/>
-          <p:nvPr/>
-        </p:nvSpPr>
-        <p:spPr>
-          <a:xfrm>
-            <a:off x="7073900" y="4194048"/>
-            <a:ext cx="3383280" cy="365760"/>
-          </a:xfrm>
-          <a:prstGeom prst="rect">
-            <a:avLst/>
-          </a:prstGeom>
-          <a:noFill/>
-          <a:ln/>
-        </p:spPr>
-        <p:txBody>
-          <a:bodyPr wrap="square" lIns="0" tIns="0" rIns="0" bIns="0" rtlCol="0" anchor="ctr"/>
-          <a:lstStyle/>
-          <a:p>
-            <a:pPr marL="0" indent="0">
-              <a:buNone/>
-            </a:pPr>
-            <a:r>
-              <a:rPr lang="en-US" sz="1050" dirty="0">
-                <a:solidFill>
-                  <a:srgbClr val="CADCFC"/>
-                </a:solidFill>
-                <a:latin typeface="Times New Roman" panose="02020603050405020304" pitchFamily="18" charset="0"/>
-                <a:ea typeface="Calibri" pitchFamily="34" charset="-122"/>
-                <a:cs typeface="Times New Roman" panose="02020603050405020304" pitchFamily="18" charset="0"/>
-              </a:rPr>
-              <a:t>Backend, Job Seeker UI &amp; Gov Dashboard Concept</a:t>
-            </a:r>
-            <a:endParaRPr lang="en-US" sz="1050" dirty="0">
-              <a:latin typeface="Times New Roman" panose="02020603050405020304" pitchFamily="18" charset="0"/>
-              <a:cs typeface="Times New Roman" panose="02020603050405020304" pitchFamily="18" charset="0"/>
-            </a:endParaRPr>
           </a:p>
         </p:txBody>
       </p:sp>
@@ -2567,6 +1873,1280 @@
 </file>
 
 <file path=ppt/slides/slide10.xml><?xml version="1.0" encoding="utf-8"?>
+<p:sld xmlns:a="http://schemas.openxmlformats.org/drawingml/2006/main" xmlns:r="http://schemas.openxmlformats.org/officeDocument/2006/relationships" xmlns:p="http://schemas.openxmlformats.org/presentationml/2006/main">
+  <p:cSld name="Slide 7">
+    <p:bg>
+      <p:bgPr>
+        <a:solidFill>
+          <a:srgbClr val="F5F7FA"/>
+        </a:solidFill>
+        <a:effectLst/>
+      </p:bgPr>
+    </p:bg>
+    <p:spTree>
+      <p:nvGrpSpPr>
+        <p:cNvPr id="1" name=""/>
+        <p:cNvGrpSpPr/>
+        <p:nvPr/>
+      </p:nvGrpSpPr>
+      <p:grpSpPr>
+        <a:xfrm>
+          <a:off x="0" y="0"/>
+          <a:ext cx="0" cy="0"/>
+          <a:chOff x="0" y="0"/>
+          <a:chExt cx="0" cy="0"/>
+        </a:xfrm>
+      </p:grpSpPr>
+      <p:sp>
+        <p:nvSpPr>
+          <p:cNvPr id="2" name="Text 0"/>
+          <p:cNvSpPr txBox="1"/>
+          <p:nvPr/>
+        </p:nvSpPr>
+        <p:spPr>
+          <a:xfrm>
+            <a:off x="548640" y="411480"/>
+            <a:ext cx="8961120" cy="685800"/>
+          </a:xfrm>
+          <a:prstGeom prst="rect">
+            <a:avLst/>
+          </a:prstGeom>
+          <a:noFill/>
+          <a:ln/>
+        </p:spPr>
+        <p:txBody>
+          <a:bodyPr wrap="square" lIns="0" tIns="0" rIns="0" bIns="0" rtlCol="0" anchor="t"/>
+          <a:lstStyle/>
+          <a:p>
+            <a:pPr marL="0" indent="0">
+              <a:buNone/>
+            </a:pPr>
+            <a:r>
+              <a:rPr lang="en-US" sz="3000" b="1" dirty="0">
+                <a:solidFill>
+                  <a:srgbClr val="1B2A4A"/>
+                </a:solidFill>
+                <a:latin typeface="Times New Roman" panose="02020603050405020304" pitchFamily="18" charset="0"/>
+                <a:ea typeface="Cambria" pitchFamily="34" charset="-122"/>
+                <a:cs typeface="Times New Roman" panose="02020603050405020304" pitchFamily="18" charset="0"/>
+              </a:rPr>
+              <a:t>Dataset Structure &amp; Target Definition</a:t>
+            </a:r>
+            <a:endParaRPr lang="en-US" sz="3000" dirty="0">
+              <a:latin typeface="Times New Roman" panose="02020603050405020304" pitchFamily="18" charset="0"/>
+              <a:cs typeface="Times New Roman" panose="02020603050405020304" pitchFamily="18" charset="0"/>
+            </a:endParaRPr>
+          </a:p>
+        </p:txBody>
+      </p:sp>
+      <p:sp>
+        <p:nvSpPr>
+          <p:cNvPr id="3" name="Shape 1"/>
+          <p:cNvSpPr/>
+          <p:nvPr/>
+        </p:nvSpPr>
+        <p:spPr>
+          <a:xfrm>
+            <a:off x="548640" y="1417320"/>
+            <a:ext cx="3017520" cy="594360"/>
+          </a:xfrm>
+          <a:prstGeom prst="roundRect">
+            <a:avLst>
+              <a:gd name="adj" fmla="val 9231"/>
+            </a:avLst>
+          </a:prstGeom>
+          <a:solidFill>
+            <a:srgbClr val="FFFFFF"/>
+          </a:solidFill>
+          <a:ln w="19050">
+            <a:solidFill>
+              <a:srgbClr val="4A6FA5"/>
+            </a:solidFill>
+            <a:prstDash val="solid"/>
+          </a:ln>
+        </p:spPr>
+      </p:sp>
+      <p:sp>
+        <p:nvSpPr>
+          <p:cNvPr id="4" name="Text 2"/>
+          <p:cNvSpPr txBox="1"/>
+          <p:nvPr/>
+        </p:nvSpPr>
+        <p:spPr>
+          <a:xfrm>
+            <a:off x="548640" y="1417320"/>
+            <a:ext cx="3017520" cy="594360"/>
+          </a:xfrm>
+          <a:prstGeom prst="rect">
+            <a:avLst/>
+          </a:prstGeom>
+          <a:noFill/>
+          <a:ln/>
+        </p:spPr>
+        <p:txBody>
+          <a:bodyPr wrap="square" lIns="0" tIns="0" rIns="0" bIns="0" rtlCol="0" anchor="ctr"/>
+          <a:lstStyle/>
+          <a:p>
+            <a:pPr marL="0" indent="0" algn="ctr">
+              <a:buNone/>
+            </a:pPr>
+            <a:r>
+              <a:rPr lang="en-US" sz="1250" b="1" dirty="0">
+                <a:solidFill>
+                  <a:srgbClr val="1B2A4A"/>
+                </a:solidFill>
+                <a:latin typeface="Times New Roman" panose="02020603050405020304" pitchFamily="18" charset="0"/>
+                <a:ea typeface="Calibri" pitchFamily="34" charset="-122"/>
+                <a:cs typeface="Times New Roman" panose="02020603050405020304" pitchFamily="18" charset="0"/>
+              </a:rPr>
+              <a:t>0 — Legitimate</a:t>
+            </a:r>
+            <a:endParaRPr lang="en-US" sz="1250" dirty="0">
+              <a:latin typeface="Times New Roman" panose="02020603050405020304" pitchFamily="18" charset="0"/>
+              <a:cs typeface="Times New Roman" panose="02020603050405020304" pitchFamily="18" charset="0"/>
+            </a:endParaRPr>
+          </a:p>
+        </p:txBody>
+      </p:sp>
+      <p:sp>
+        <p:nvSpPr>
+          <p:cNvPr id="5" name="Shape 3"/>
+          <p:cNvSpPr/>
+          <p:nvPr/>
+        </p:nvSpPr>
+        <p:spPr>
+          <a:xfrm>
+            <a:off x="548640" y="2148840"/>
+            <a:ext cx="3017520" cy="594360"/>
+          </a:xfrm>
+          <a:prstGeom prst="roundRect">
+            <a:avLst>
+              <a:gd name="adj" fmla="val 9231"/>
+            </a:avLst>
+          </a:prstGeom>
+          <a:solidFill>
+            <a:srgbClr val="FFFFFF"/>
+          </a:solidFill>
+          <a:ln w="19050">
+            <a:solidFill>
+              <a:srgbClr val="C0392B"/>
+            </a:solidFill>
+            <a:prstDash val="solid"/>
+          </a:ln>
+        </p:spPr>
+      </p:sp>
+      <p:sp>
+        <p:nvSpPr>
+          <p:cNvPr id="6" name="Text 4"/>
+          <p:cNvSpPr txBox="1"/>
+          <p:nvPr/>
+        </p:nvSpPr>
+        <p:spPr>
+          <a:xfrm>
+            <a:off x="548640" y="2148840"/>
+            <a:ext cx="3017520" cy="594360"/>
+          </a:xfrm>
+          <a:prstGeom prst="rect">
+            <a:avLst/>
+          </a:prstGeom>
+          <a:noFill/>
+          <a:ln/>
+        </p:spPr>
+        <p:txBody>
+          <a:bodyPr wrap="square" lIns="0" tIns="0" rIns="0" bIns="0" rtlCol="0" anchor="ctr"/>
+          <a:lstStyle/>
+          <a:p>
+            <a:pPr marL="0" indent="0" algn="ctr">
+              <a:buNone/>
+            </a:pPr>
+            <a:r>
+              <a:rPr lang="en-US" sz="1250" b="1" dirty="0">
+                <a:solidFill>
+                  <a:srgbClr val="1B2A4A"/>
+                </a:solidFill>
+                <a:latin typeface="Times New Roman" panose="02020603050405020304" pitchFamily="18" charset="0"/>
+                <a:ea typeface="Calibri" pitchFamily="34" charset="-122"/>
+                <a:cs typeface="Times New Roman" panose="02020603050405020304" pitchFamily="18" charset="0"/>
+              </a:rPr>
+              <a:t>1 — Suspicious</a:t>
+            </a:r>
+            <a:endParaRPr lang="en-US" sz="1250" dirty="0">
+              <a:latin typeface="Times New Roman" panose="02020603050405020304" pitchFamily="18" charset="0"/>
+              <a:cs typeface="Times New Roman" panose="02020603050405020304" pitchFamily="18" charset="0"/>
+            </a:endParaRPr>
+          </a:p>
+        </p:txBody>
+      </p:sp>
+      <p:sp>
+        <p:nvSpPr>
+          <p:cNvPr id="7" name="Shape 5"/>
+          <p:cNvSpPr/>
+          <p:nvPr/>
+        </p:nvSpPr>
+        <p:spPr>
+          <a:xfrm>
+            <a:off x="548640" y="2880360"/>
+            <a:ext cx="3017520" cy="594360"/>
+          </a:xfrm>
+          <a:prstGeom prst="roundRect">
+            <a:avLst>
+              <a:gd name="adj" fmla="val 9231"/>
+            </a:avLst>
+          </a:prstGeom>
+          <a:solidFill>
+            <a:srgbClr val="FFFFFF"/>
+          </a:solidFill>
+          <a:ln w="19050">
+            <a:solidFill>
+              <a:srgbClr val="C0392B"/>
+            </a:solidFill>
+            <a:prstDash val="solid"/>
+          </a:ln>
+        </p:spPr>
+      </p:sp>
+      <p:sp>
+        <p:nvSpPr>
+          <p:cNvPr id="8" name="Text 6"/>
+          <p:cNvSpPr txBox="1"/>
+          <p:nvPr/>
+        </p:nvSpPr>
+        <p:spPr>
+          <a:xfrm>
+            <a:off x="548640" y="2880360"/>
+            <a:ext cx="3017520" cy="594360"/>
+          </a:xfrm>
+          <a:prstGeom prst="rect">
+            <a:avLst/>
+          </a:prstGeom>
+          <a:noFill/>
+          <a:ln/>
+        </p:spPr>
+        <p:txBody>
+          <a:bodyPr wrap="square" lIns="0" tIns="0" rIns="0" bIns="0" rtlCol="0" anchor="ctr"/>
+          <a:lstStyle/>
+          <a:p>
+            <a:pPr marL="0" indent="0" algn="ctr">
+              <a:buNone/>
+            </a:pPr>
+            <a:r>
+              <a:rPr lang="en-US" sz="1250" b="1" dirty="0">
+                <a:solidFill>
+                  <a:srgbClr val="1B2A4A"/>
+                </a:solidFill>
+                <a:latin typeface="Times New Roman" panose="02020603050405020304" pitchFamily="18" charset="0"/>
+                <a:ea typeface="Calibri" pitchFamily="34" charset="-122"/>
+                <a:cs typeface="Times New Roman" panose="02020603050405020304" pitchFamily="18" charset="0"/>
+              </a:rPr>
+              <a:t>2 — Fraudulent / Scam</a:t>
+            </a:r>
+            <a:endParaRPr lang="en-US" sz="1250" dirty="0">
+              <a:latin typeface="Times New Roman" panose="02020603050405020304" pitchFamily="18" charset="0"/>
+              <a:cs typeface="Times New Roman" panose="02020603050405020304" pitchFamily="18" charset="0"/>
+            </a:endParaRPr>
+          </a:p>
+        </p:txBody>
+      </p:sp>
+      <p:sp>
+        <p:nvSpPr>
+          <p:cNvPr id="9" name="Shape 7"/>
+          <p:cNvSpPr/>
+          <p:nvPr/>
+        </p:nvSpPr>
+        <p:spPr>
+          <a:xfrm>
+            <a:off x="8138160" y="1417320"/>
+            <a:ext cx="3017520" cy="594360"/>
+          </a:xfrm>
+          <a:prstGeom prst="roundRect">
+            <a:avLst>
+              <a:gd name="adj" fmla="val 9231"/>
+            </a:avLst>
+          </a:prstGeom>
+          <a:solidFill>
+            <a:srgbClr val="4A6FA5"/>
+          </a:solidFill>
+          <a:ln/>
+        </p:spPr>
+      </p:sp>
+      <p:sp>
+        <p:nvSpPr>
+          <p:cNvPr id="10" name="Text 8"/>
+          <p:cNvSpPr txBox="1"/>
+          <p:nvPr/>
+        </p:nvSpPr>
+        <p:spPr>
+          <a:xfrm>
+            <a:off x="8138160" y="1417320"/>
+            <a:ext cx="3017520" cy="594360"/>
+          </a:xfrm>
+          <a:prstGeom prst="rect">
+            <a:avLst/>
+          </a:prstGeom>
+          <a:noFill/>
+          <a:ln/>
+        </p:spPr>
+        <p:txBody>
+          <a:bodyPr wrap="square" lIns="0" tIns="0" rIns="0" bIns="0" rtlCol="0" anchor="ctr"/>
+          <a:lstStyle/>
+          <a:p>
+            <a:pPr marL="0" indent="0" algn="ctr">
+              <a:buNone/>
+            </a:pPr>
+            <a:r>
+              <a:rPr lang="en-US" sz="1250" b="1" dirty="0">
+                <a:solidFill>
+                  <a:srgbClr val="FFFFFF"/>
+                </a:solidFill>
+                <a:latin typeface="Times New Roman" panose="02020603050405020304" pitchFamily="18" charset="0"/>
+                <a:ea typeface="Calibri" pitchFamily="34" charset="-122"/>
+                <a:cs typeface="Times New Roman" panose="02020603050405020304" pitchFamily="18" charset="0"/>
+              </a:rPr>
+              <a:t>0 = Legitimate</a:t>
+            </a:r>
+            <a:endParaRPr lang="en-US" sz="1250" dirty="0">
+              <a:latin typeface="Times New Roman" panose="02020603050405020304" pitchFamily="18" charset="0"/>
+              <a:cs typeface="Times New Roman" panose="02020603050405020304" pitchFamily="18" charset="0"/>
+            </a:endParaRPr>
+          </a:p>
+        </p:txBody>
+      </p:sp>
+      <p:sp>
+        <p:nvSpPr>
+          <p:cNvPr id="11" name="Shape 9"/>
+          <p:cNvSpPr/>
+          <p:nvPr/>
+        </p:nvSpPr>
+        <p:spPr>
+          <a:xfrm>
+            <a:off x="8138160" y="2240280"/>
+            <a:ext cx="3017520" cy="1234440"/>
+          </a:xfrm>
+          <a:prstGeom prst="roundRect">
+            <a:avLst>
+              <a:gd name="adj" fmla="val 4444"/>
+            </a:avLst>
+          </a:prstGeom>
+          <a:solidFill>
+            <a:srgbClr val="C0392B"/>
+          </a:solidFill>
+          <a:ln/>
+        </p:spPr>
+      </p:sp>
+      <p:sp>
+        <p:nvSpPr>
+          <p:cNvPr id="12" name="Text 10"/>
+          <p:cNvSpPr txBox="1"/>
+          <p:nvPr/>
+        </p:nvSpPr>
+        <p:spPr>
+          <a:xfrm>
+            <a:off x="8138160" y="2240280"/>
+            <a:ext cx="3017520" cy="1234440"/>
+          </a:xfrm>
+          <a:prstGeom prst="rect">
+            <a:avLst/>
+          </a:prstGeom>
+          <a:noFill/>
+          <a:ln/>
+        </p:spPr>
+        <p:txBody>
+          <a:bodyPr wrap="square" lIns="0" tIns="0" rIns="0" bIns="0" rtlCol="0" anchor="ctr"/>
+          <a:lstStyle/>
+          <a:p>
+            <a:pPr marL="0" indent="0" algn="ctr">
+              <a:buNone/>
+            </a:pPr>
+            <a:r>
+              <a:rPr lang="en-US" sz="1250" b="1" dirty="0">
+                <a:solidFill>
+                  <a:srgbClr val="FFFFFF"/>
+                </a:solidFill>
+                <a:latin typeface="Times New Roman" panose="02020603050405020304" pitchFamily="18" charset="0"/>
+                <a:ea typeface="Calibri" pitchFamily="34" charset="-122"/>
+                <a:cs typeface="Times New Roman" panose="02020603050405020304" pitchFamily="18" charset="0"/>
+              </a:rPr>
+              <a:t>1 = Fraud-risk</a:t>
+            </a:r>
+            <a:endParaRPr lang="en-US" sz="1250" dirty="0">
+              <a:latin typeface="Times New Roman" panose="02020603050405020304" pitchFamily="18" charset="0"/>
+              <a:cs typeface="Times New Roman" panose="02020603050405020304" pitchFamily="18" charset="0"/>
+            </a:endParaRPr>
+          </a:p>
+          <a:p>
+            <a:pPr marL="0" indent="0" algn="ctr">
+              <a:buNone/>
+            </a:pPr>
+            <a:r>
+              <a:rPr lang="en-US" sz="1250" b="1" dirty="0">
+                <a:solidFill>
+                  <a:srgbClr val="FFFFFF"/>
+                </a:solidFill>
+                <a:latin typeface="Times New Roman" panose="02020603050405020304" pitchFamily="18" charset="0"/>
+                <a:ea typeface="Calibri" pitchFamily="34" charset="-122"/>
+                <a:cs typeface="Times New Roman" panose="02020603050405020304" pitchFamily="18" charset="0"/>
+              </a:rPr>
+              <a:t>(Suspicious + Fraudulent)</a:t>
+            </a:r>
+            <a:endParaRPr lang="en-US" sz="1250" dirty="0">
+              <a:latin typeface="Times New Roman" panose="02020603050405020304" pitchFamily="18" charset="0"/>
+              <a:cs typeface="Times New Roman" panose="02020603050405020304" pitchFamily="18" charset="0"/>
+            </a:endParaRPr>
+          </a:p>
+        </p:txBody>
+      </p:sp>
+      <p:sp>
+        <p:nvSpPr>
+          <p:cNvPr id="13" name="Shape 11"/>
+          <p:cNvSpPr/>
+          <p:nvPr/>
+        </p:nvSpPr>
+        <p:spPr>
+          <a:xfrm flipV="1">
+            <a:off x="3566160" y="1714500"/>
+            <a:ext cx="4572000" cy="9144"/>
+          </a:xfrm>
+          <a:prstGeom prst="line">
+            <a:avLst/>
+          </a:prstGeom>
+          <a:noFill/>
+          <a:ln w="25400">
+            <a:solidFill>
+              <a:srgbClr val="4A6FA5"/>
+            </a:solidFill>
+            <a:prstDash val="solid"/>
+          </a:ln>
+        </p:spPr>
+      </p:sp>
+      <p:sp>
+        <p:nvSpPr>
+          <p:cNvPr id="14" name="Shape 12"/>
+          <p:cNvSpPr/>
+          <p:nvPr/>
+        </p:nvSpPr>
+        <p:spPr>
+          <a:xfrm>
+            <a:off x="3566160" y="2446020"/>
+            <a:ext cx="4572000" cy="205740"/>
+          </a:xfrm>
+          <a:prstGeom prst="line">
+            <a:avLst/>
+          </a:prstGeom>
+          <a:noFill/>
+          <a:ln w="25400">
+            <a:solidFill>
+              <a:srgbClr val="C0392B"/>
+            </a:solidFill>
+            <a:prstDash val="solid"/>
+          </a:ln>
+        </p:spPr>
+      </p:sp>
+      <p:sp>
+        <p:nvSpPr>
+          <p:cNvPr id="15" name="Shape 13"/>
+          <p:cNvSpPr/>
+          <p:nvPr/>
+        </p:nvSpPr>
+        <p:spPr>
+          <a:xfrm flipV="1">
+            <a:off x="3566160" y="3017520"/>
+            <a:ext cx="4572000" cy="160020"/>
+          </a:xfrm>
+          <a:prstGeom prst="line">
+            <a:avLst/>
+          </a:prstGeom>
+          <a:noFill/>
+          <a:ln w="25400">
+            <a:solidFill>
+              <a:srgbClr val="C0392B"/>
+            </a:solidFill>
+            <a:prstDash val="solid"/>
+          </a:ln>
+        </p:spPr>
+      </p:sp>
+      <p:sp>
+        <p:nvSpPr>
+          <p:cNvPr id="16" name="Text 14"/>
+          <p:cNvSpPr txBox="1"/>
+          <p:nvPr/>
+        </p:nvSpPr>
+        <p:spPr>
+          <a:xfrm>
+            <a:off x="548640" y="3657600"/>
+            <a:ext cx="10607040" cy="365760"/>
+          </a:xfrm>
+          <a:prstGeom prst="rect">
+            <a:avLst/>
+          </a:prstGeom>
+          <a:noFill/>
+          <a:ln/>
+        </p:spPr>
+        <p:txBody>
+          <a:bodyPr wrap="square" lIns="0" tIns="0" rIns="0" bIns="0" rtlCol="0" anchor="ctr"/>
+          <a:lstStyle/>
+          <a:p>
+            <a:pPr marL="0" indent="0">
+              <a:buNone/>
+            </a:pPr>
+            <a:r>
+              <a:rPr lang="en-US" sz="1150" i="1" dirty="0">
+                <a:solidFill>
+                  <a:srgbClr val="6B7A8D"/>
+                </a:solidFill>
+                <a:latin typeface="Times New Roman" panose="02020603050405020304" pitchFamily="18" charset="0"/>
+                <a:ea typeface="Calibri" pitchFamily="34" charset="-122"/>
+                <a:cs typeface="Times New Roman" panose="02020603050405020304" pitchFamily="18" charset="0"/>
+              </a:rPr>
+              <a:t>Binary modeling target: Suspicious and Fraudulent/Scam are combined into a single Fraud-risk positive class.</a:t>
+            </a:r>
+            <a:endParaRPr lang="en-US" sz="1150" dirty="0">
+              <a:latin typeface="Times New Roman" panose="02020603050405020304" pitchFamily="18" charset="0"/>
+              <a:cs typeface="Times New Roman" panose="02020603050405020304" pitchFamily="18" charset="0"/>
+            </a:endParaRPr>
+          </a:p>
+        </p:txBody>
+      </p:sp>
+      <p:graphicFrame>
+        <p:nvGraphicFramePr>
+          <p:cNvPr id="17" name="Table 0"/>
+          <p:cNvGraphicFramePr>
+            <a:graphicFrameLocks noGrp="1"/>
+          </p:cNvGraphicFramePr>
+          <p:nvPr>
+            <p:extLst>
+              <p:ext uri="{D42A27DB-BD31-4B8C-83A1-F6EECF244321}">
+                <p14:modId xmlns:p14="http://schemas.microsoft.com/office/powerpoint/2010/main" val="1579011935"/>
+              </p:ext>
+            </p:extLst>
+          </p:nvPr>
+        </p:nvGraphicFramePr>
+        <p:xfrm>
+          <a:off x="548640" y="4160520"/>
+          <a:ext cx="10607040" cy="2286000"/>
+        </p:xfrm>
+        <a:graphic>
+          <a:graphicData uri="http://schemas.openxmlformats.org/drawingml/2006/table">
+            <a:tbl>
+              <a:tblPr/>
+              <a:tblGrid>
+                <a:gridCol w="2103120">
+                  <a:extLst>
+                    <a:ext uri="{9D8B030D-6E8A-4147-A177-3AD203B41FA5}">
+                      <a16:colId xmlns:a16="http://schemas.microsoft.com/office/drawing/2014/main" val="20000"/>
+                    </a:ext>
+                  </a:extLst>
+                </a:gridCol>
+                <a:gridCol w="8503920">
+                  <a:extLst>
+                    <a:ext uri="{9D8B030D-6E8A-4147-A177-3AD203B41FA5}">
+                      <a16:colId xmlns:a16="http://schemas.microsoft.com/office/drawing/2014/main" val="20001"/>
+                    </a:ext>
+                  </a:extLst>
+                </a:gridCol>
+              </a:tblGrid>
+              <a:tr h="457200">
+                <a:tc>
+                  <a:txBody>
+                    <a:bodyPr/>
+                    <a:lstStyle/>
+                    <a:p>
+                      <a:pPr marL="0" indent="0">
+                        <a:buNone/>
+                      </a:pPr>
+                      <a:r>
+                        <a:rPr lang="en-US" sz="1200" b="1" dirty="0">
+                          <a:solidFill>
+                            <a:srgbClr val="FFFFFF"/>
+                          </a:solidFill>
+                          <a:latin typeface="Calibri" pitchFamily="34" charset="0"/>
+                          <a:ea typeface="Calibri" pitchFamily="34" charset="-122"/>
+                          <a:cs typeface="Calibri" pitchFamily="34" charset="-120"/>
+                        </a:rPr>
+                        <a:t>Feature group</a:t>
+                      </a:r>
+                      <a:endParaRPr lang="en-US" sz="1200" dirty="0">
+                        <a:latin typeface="Calibri" charset="0"/>
+                        <a:ea typeface="Calibri" charset="0"/>
+                        <a:cs typeface="Calibri" charset="0"/>
+                      </a:endParaRPr>
+                    </a:p>
+                  </a:txBody>
+                  <a:tcPr anchor="ctr">
+                    <a:lnL w="12700" cap="flat" cmpd="sng" algn="ctr">
+                      <a:solidFill>
+                        <a:srgbClr val="E1E6ED"/>
+                      </a:solidFill>
+                      <a:prstDash val="solid"/>
+                      <a:round/>
+                      <a:headEnd type="none" w="med" len="med"/>
+                      <a:tailEnd type="none" w="med" len="med"/>
+                    </a:lnL>
+                    <a:lnR w="12700" cap="flat" cmpd="sng" algn="ctr">
+                      <a:solidFill>
+                        <a:srgbClr val="E1E6ED"/>
+                      </a:solidFill>
+                      <a:prstDash val="solid"/>
+                      <a:round/>
+                      <a:headEnd type="none" w="med" len="med"/>
+                      <a:tailEnd type="none" w="med" len="med"/>
+                    </a:lnR>
+                    <a:lnT w="12700" cap="flat" cmpd="sng" algn="ctr">
+                      <a:solidFill>
+                        <a:srgbClr val="E1E6ED"/>
+                      </a:solidFill>
+                      <a:prstDash val="solid"/>
+                      <a:round/>
+                      <a:headEnd type="none" w="med" len="med"/>
+                      <a:tailEnd type="none" w="med" len="med"/>
+                    </a:lnT>
+                    <a:lnB w="12700" cap="flat" cmpd="sng" algn="ctr">
+                      <a:solidFill>
+                        <a:srgbClr val="E1E6ED"/>
+                      </a:solidFill>
+                      <a:prstDash val="solid"/>
+                      <a:round/>
+                      <a:headEnd type="none" w="med" len="med"/>
+                      <a:tailEnd type="none" w="med" len="med"/>
+                    </a:lnB>
+                    <a:solidFill>
+                      <a:srgbClr val="1B2A4A"/>
+                    </a:solidFill>
+                  </a:tcPr>
+                </a:tc>
+                <a:tc>
+                  <a:txBody>
+                    <a:bodyPr/>
+                    <a:lstStyle/>
+                    <a:p>
+                      <a:pPr marL="0" indent="0">
+                        <a:buNone/>
+                      </a:pPr>
+                      <a:r>
+                        <a:rPr lang="en-US" sz="1200" b="1" dirty="0">
+                          <a:solidFill>
+                            <a:srgbClr val="FFFFFF"/>
+                          </a:solidFill>
+                          <a:latin typeface="Calibri" pitchFamily="34" charset="0"/>
+                          <a:ea typeface="Calibri" pitchFamily="34" charset="-122"/>
+                          <a:cs typeface="Calibri" pitchFamily="34" charset="-120"/>
+                        </a:rPr>
+                        <a:t>Examples</a:t>
+                      </a:r>
+                      <a:endParaRPr lang="en-US" sz="1200" dirty="0">
+                        <a:latin typeface="Calibri" charset="0"/>
+                        <a:ea typeface="Calibri" charset="0"/>
+                        <a:cs typeface="Calibri" charset="0"/>
+                      </a:endParaRPr>
+                    </a:p>
+                  </a:txBody>
+                  <a:tcPr anchor="ctr">
+                    <a:lnL w="12700" cap="flat" cmpd="sng" algn="ctr">
+                      <a:solidFill>
+                        <a:srgbClr val="E1E6ED"/>
+                      </a:solidFill>
+                      <a:prstDash val="solid"/>
+                      <a:round/>
+                      <a:headEnd type="none" w="med" len="med"/>
+                      <a:tailEnd type="none" w="med" len="med"/>
+                    </a:lnL>
+                    <a:lnR w="12700" cap="flat" cmpd="sng" algn="ctr">
+                      <a:solidFill>
+                        <a:srgbClr val="E1E6ED"/>
+                      </a:solidFill>
+                      <a:prstDash val="solid"/>
+                      <a:round/>
+                      <a:headEnd type="none" w="med" len="med"/>
+                      <a:tailEnd type="none" w="med" len="med"/>
+                    </a:lnR>
+                    <a:lnT w="12700" cap="flat" cmpd="sng" algn="ctr">
+                      <a:solidFill>
+                        <a:srgbClr val="E1E6ED"/>
+                      </a:solidFill>
+                      <a:prstDash val="solid"/>
+                      <a:round/>
+                      <a:headEnd type="none" w="med" len="med"/>
+                      <a:tailEnd type="none" w="med" len="med"/>
+                    </a:lnT>
+                    <a:lnB w="12700" cap="flat" cmpd="sng" algn="ctr">
+                      <a:solidFill>
+                        <a:srgbClr val="E1E6ED"/>
+                      </a:solidFill>
+                      <a:prstDash val="solid"/>
+                      <a:round/>
+                      <a:headEnd type="none" w="med" len="med"/>
+                      <a:tailEnd type="none" w="med" len="med"/>
+                    </a:lnB>
+                    <a:solidFill>
+                      <a:srgbClr val="1B2A4A"/>
+                    </a:solidFill>
+                  </a:tcPr>
+                </a:tc>
+                <a:extLst>
+                  <a:ext uri="{0D108BD9-81ED-4DB2-BD59-A6C34878D82A}">
+                    <a16:rowId xmlns:a16="http://schemas.microsoft.com/office/drawing/2014/main" val="10000"/>
+                  </a:ext>
+                </a:extLst>
+              </a:tr>
+              <a:tr h="457200">
+                <a:tc>
+                  <a:txBody>
+                    <a:bodyPr/>
+                    <a:lstStyle/>
+                    <a:p>
+                      <a:pPr marL="0" indent="0">
+                        <a:buNone/>
+                      </a:pPr>
+                      <a:r>
+                        <a:rPr lang="en-US" sz="1100" dirty="0">
+                          <a:solidFill>
+                            <a:srgbClr val="33414F"/>
+                          </a:solidFill>
+                          <a:latin typeface="Calibri" pitchFamily="34" charset="0"/>
+                          <a:ea typeface="Calibri" pitchFamily="34" charset="-122"/>
+                          <a:cs typeface="Calibri" pitchFamily="34" charset="-120"/>
+                        </a:rPr>
+                        <a:t>Text</a:t>
+                      </a:r>
+                      <a:endParaRPr lang="en-US" sz="1100" dirty="0">
+                        <a:latin typeface="Calibri" charset="0"/>
+                        <a:ea typeface="Calibri" charset="0"/>
+                        <a:cs typeface="Calibri" charset="0"/>
+                      </a:endParaRPr>
+                    </a:p>
+                  </a:txBody>
+                  <a:tcPr anchor="ctr">
+                    <a:lnL w="12700" cap="flat" cmpd="sng" algn="ctr">
+                      <a:solidFill>
+                        <a:srgbClr val="E1E6ED"/>
+                      </a:solidFill>
+                      <a:prstDash val="solid"/>
+                      <a:round/>
+                      <a:headEnd type="none" w="med" len="med"/>
+                      <a:tailEnd type="none" w="med" len="med"/>
+                    </a:lnL>
+                    <a:lnR w="12700" cap="flat" cmpd="sng" algn="ctr">
+                      <a:solidFill>
+                        <a:srgbClr val="E1E6ED"/>
+                      </a:solidFill>
+                      <a:prstDash val="solid"/>
+                      <a:round/>
+                      <a:headEnd type="none" w="med" len="med"/>
+                      <a:tailEnd type="none" w="med" len="med"/>
+                    </a:lnR>
+                    <a:lnT w="12700" cap="flat" cmpd="sng" algn="ctr">
+                      <a:solidFill>
+                        <a:srgbClr val="E1E6ED"/>
+                      </a:solidFill>
+                      <a:prstDash val="solid"/>
+                      <a:round/>
+                      <a:headEnd type="none" w="med" len="med"/>
+                      <a:tailEnd type="none" w="med" len="med"/>
+                    </a:lnT>
+                    <a:lnB w="12700" cap="flat" cmpd="sng" algn="ctr">
+                      <a:solidFill>
+                        <a:srgbClr val="E1E6ED"/>
+                      </a:solidFill>
+                      <a:prstDash val="solid"/>
+                      <a:round/>
+                      <a:headEnd type="none" w="med" len="med"/>
+                      <a:tailEnd type="none" w="med" len="med"/>
+                    </a:lnB>
+                  </a:tcPr>
+                </a:tc>
+                <a:tc>
+                  <a:txBody>
+                    <a:bodyPr/>
+                    <a:lstStyle/>
+                    <a:p>
+                      <a:pPr marL="0" indent="0">
+                        <a:buNone/>
+                      </a:pPr>
+                      <a:r>
+                        <a:rPr lang="en-US" sz="1100" dirty="0">
+                          <a:solidFill>
+                            <a:srgbClr val="33414F"/>
+                          </a:solidFill>
+                          <a:latin typeface="Calibri" pitchFamily="34" charset="0"/>
+                          <a:ea typeface="Calibri" pitchFamily="34" charset="-122"/>
+                          <a:cs typeface="Calibri" pitchFamily="34" charset="-120"/>
+                        </a:rPr>
+                        <a:t>title + description + requirements → TF-IDF, 1–2 n-grams, 50K-word vocabulary</a:t>
+                      </a:r>
+                      <a:endParaRPr lang="en-US" sz="1100" dirty="0">
+                        <a:latin typeface="Calibri" charset="0"/>
+                        <a:ea typeface="Calibri" charset="0"/>
+                        <a:cs typeface="Calibri" charset="0"/>
+                      </a:endParaRPr>
+                    </a:p>
+                  </a:txBody>
+                  <a:tcPr anchor="ctr">
+                    <a:lnL w="12700" cap="flat" cmpd="sng" algn="ctr">
+                      <a:solidFill>
+                        <a:srgbClr val="E1E6ED"/>
+                      </a:solidFill>
+                      <a:prstDash val="solid"/>
+                      <a:round/>
+                      <a:headEnd type="none" w="med" len="med"/>
+                      <a:tailEnd type="none" w="med" len="med"/>
+                    </a:lnL>
+                    <a:lnR w="12700" cap="flat" cmpd="sng" algn="ctr">
+                      <a:solidFill>
+                        <a:srgbClr val="E1E6ED"/>
+                      </a:solidFill>
+                      <a:prstDash val="solid"/>
+                      <a:round/>
+                      <a:headEnd type="none" w="med" len="med"/>
+                      <a:tailEnd type="none" w="med" len="med"/>
+                    </a:lnR>
+                    <a:lnT w="12700" cap="flat" cmpd="sng" algn="ctr">
+                      <a:solidFill>
+                        <a:srgbClr val="E1E6ED"/>
+                      </a:solidFill>
+                      <a:prstDash val="solid"/>
+                      <a:round/>
+                      <a:headEnd type="none" w="med" len="med"/>
+                      <a:tailEnd type="none" w="med" len="med"/>
+                    </a:lnT>
+                    <a:lnB w="12700" cap="flat" cmpd="sng" algn="ctr">
+                      <a:solidFill>
+                        <a:srgbClr val="E1E6ED"/>
+                      </a:solidFill>
+                      <a:prstDash val="solid"/>
+                      <a:round/>
+                      <a:headEnd type="none" w="med" len="med"/>
+                      <a:tailEnd type="none" w="med" len="med"/>
+                    </a:lnB>
+                  </a:tcPr>
+                </a:tc>
+                <a:extLst>
+                  <a:ext uri="{0D108BD9-81ED-4DB2-BD59-A6C34878D82A}">
+                    <a16:rowId xmlns:a16="http://schemas.microsoft.com/office/drawing/2014/main" val="10001"/>
+                  </a:ext>
+                </a:extLst>
+              </a:tr>
+              <a:tr h="457200">
+                <a:tc>
+                  <a:txBody>
+                    <a:bodyPr/>
+                    <a:lstStyle/>
+                    <a:p>
+                      <a:pPr marL="0" indent="0">
+                        <a:buNone/>
+                      </a:pPr>
+                      <a:r>
+                        <a:rPr lang="en-US" sz="1100" dirty="0">
+                          <a:solidFill>
+                            <a:srgbClr val="33414F"/>
+                          </a:solidFill>
+                          <a:latin typeface="Calibri" pitchFamily="34" charset="0"/>
+                          <a:ea typeface="Calibri" pitchFamily="34" charset="-122"/>
+                          <a:cs typeface="Calibri" pitchFamily="34" charset="-120"/>
+                        </a:rPr>
+                        <a:t>Structured</a:t>
+                      </a:r>
+                      <a:endParaRPr lang="en-US" sz="1100" dirty="0">
+                        <a:latin typeface="Calibri" charset="0"/>
+                        <a:ea typeface="Calibri" charset="0"/>
+                        <a:cs typeface="Calibri" charset="0"/>
+                      </a:endParaRPr>
+                    </a:p>
+                  </a:txBody>
+                  <a:tcPr anchor="ctr">
+                    <a:lnL w="12700" cap="flat" cmpd="sng" algn="ctr">
+                      <a:solidFill>
+                        <a:srgbClr val="E1E6ED"/>
+                      </a:solidFill>
+                      <a:prstDash val="solid"/>
+                      <a:round/>
+                      <a:headEnd type="none" w="med" len="med"/>
+                      <a:tailEnd type="none" w="med" len="med"/>
+                    </a:lnL>
+                    <a:lnR w="12700" cap="flat" cmpd="sng" algn="ctr">
+                      <a:solidFill>
+                        <a:srgbClr val="E1E6ED"/>
+                      </a:solidFill>
+                      <a:prstDash val="solid"/>
+                      <a:round/>
+                      <a:headEnd type="none" w="med" len="med"/>
+                      <a:tailEnd type="none" w="med" len="med"/>
+                    </a:lnR>
+                    <a:lnT w="12700" cap="flat" cmpd="sng" algn="ctr">
+                      <a:solidFill>
+                        <a:srgbClr val="E1E6ED"/>
+                      </a:solidFill>
+                      <a:prstDash val="solid"/>
+                      <a:round/>
+                      <a:headEnd type="none" w="med" len="med"/>
+                      <a:tailEnd type="none" w="med" len="med"/>
+                    </a:lnT>
+                    <a:lnB w="12700" cap="flat" cmpd="sng" algn="ctr">
+                      <a:solidFill>
+                        <a:srgbClr val="E1E6ED"/>
+                      </a:solidFill>
+                      <a:prstDash val="solid"/>
+                      <a:round/>
+                      <a:headEnd type="none" w="med" len="med"/>
+                      <a:tailEnd type="none" w="med" len="med"/>
+                    </a:lnB>
+                  </a:tcPr>
+                </a:tc>
+                <a:tc>
+                  <a:txBody>
+                    <a:bodyPr/>
+                    <a:lstStyle/>
+                    <a:p>
+                      <a:pPr marL="0" indent="0">
+                        <a:buNone/>
+                      </a:pPr>
+                      <a:r>
+                        <a:rPr lang="en-US" sz="1100" dirty="0">
+                          <a:solidFill>
+                            <a:srgbClr val="33414F"/>
+                          </a:solidFill>
+                          <a:latin typeface="Calibri" pitchFamily="34" charset="0"/>
+                          <a:ea typeface="Calibri" pitchFamily="34" charset="-122"/>
+                          <a:cs typeface="Calibri" pitchFamily="34" charset="-120"/>
+                        </a:rPr>
+                        <a:t>company, location, industry, work type, salary range, experience level, qualification</a:t>
+                      </a:r>
+                      <a:endParaRPr lang="en-US" sz="1100" dirty="0">
+                        <a:latin typeface="Calibri" charset="0"/>
+                        <a:ea typeface="Calibri" charset="0"/>
+                        <a:cs typeface="Calibri" charset="0"/>
+                      </a:endParaRPr>
+                    </a:p>
+                  </a:txBody>
+                  <a:tcPr anchor="ctr">
+                    <a:lnL w="12700" cap="flat" cmpd="sng" algn="ctr">
+                      <a:solidFill>
+                        <a:srgbClr val="E1E6ED"/>
+                      </a:solidFill>
+                      <a:prstDash val="solid"/>
+                      <a:round/>
+                      <a:headEnd type="none" w="med" len="med"/>
+                      <a:tailEnd type="none" w="med" len="med"/>
+                    </a:lnL>
+                    <a:lnR w="12700" cap="flat" cmpd="sng" algn="ctr">
+                      <a:solidFill>
+                        <a:srgbClr val="E1E6ED"/>
+                      </a:solidFill>
+                      <a:prstDash val="solid"/>
+                      <a:round/>
+                      <a:headEnd type="none" w="med" len="med"/>
+                      <a:tailEnd type="none" w="med" len="med"/>
+                    </a:lnR>
+                    <a:lnT w="12700" cap="flat" cmpd="sng" algn="ctr">
+                      <a:solidFill>
+                        <a:srgbClr val="E1E6ED"/>
+                      </a:solidFill>
+                      <a:prstDash val="solid"/>
+                      <a:round/>
+                      <a:headEnd type="none" w="med" len="med"/>
+                      <a:tailEnd type="none" w="med" len="med"/>
+                    </a:lnT>
+                    <a:lnB w="12700" cap="flat" cmpd="sng" algn="ctr">
+                      <a:solidFill>
+                        <a:srgbClr val="E1E6ED"/>
+                      </a:solidFill>
+                      <a:prstDash val="solid"/>
+                      <a:round/>
+                      <a:headEnd type="none" w="med" len="med"/>
+                      <a:tailEnd type="none" w="med" len="med"/>
+                    </a:lnB>
+                  </a:tcPr>
+                </a:tc>
+                <a:extLst>
+                  <a:ext uri="{0D108BD9-81ED-4DB2-BD59-A6C34878D82A}">
+                    <a16:rowId xmlns:a16="http://schemas.microsoft.com/office/drawing/2014/main" val="10002"/>
+                  </a:ext>
+                </a:extLst>
+              </a:tr>
+              <a:tr h="457200">
+                <a:tc>
+                  <a:txBody>
+                    <a:bodyPr/>
+                    <a:lstStyle/>
+                    <a:p>
+                      <a:pPr marL="0" indent="0">
+                        <a:buNone/>
+                      </a:pPr>
+                      <a:r>
+                        <a:rPr lang="en-US" sz="1100" dirty="0">
+                          <a:solidFill>
+                            <a:srgbClr val="33414F"/>
+                          </a:solidFill>
+                          <a:latin typeface="Calibri" pitchFamily="34" charset="0"/>
+                          <a:ea typeface="Calibri" pitchFamily="34" charset="-122"/>
+                          <a:cs typeface="Calibri" pitchFamily="34" charset="-120"/>
+                        </a:rPr>
+                        <a:t>Engineered</a:t>
+                      </a:r>
+                      <a:endParaRPr lang="en-US" sz="1100" dirty="0">
+                        <a:latin typeface="Calibri" charset="0"/>
+                        <a:ea typeface="Calibri" charset="0"/>
+                        <a:cs typeface="Calibri" charset="0"/>
+                      </a:endParaRPr>
+                    </a:p>
+                  </a:txBody>
+                  <a:tcPr anchor="ctr">
+                    <a:lnL w="12700" cap="flat" cmpd="sng" algn="ctr">
+                      <a:solidFill>
+                        <a:srgbClr val="E1E6ED"/>
+                      </a:solidFill>
+                      <a:prstDash val="solid"/>
+                      <a:round/>
+                      <a:headEnd type="none" w="med" len="med"/>
+                      <a:tailEnd type="none" w="med" len="med"/>
+                    </a:lnL>
+                    <a:lnR w="12700" cap="flat" cmpd="sng" algn="ctr">
+                      <a:solidFill>
+                        <a:srgbClr val="E1E6ED"/>
+                      </a:solidFill>
+                      <a:prstDash val="solid"/>
+                      <a:round/>
+                      <a:headEnd type="none" w="med" len="med"/>
+                      <a:tailEnd type="none" w="med" len="med"/>
+                    </a:lnR>
+                    <a:lnT w="12700" cap="flat" cmpd="sng" algn="ctr">
+                      <a:solidFill>
+                        <a:srgbClr val="E1E6ED"/>
+                      </a:solidFill>
+                      <a:prstDash val="solid"/>
+                      <a:round/>
+                      <a:headEnd type="none" w="med" len="med"/>
+                      <a:tailEnd type="none" w="med" len="med"/>
+                    </a:lnT>
+                    <a:lnB w="12700" cap="flat" cmpd="sng" algn="ctr">
+                      <a:solidFill>
+                        <a:srgbClr val="E1E6ED"/>
+                      </a:solidFill>
+                      <a:prstDash val="solid"/>
+                      <a:round/>
+                      <a:headEnd type="none" w="med" len="med"/>
+                      <a:tailEnd type="none" w="med" len="med"/>
+                    </a:lnB>
+                  </a:tcPr>
+                </a:tc>
+                <a:tc>
+                  <a:txBody>
+                    <a:bodyPr/>
+                    <a:lstStyle/>
+                    <a:p>
+                      <a:pPr marL="0" indent="0">
+                        <a:buNone/>
+                      </a:pPr>
+                      <a:r>
+                        <a:rPr lang="en-US" sz="1100" dirty="0">
+                          <a:solidFill>
+                            <a:srgbClr val="33414F"/>
+                          </a:solidFill>
+                          <a:latin typeface="Calibri" pitchFamily="34" charset="0"/>
+                          <a:ea typeface="Calibri" pitchFamily="34" charset="-122"/>
+                          <a:cs typeface="Calibri" pitchFamily="34" charset="-120"/>
+                        </a:rPr>
+                        <a:t>text lengths, word counts, URL/email/phone counts, uppercase-word count, missing-field flags</a:t>
+                      </a:r>
+                      <a:endParaRPr lang="en-US" sz="1100" dirty="0">
+                        <a:latin typeface="Calibri" charset="0"/>
+                        <a:ea typeface="Calibri" charset="0"/>
+                        <a:cs typeface="Calibri" charset="0"/>
+                      </a:endParaRPr>
+                    </a:p>
+                  </a:txBody>
+                  <a:tcPr anchor="ctr">
+                    <a:lnL w="12700" cap="flat" cmpd="sng" algn="ctr">
+                      <a:solidFill>
+                        <a:srgbClr val="E1E6ED"/>
+                      </a:solidFill>
+                      <a:prstDash val="solid"/>
+                      <a:round/>
+                      <a:headEnd type="none" w="med" len="med"/>
+                      <a:tailEnd type="none" w="med" len="med"/>
+                    </a:lnL>
+                    <a:lnR w="12700" cap="flat" cmpd="sng" algn="ctr">
+                      <a:solidFill>
+                        <a:srgbClr val="E1E6ED"/>
+                      </a:solidFill>
+                      <a:prstDash val="solid"/>
+                      <a:round/>
+                      <a:headEnd type="none" w="med" len="med"/>
+                      <a:tailEnd type="none" w="med" len="med"/>
+                    </a:lnR>
+                    <a:lnT w="12700" cap="flat" cmpd="sng" algn="ctr">
+                      <a:solidFill>
+                        <a:srgbClr val="E1E6ED"/>
+                      </a:solidFill>
+                      <a:prstDash val="solid"/>
+                      <a:round/>
+                      <a:headEnd type="none" w="med" len="med"/>
+                      <a:tailEnd type="none" w="med" len="med"/>
+                    </a:lnT>
+                    <a:lnB w="12700" cap="flat" cmpd="sng" algn="ctr">
+                      <a:solidFill>
+                        <a:srgbClr val="E1E6ED"/>
+                      </a:solidFill>
+                      <a:prstDash val="solid"/>
+                      <a:round/>
+                      <a:headEnd type="none" w="med" len="med"/>
+                      <a:tailEnd type="none" w="med" len="med"/>
+                    </a:lnB>
+                  </a:tcPr>
+                </a:tc>
+                <a:extLst>
+                  <a:ext uri="{0D108BD9-81ED-4DB2-BD59-A6C34878D82A}">
+                    <a16:rowId xmlns:a16="http://schemas.microsoft.com/office/drawing/2014/main" val="10003"/>
+                  </a:ext>
+                </a:extLst>
+              </a:tr>
+              <a:tr h="457200">
+                <a:tc>
+                  <a:txBody>
+                    <a:bodyPr/>
+                    <a:lstStyle/>
+                    <a:p>
+                      <a:pPr marL="0" indent="0">
+                        <a:buNone/>
+                      </a:pPr>
+                      <a:r>
+                        <a:rPr lang="en-US" sz="1100" dirty="0">
+                          <a:solidFill>
+                            <a:srgbClr val="33414F"/>
+                          </a:solidFill>
+                          <a:latin typeface="Calibri" pitchFamily="34" charset="0"/>
+                          <a:ea typeface="Calibri" pitchFamily="34" charset="-122"/>
+                          <a:cs typeface="Calibri" pitchFamily="34" charset="-120"/>
+                        </a:rPr>
+                        <a:t>Label</a:t>
+                      </a:r>
+                      <a:endParaRPr lang="en-US" sz="1100" dirty="0">
+                        <a:latin typeface="Calibri" charset="0"/>
+                        <a:ea typeface="Calibri" charset="0"/>
+                        <a:cs typeface="Calibri" charset="0"/>
+                      </a:endParaRPr>
+                    </a:p>
+                  </a:txBody>
+                  <a:tcPr anchor="ctr">
+                    <a:lnL w="12700" cap="flat" cmpd="sng" algn="ctr">
+                      <a:solidFill>
+                        <a:srgbClr val="E1E6ED"/>
+                      </a:solidFill>
+                      <a:prstDash val="solid"/>
+                      <a:round/>
+                      <a:headEnd type="none" w="med" len="med"/>
+                      <a:tailEnd type="none" w="med" len="med"/>
+                    </a:lnL>
+                    <a:lnR w="12700" cap="flat" cmpd="sng" algn="ctr">
+                      <a:solidFill>
+                        <a:srgbClr val="E1E6ED"/>
+                      </a:solidFill>
+                      <a:prstDash val="solid"/>
+                      <a:round/>
+                      <a:headEnd type="none" w="med" len="med"/>
+                      <a:tailEnd type="none" w="med" len="med"/>
+                    </a:lnR>
+                    <a:lnT w="12700" cap="flat" cmpd="sng" algn="ctr">
+                      <a:solidFill>
+                        <a:srgbClr val="E1E6ED"/>
+                      </a:solidFill>
+                      <a:prstDash val="solid"/>
+                      <a:round/>
+                      <a:headEnd type="none" w="med" len="med"/>
+                      <a:tailEnd type="none" w="med" len="med"/>
+                    </a:lnT>
+                    <a:lnB w="12700" cap="flat" cmpd="sng" algn="ctr">
+                      <a:solidFill>
+                        <a:srgbClr val="E1E6ED"/>
+                      </a:solidFill>
+                      <a:prstDash val="solid"/>
+                      <a:round/>
+                      <a:headEnd type="none" w="med" len="med"/>
+                      <a:tailEnd type="none" w="med" len="med"/>
+                    </a:lnB>
+                  </a:tcPr>
+                </a:tc>
+                <a:tc>
+                  <a:txBody>
+                    <a:bodyPr/>
+                    <a:lstStyle/>
+                    <a:p>
+                      <a:pPr marL="0" indent="0">
+                        <a:buNone/>
+                      </a:pPr>
+                      <a:r>
+                        <a:rPr lang="en-US" sz="1100" dirty="0">
+                          <a:solidFill>
+                            <a:srgbClr val="33414F"/>
+                          </a:solidFill>
+                          <a:latin typeface="Calibri" pitchFamily="34" charset="0"/>
+                          <a:ea typeface="Calibri" pitchFamily="34" charset="-122"/>
+                          <a:cs typeface="Calibri" pitchFamily="34" charset="-120"/>
+                        </a:rPr>
+                        <a:t>is_fraud (0/1/2 source scheme) → binary Fraud-risk target for modeling</a:t>
+                      </a:r>
+                      <a:endParaRPr lang="en-US" sz="1100" dirty="0">
+                        <a:latin typeface="Calibri" charset="0"/>
+                        <a:ea typeface="Calibri" charset="0"/>
+                        <a:cs typeface="Calibri" charset="0"/>
+                      </a:endParaRPr>
+                    </a:p>
+                  </a:txBody>
+                  <a:tcPr anchor="ctr">
+                    <a:lnL w="12700" cap="flat" cmpd="sng" algn="ctr">
+                      <a:solidFill>
+                        <a:srgbClr val="E1E6ED"/>
+                      </a:solidFill>
+                      <a:prstDash val="solid"/>
+                      <a:round/>
+                      <a:headEnd type="none" w="med" len="med"/>
+                      <a:tailEnd type="none" w="med" len="med"/>
+                    </a:lnL>
+                    <a:lnR w="12700" cap="flat" cmpd="sng" algn="ctr">
+                      <a:solidFill>
+                        <a:srgbClr val="E1E6ED"/>
+                      </a:solidFill>
+                      <a:prstDash val="solid"/>
+                      <a:round/>
+                      <a:headEnd type="none" w="med" len="med"/>
+                      <a:tailEnd type="none" w="med" len="med"/>
+                    </a:lnR>
+                    <a:lnT w="12700" cap="flat" cmpd="sng" algn="ctr">
+                      <a:solidFill>
+                        <a:srgbClr val="E1E6ED"/>
+                      </a:solidFill>
+                      <a:prstDash val="solid"/>
+                      <a:round/>
+                      <a:headEnd type="none" w="med" len="med"/>
+                      <a:tailEnd type="none" w="med" len="med"/>
+                    </a:lnT>
+                    <a:lnB w="12700" cap="flat" cmpd="sng" algn="ctr">
+                      <a:solidFill>
+                        <a:srgbClr val="E1E6ED"/>
+                      </a:solidFill>
+                      <a:prstDash val="solid"/>
+                      <a:round/>
+                      <a:headEnd type="none" w="med" len="med"/>
+                      <a:tailEnd type="none" w="med" len="med"/>
+                    </a:lnB>
+                  </a:tcPr>
+                </a:tc>
+                <a:extLst>
+                  <a:ext uri="{0D108BD9-81ED-4DB2-BD59-A6C34878D82A}">
+                    <a16:rowId xmlns:a16="http://schemas.microsoft.com/office/drawing/2014/main" val="10004"/>
+                  </a:ext>
+                </a:extLst>
+              </a:tr>
+            </a:tbl>
+          </a:graphicData>
+        </a:graphic>
+      </p:graphicFrame>
+    </p:spTree>
+  </p:cSld>
+  <p:clrMapOvr>
+    <a:masterClrMapping/>
+  </p:clrMapOvr>
+</p:sld>
+</file>
+
+<file path=ppt/slides/slide11.xml><?xml version="1.0" encoding="utf-8"?>
 <p:sld xmlns:a="http://schemas.openxmlformats.org/drawingml/2006/main" xmlns:r="http://schemas.openxmlformats.org/officeDocument/2006/relationships" xmlns:p="http://schemas.openxmlformats.org/presentationml/2006/main">
   <p:cSld name="Slide 11">
     <p:bg>
@@ -3490,7 +4070,7 @@
 </p:sld>
 </file>
 
-<file path=ppt/slides/slide11.xml><?xml version="1.0" encoding="utf-8"?>
+<file path=ppt/slides/slide12.xml><?xml version="1.0" encoding="utf-8"?>
 <p:sld xmlns:a="http://schemas.openxmlformats.org/drawingml/2006/main" xmlns:r="http://schemas.openxmlformats.org/officeDocument/2006/relationships" xmlns:p="http://schemas.openxmlformats.org/presentationml/2006/main">
   <p:cSld name="Slide 12">
     <p:bg>
@@ -3523,7 +4103,7 @@
         </p:nvSpPr>
         <p:spPr>
           <a:xfrm>
-            <a:off x="548640" y="-198120"/>
+            <a:off x="548640" y="94488"/>
             <a:ext cx="8961120" cy="685800"/>
           </a:xfrm>
           <a:prstGeom prst="rect">
@@ -3565,7 +4145,7 @@
         </p:nvSpPr>
         <p:spPr>
           <a:xfrm>
-            <a:off x="411480" y="762000"/>
+            <a:off x="411480" y="1109472"/>
             <a:ext cx="6400800" cy="3651120"/>
           </a:xfrm>
           <a:prstGeom prst="roundRect">
@@ -3600,7 +4180,7 @@
         </p:blipFill>
         <p:spPr>
           <a:xfrm>
-            <a:off x="548640" y="899160"/>
+            <a:off x="548640" y="1292352"/>
             <a:ext cx="6126480" cy="3376800"/>
           </a:xfrm>
           <a:prstGeom prst="rect">
@@ -3616,7 +4196,7 @@
         </p:nvSpPr>
         <p:spPr>
           <a:xfrm>
-            <a:off x="7040880" y="899160"/>
+            <a:off x="7040880" y="1155192"/>
             <a:ext cx="4572000" cy="3651120"/>
           </a:xfrm>
           <a:prstGeom prst="roundRect">
@@ -3852,7 +4432,7 @@
 </p:sld>
 </file>
 
-<file path=ppt/slides/slide12.xml><?xml version="1.0" encoding="utf-8"?>
+<file path=ppt/slides/slide13.xml><?xml version="1.0" encoding="utf-8"?>
 <p:sld xmlns:a="http://schemas.openxmlformats.org/drawingml/2006/main" xmlns:r="http://schemas.openxmlformats.org/officeDocument/2006/relationships" xmlns:p="http://schemas.openxmlformats.org/presentationml/2006/main">
   <p:cSld name="Slide 13">
     <p:bg>
@@ -4171,7 +4751,7 @@
 </p:sld>
 </file>
 
-<file path=ppt/slides/slide13.xml><?xml version="1.0" encoding="utf-8"?>
+<file path=ppt/slides/slide14.xml><?xml version="1.0" encoding="utf-8"?>
 <p:sld xmlns:a="http://schemas.openxmlformats.org/drawingml/2006/main" xmlns:r="http://schemas.openxmlformats.org/officeDocument/2006/relationships" xmlns:p="http://schemas.openxmlformats.org/presentationml/2006/main">
   <p:cSld name="Slide 14">
     <p:bg>
@@ -5066,322 +5646,6 @@
               </a:rPr>
               <a:t>Real Kenyan-market generalization has not yet been fully established</a:t>
             </a:r>
-          </a:p>
-        </p:txBody>
-      </p:sp>
-    </p:spTree>
-  </p:cSld>
-  <p:clrMapOvr>
-    <a:masterClrMapping/>
-  </p:clrMapOvr>
-</p:sld>
-</file>
-
-<file path=ppt/slides/slide14.xml><?xml version="1.0" encoding="utf-8"?>
-<p:sld xmlns:a="http://schemas.openxmlformats.org/drawingml/2006/main" xmlns:r="http://schemas.openxmlformats.org/officeDocument/2006/relationships" xmlns:p="http://schemas.openxmlformats.org/presentationml/2006/main">
-  <p:cSld name="Slide 15">
-    <p:bg>
-      <p:bgPr>
-        <a:solidFill>
-          <a:srgbClr val="F5F7FA"/>
-        </a:solidFill>
-        <a:effectLst/>
-      </p:bgPr>
-    </p:bg>
-    <p:spTree>
-      <p:nvGrpSpPr>
-        <p:cNvPr id="1" name=""/>
-        <p:cNvGrpSpPr/>
-        <p:nvPr/>
-      </p:nvGrpSpPr>
-      <p:grpSpPr>
-        <a:xfrm>
-          <a:off x="0" y="0"/>
-          <a:ext cx="0" cy="0"/>
-          <a:chOff x="0" y="0"/>
-          <a:chExt cx="0" cy="0"/>
-        </a:xfrm>
-      </p:grpSpPr>
-      <p:sp>
-        <p:nvSpPr>
-          <p:cNvPr id="2" name="Text 0"/>
-          <p:cNvSpPr txBox="1"/>
-          <p:nvPr/>
-        </p:nvSpPr>
-        <p:spPr>
-          <a:xfrm>
-            <a:off x="548640" y="411480"/>
-            <a:ext cx="8961120" cy="685800"/>
-          </a:xfrm>
-          <a:prstGeom prst="rect">
-            <a:avLst/>
-          </a:prstGeom>
-          <a:noFill/>
-          <a:ln/>
-        </p:spPr>
-        <p:txBody>
-          <a:bodyPr wrap="square" lIns="0" tIns="0" rIns="0" bIns="0" rtlCol="0" anchor="t"/>
-          <a:lstStyle/>
-          <a:p>
-            <a:pPr marL="0" indent="0">
-              <a:buNone/>
-            </a:pPr>
-            <a:r>
-              <a:rPr lang="en-US" sz="3000" b="1" dirty="0">
-                <a:solidFill>
-                  <a:srgbClr val="1B2A4A"/>
-                </a:solidFill>
-                <a:latin typeface="Cambria" pitchFamily="34" charset="0"/>
-                <a:ea typeface="Cambria" pitchFamily="34" charset="-122"/>
-                <a:cs typeface="Cambria" pitchFamily="34" charset="-120"/>
-              </a:rPr>
-              <a:t>Conclusion &amp; Recommendations</a:t>
-            </a:r>
-            <a:endParaRPr lang="en-US" sz="3000" dirty="0"/>
-          </a:p>
-        </p:txBody>
-      </p:sp>
-      <p:sp>
-        <p:nvSpPr>
-          <p:cNvPr id="3" name="Shape 1"/>
-          <p:cNvSpPr/>
-          <p:nvPr/>
-        </p:nvSpPr>
-        <p:spPr>
-          <a:xfrm>
-            <a:off x="10424160" y="411480"/>
-            <a:ext cx="594360" cy="594360"/>
-          </a:xfrm>
-          <a:prstGeom prst="ellipse">
-            <a:avLst/>
-          </a:prstGeom>
-          <a:solidFill>
-            <a:srgbClr val="4A6FA5"/>
-          </a:solidFill>
-          <a:ln/>
-        </p:spPr>
-      </p:sp>
-      <p:pic>
-        <p:nvPicPr>
-          <p:cNvPr id="4" name="Image 0" descr="preencoded.png"/>
-          <p:cNvPicPr>
-            <a:picLocks noChangeAspect="1"/>
-          </p:cNvPicPr>
-          <p:nvPr/>
-        </p:nvPicPr>
-        <p:blipFill>
-          <a:blip r:embed="rId3"/>
-          <a:stretch>
-            <a:fillRect/>
-          </a:stretch>
-        </p:blipFill>
-        <p:spPr>
-          <a:xfrm>
-            <a:off x="10588752" y="576072"/>
-            <a:ext cx="265176" cy="265176"/>
-          </a:xfrm>
-          <a:prstGeom prst="rect">
-            <a:avLst/>
-          </a:prstGeom>
-        </p:spPr>
-      </p:pic>
-      <p:sp>
-        <p:nvSpPr>
-          <p:cNvPr id="5" name="Text 2"/>
-          <p:cNvSpPr txBox="1"/>
-          <p:nvPr/>
-        </p:nvSpPr>
-        <p:spPr>
-          <a:xfrm>
-            <a:off x="548640" y="1417320"/>
-            <a:ext cx="10515600" cy="640080"/>
-          </a:xfrm>
-          <a:prstGeom prst="rect">
-            <a:avLst/>
-          </a:prstGeom>
-          <a:noFill/>
-          <a:ln/>
-        </p:spPr>
-        <p:txBody>
-          <a:bodyPr wrap="square" lIns="0" tIns="0" rIns="0" bIns="0" rtlCol="0" anchor="ctr"/>
-          <a:lstStyle/>
-          <a:p>
-            <a:pPr marL="0" indent="0">
-              <a:buNone/>
-            </a:pPr>
-            <a:r>
-              <a:rPr lang="en-US" sz="1450" i="1" dirty="0">
-                <a:solidFill>
-                  <a:srgbClr val="1B2A4A"/>
-                </a:solidFill>
-                <a:latin typeface="Calibri" pitchFamily="34" charset="0"/>
-                <a:ea typeface="Calibri" pitchFamily="34" charset="-122"/>
-                <a:cs typeface="Calibri" pitchFamily="34" charset="-120"/>
-              </a:rPr>
-              <a:t>The tuned hybrid Logistic Regression provides a promising fraud-risk ranking and classification workflow on the real EMSCAD benchmark holdout.</a:t>
-            </a:r>
-            <a:endParaRPr lang="en-US" sz="1450" dirty="0"/>
-          </a:p>
-        </p:txBody>
-      </p:sp>
-      <p:sp>
-        <p:nvSpPr>
-          <p:cNvPr id="6" name="Text 3"/>
-          <p:cNvSpPr txBox="1"/>
-          <p:nvPr/>
-        </p:nvSpPr>
-        <p:spPr>
-          <a:xfrm>
-            <a:off x="548640" y="2286000"/>
-            <a:ext cx="10515600" cy="3200400"/>
-          </a:xfrm>
-          <a:prstGeom prst="rect">
-            <a:avLst/>
-          </a:prstGeom>
-          <a:noFill/>
-          <a:ln/>
-        </p:spPr>
-        <p:txBody>
-          <a:bodyPr wrap="square" lIns="0" tIns="0" rIns="0" bIns="0" rtlCol="0" anchor="t"/>
-          <a:lstStyle/>
-          <a:p>
-            <a:pPr marL="342900" indent="-342900" algn="l">
-              <a:lnSpc>
-                <a:spcPct val="112000"/>
-              </a:lnSpc>
-              <a:spcAft>
-                <a:spcPts val="600"/>
-              </a:spcAft>
-              <a:buSzPct val="100000"/>
-              <a:buFont typeface="Arial" panose="020B0604020202020204" pitchFamily="34" charset="0"/>
-              <a:buChar char="•"/>
-            </a:pPr>
-            <a:r>
-              <a:rPr sz="1900" dirty="0">
-                <a:latin typeface="Times New Roman" panose="02020603050405020304" pitchFamily="18" charset="0"/>
-                <a:cs typeface="Times New Roman" panose="02020603050405020304" pitchFamily="18" charset="0"/>
-              </a:rPr>
-              <a:t>Collect and manually label Kenyan job postings to build real ground truth</a:t>
-            </a:r>
-            <a:r>
-              <a:rPr lang="en-US" sz="1900" dirty="0">
-                <a:latin typeface="Times New Roman" panose="02020603050405020304" pitchFamily="18" charset="0"/>
-                <a:cs typeface="Times New Roman" panose="02020603050405020304" pitchFamily="18" charset="0"/>
-              </a:rPr>
-              <a:t>.</a:t>
-            </a:r>
-            <a:endParaRPr lang="en-US" sz="1500" dirty="0">
-              <a:latin typeface="Times New Roman" panose="02020603050405020304" pitchFamily="18" charset="0"/>
-              <a:cs typeface="Times New Roman" panose="02020603050405020304" pitchFamily="18" charset="0"/>
-            </a:endParaRPr>
-          </a:p>
-          <a:p>
-            <a:pPr marL="342900" indent="-342900">
-              <a:spcAft>
-                <a:spcPts val="600"/>
-              </a:spcAft>
-              <a:buFont typeface="Arial" panose="020B0604020202020204" pitchFamily="34" charset="0"/>
-              <a:buChar char="•"/>
-            </a:pPr>
-            <a:r>
-              <a:rPr sz="1900" dirty="0">
-                <a:latin typeface="Times New Roman" panose="02020603050405020304" pitchFamily="18" charset="0"/>
-                <a:cs typeface="Times New Roman" panose="02020603050405020304" pitchFamily="18" charset="0"/>
-              </a:rPr>
-              <a:t>Validate red-flag patterns against confirmed local scam cases</a:t>
-            </a:r>
-            <a:r>
-              <a:rPr lang="en-US" sz="1900" dirty="0">
-                <a:latin typeface="Times New Roman" panose="02020603050405020304" pitchFamily="18" charset="0"/>
-                <a:cs typeface="Times New Roman" panose="02020603050405020304" pitchFamily="18" charset="0"/>
-              </a:rPr>
-              <a:t>.</a:t>
-            </a:r>
-            <a:endParaRPr sz="1900" dirty="0">
-              <a:latin typeface="Times New Roman" panose="02020603050405020304" pitchFamily="18" charset="0"/>
-              <a:cs typeface="Times New Roman" panose="02020603050405020304" pitchFamily="18" charset="0"/>
-            </a:endParaRPr>
-          </a:p>
-          <a:p>
-            <a:pPr marL="342900" indent="-342900">
-              <a:spcAft>
-                <a:spcPts val="600"/>
-              </a:spcAft>
-              <a:buFont typeface="Arial" panose="020B0604020202020204" pitchFamily="34" charset="0"/>
-              <a:buChar char="•"/>
-            </a:pPr>
-            <a:r>
-              <a:rPr sz="1900" dirty="0">
-                <a:latin typeface="Times New Roman" panose="02020603050405020304" pitchFamily="18" charset="0"/>
-                <a:cs typeface="Times New Roman" panose="02020603050405020304" pitchFamily="18" charset="0"/>
-              </a:rPr>
-              <a:t>Maintain and expand the registry, blacklist, and fuzzy-impersonation verification layer</a:t>
-            </a:r>
-            <a:r>
-              <a:rPr lang="en-US" sz="1900" dirty="0">
-                <a:latin typeface="Times New Roman" panose="02020603050405020304" pitchFamily="18" charset="0"/>
-                <a:cs typeface="Times New Roman" panose="02020603050405020304" pitchFamily="18" charset="0"/>
-              </a:rPr>
-              <a:t>.</a:t>
-            </a:r>
-            <a:endParaRPr sz="1900" dirty="0">
-              <a:latin typeface="Times New Roman" panose="02020603050405020304" pitchFamily="18" charset="0"/>
-              <a:cs typeface="Times New Roman" panose="02020603050405020304" pitchFamily="18" charset="0"/>
-            </a:endParaRPr>
-          </a:p>
-          <a:p>
-            <a:pPr marL="342900" indent="-342900">
-              <a:spcAft>
-                <a:spcPts val="600"/>
-              </a:spcAft>
-              <a:buFont typeface="Arial" panose="020B0604020202020204" pitchFamily="34" charset="0"/>
-              <a:buChar char="•"/>
-            </a:pPr>
-            <a:r>
-              <a:rPr sz="1900" dirty="0">
-                <a:latin typeface="Times New Roman" panose="02020603050405020304" pitchFamily="18" charset="0"/>
-                <a:cs typeface="Times New Roman" panose="02020603050405020304" pitchFamily="18" charset="0"/>
-              </a:rPr>
-              <a:t>Pilot human-in-the-loop review with a job board or public-sector partner</a:t>
-            </a:r>
-            <a:r>
-              <a:rPr lang="en-US" sz="1900" dirty="0">
-                <a:latin typeface="Times New Roman" panose="02020603050405020304" pitchFamily="18" charset="0"/>
-                <a:cs typeface="Times New Roman" panose="02020603050405020304" pitchFamily="18" charset="0"/>
-              </a:rPr>
-              <a:t>.</a:t>
-            </a:r>
-            <a:endParaRPr sz="1900" dirty="0">
-              <a:latin typeface="Times New Roman" panose="02020603050405020304" pitchFamily="18" charset="0"/>
-              <a:cs typeface="Times New Roman" panose="02020603050405020304" pitchFamily="18" charset="0"/>
-            </a:endParaRPr>
-          </a:p>
-          <a:p>
-            <a:pPr marL="342900" indent="-342900">
-              <a:spcAft>
-                <a:spcPts val="600"/>
-              </a:spcAft>
-              <a:buFont typeface="Arial" panose="020B0604020202020204" pitchFamily="34" charset="0"/>
-              <a:buChar char="•"/>
-            </a:pPr>
-            <a:r>
-              <a:rPr sz="1900" dirty="0">
-                <a:latin typeface="Times New Roman" panose="02020603050405020304" pitchFamily="18" charset="0"/>
-                <a:cs typeface="Times New Roman" panose="02020603050405020304" pitchFamily="18" charset="0"/>
-              </a:rPr>
-              <a:t>Monitor drift and reassess the operating threshold over time</a:t>
-            </a:r>
-            <a:r>
-              <a:rPr lang="en-US" sz="1900" dirty="0">
-                <a:latin typeface="Times New Roman" panose="02020603050405020304" pitchFamily="18" charset="0"/>
-                <a:cs typeface="Times New Roman" panose="02020603050405020304" pitchFamily="18" charset="0"/>
-              </a:rPr>
-              <a:t>.</a:t>
-            </a:r>
-            <a:endParaRPr sz="1900" dirty="0">
-              <a:latin typeface="Times New Roman" panose="02020603050405020304" pitchFamily="18" charset="0"/>
-              <a:cs typeface="Times New Roman" panose="02020603050405020304" pitchFamily="18" charset="0"/>
-            </a:endParaRPr>
           </a:p>
         </p:txBody>
       </p:sp>
@@ -5655,6 +5919,800 @@
 
 <file path=ppt/slides/slide2.xml><?xml version="1.0" encoding="utf-8"?>
 <p:sld xmlns:a="http://schemas.openxmlformats.org/drawingml/2006/main" xmlns:r="http://schemas.openxmlformats.org/officeDocument/2006/relationships" xmlns:p="http://schemas.openxmlformats.org/presentationml/2006/main">
+  <p:cSld>
+    <p:bg>
+      <p:bgPr>
+        <a:solidFill>
+          <a:srgbClr val="FFFFFF"/>
+        </a:solidFill>
+        <a:effectLst/>
+      </p:bgPr>
+    </p:bg>
+    <p:spTree>
+      <p:nvGrpSpPr>
+        <p:cNvPr id="1" name=""/>
+        <p:cNvGrpSpPr/>
+        <p:nvPr/>
+      </p:nvGrpSpPr>
+      <p:grpSpPr>
+        <a:xfrm>
+          <a:off x="0" y="0"/>
+          <a:ext cx="0" cy="0"/>
+          <a:chOff x="0" y="0"/>
+          <a:chExt cx="0" cy="0"/>
+        </a:xfrm>
+      </p:grpSpPr>
+      <p:sp>
+        <p:nvSpPr>
+          <p:cNvPr id="2" name="Rectangle 1"/>
+          <p:cNvSpPr/>
+          <p:nvPr/>
+        </p:nvSpPr>
+        <p:spPr>
+          <a:xfrm>
+            <a:off x="0" y="0"/>
+            <a:ext cx="12192000" cy="109728"/>
+          </a:xfrm>
+          <a:prstGeom prst="rect">
+            <a:avLst/>
+          </a:prstGeom>
+          <a:solidFill>
+            <a:srgbClr val="1B2B41"/>
+          </a:solidFill>
+          <a:ln>
+            <a:noFill/>
+          </a:ln>
+        </p:spPr>
+        <p:style>
+          <a:lnRef idx="1">
+            <a:schemeClr val="accent1"/>
+          </a:lnRef>
+          <a:fillRef idx="3">
+            <a:schemeClr val="accent1"/>
+          </a:fillRef>
+          <a:effectRef idx="2">
+            <a:schemeClr val="accent1"/>
+          </a:effectRef>
+          <a:fontRef idx="minor">
+            <a:schemeClr val="lt1"/>
+          </a:fontRef>
+        </p:style>
+        <p:txBody>
+          <a:bodyPr rtlCol="0" anchor="ctr"/>
+          <a:lstStyle/>
+          <a:p>
+            <a:pPr algn="ctr"/>
+            <a:endParaRPr/>
+          </a:p>
+        </p:txBody>
+      </p:sp>
+      <p:sp>
+        <p:nvSpPr>
+          <p:cNvPr id="3" name="TextBox 2"/>
+          <p:cNvSpPr txBox="1"/>
+          <p:nvPr/>
+        </p:nvSpPr>
+        <p:spPr>
+          <a:xfrm>
+            <a:off x="548640" y="292608"/>
+            <a:ext cx="10972800" cy="548640"/>
+          </a:xfrm>
+          <a:prstGeom prst="rect">
+            <a:avLst/>
+          </a:prstGeom>
+          <a:noFill/>
+        </p:spPr>
+        <p:txBody>
+          <a:bodyPr wrap="none">
+            <a:spAutoFit/>
+          </a:bodyPr>
+          <a:lstStyle/>
+          <a:p>
+            <a:pPr>
+              <a:defRPr sz="2500" b="1">
+                <a:solidFill>
+                  <a:srgbClr val="1B2B41"/>
+                </a:solidFill>
+                <a:latin typeface="Aptos Display"/>
+              </a:defRPr>
+            </a:pPr>
+            <a:r>
+              <a:t>Project Participants &amp; Roles</a:t>
+            </a:r>
+          </a:p>
+        </p:txBody>
+      </p:sp>
+      <p:sp>
+        <p:nvSpPr>
+          <p:cNvPr id="4" name="Rounded Rectangle 3"/>
+          <p:cNvSpPr/>
+          <p:nvPr/>
+        </p:nvSpPr>
+        <p:spPr>
+          <a:xfrm>
+            <a:off x="594360" y="1143000"/>
+            <a:ext cx="3246120" cy="1965960"/>
+          </a:xfrm>
+          <a:prstGeom prst="roundRect">
+            <a:avLst/>
+          </a:prstGeom>
+          <a:solidFill>
+            <a:srgbClr val="F8F9FB"/>
+          </a:solidFill>
+          <a:ln w="15240">
+            <a:solidFill>
+              <a:srgbClr val="1B2B41"/>
+            </a:solidFill>
+          </a:ln>
+        </p:spPr>
+        <p:style>
+          <a:lnRef idx="1">
+            <a:schemeClr val="accent1"/>
+          </a:lnRef>
+          <a:fillRef idx="3">
+            <a:schemeClr val="accent1"/>
+          </a:fillRef>
+          <a:effectRef idx="2">
+            <a:schemeClr val="accent1"/>
+          </a:effectRef>
+          <a:fontRef idx="minor">
+            <a:schemeClr val="lt1"/>
+          </a:fontRef>
+        </p:style>
+        <p:txBody>
+          <a:bodyPr rtlCol="0" anchor="ctr"/>
+          <a:lstStyle/>
+          <a:p>
+            <a:pPr algn="ctr"/>
+            <a:endParaRPr/>
+          </a:p>
+        </p:txBody>
+      </p:sp>
+      <p:sp>
+        <p:nvSpPr>
+          <p:cNvPr id="5" name="TextBox 4"/>
+          <p:cNvSpPr txBox="1"/>
+          <p:nvPr/>
+        </p:nvSpPr>
+        <p:spPr>
+          <a:xfrm>
+            <a:off x="777240" y="1344168"/>
+            <a:ext cx="2880360" cy="411480"/>
+          </a:xfrm>
+          <a:prstGeom prst="rect">
+            <a:avLst/>
+          </a:prstGeom>
+          <a:noFill/>
+        </p:spPr>
+        <p:txBody>
+          <a:bodyPr wrap="none">
+            <a:spAutoFit/>
+          </a:bodyPr>
+          <a:lstStyle/>
+          <a:p>
+            <a:pPr algn="ctr">
+              <a:defRPr sz="1600" b="1">
+                <a:solidFill>
+                  <a:srgbClr val="1B2B41"/>
+                </a:solidFill>
+                <a:latin typeface="Aptos"/>
+              </a:defRPr>
+            </a:pPr>
+            <a:r>
+              <a:t>Melisa Achieng</a:t>
+            </a:r>
+          </a:p>
+        </p:txBody>
+      </p:sp>
+      <p:sp>
+        <p:nvSpPr>
+          <p:cNvPr id="6" name="TextBox 5"/>
+          <p:cNvSpPr txBox="1"/>
+          <p:nvPr/>
+        </p:nvSpPr>
+        <p:spPr>
+          <a:xfrm>
+            <a:off x="777240" y="1892808"/>
+            <a:ext cx="2880360" cy="461665"/>
+          </a:xfrm>
+          <a:prstGeom prst="rect">
+            <a:avLst/>
+          </a:prstGeom>
+          <a:noFill/>
+        </p:spPr>
+        <p:txBody>
+          <a:bodyPr wrap="square">
+            <a:spAutoFit/>
+          </a:bodyPr>
+          <a:lstStyle/>
+          <a:p>
+            <a:pPr algn="ctr">
+              <a:defRPr sz="1200">
+                <a:solidFill>
+                  <a:srgbClr val="46505C"/>
+                </a:solidFill>
+                <a:latin typeface="Aptos"/>
+              </a:defRPr>
+            </a:pPr>
+            <a:endParaRPr dirty="0"/>
+          </a:p>
+          <a:p>
+            <a:pPr algn="ctr">
+              <a:defRPr sz="1200">
+                <a:solidFill>
+                  <a:srgbClr val="46505C"/>
+                </a:solidFill>
+                <a:latin typeface="Aptos"/>
+              </a:defRPr>
+            </a:pPr>
+            <a:r>
+              <a:rPr dirty="0"/>
+              <a:t>Data Cleaning</a:t>
+            </a:r>
+            <a:r>
+              <a:rPr lang="en-US" dirty="0"/>
+              <a:t> &amp; Data Collection.</a:t>
+            </a:r>
+            <a:endParaRPr dirty="0"/>
+          </a:p>
+        </p:txBody>
+      </p:sp>
+      <p:sp>
+        <p:nvSpPr>
+          <p:cNvPr id="7" name="Rounded Rectangle 6"/>
+          <p:cNvSpPr/>
+          <p:nvPr/>
+        </p:nvSpPr>
+        <p:spPr>
+          <a:xfrm>
+            <a:off x="4160520" y="1143000"/>
+            <a:ext cx="3246120" cy="1965960"/>
+          </a:xfrm>
+          <a:prstGeom prst="roundRect">
+            <a:avLst/>
+          </a:prstGeom>
+          <a:solidFill>
+            <a:srgbClr val="F8F9FB"/>
+          </a:solidFill>
+          <a:ln w="15240">
+            <a:solidFill>
+              <a:srgbClr val="1B2B41"/>
+            </a:solidFill>
+          </a:ln>
+        </p:spPr>
+        <p:style>
+          <a:lnRef idx="1">
+            <a:schemeClr val="accent1"/>
+          </a:lnRef>
+          <a:fillRef idx="3">
+            <a:schemeClr val="accent1"/>
+          </a:fillRef>
+          <a:effectRef idx="2">
+            <a:schemeClr val="accent1"/>
+          </a:effectRef>
+          <a:fontRef idx="minor">
+            <a:schemeClr val="lt1"/>
+          </a:fontRef>
+        </p:style>
+        <p:txBody>
+          <a:bodyPr rtlCol="0" anchor="ctr"/>
+          <a:lstStyle/>
+          <a:p>
+            <a:pPr algn="ctr"/>
+            <a:endParaRPr/>
+          </a:p>
+        </p:txBody>
+      </p:sp>
+      <p:sp>
+        <p:nvSpPr>
+          <p:cNvPr id="8" name="TextBox 7"/>
+          <p:cNvSpPr txBox="1"/>
+          <p:nvPr/>
+        </p:nvSpPr>
+        <p:spPr>
+          <a:xfrm>
+            <a:off x="4343400" y="1344168"/>
+            <a:ext cx="2880360" cy="411480"/>
+          </a:xfrm>
+          <a:prstGeom prst="rect">
+            <a:avLst/>
+          </a:prstGeom>
+          <a:noFill/>
+        </p:spPr>
+        <p:txBody>
+          <a:bodyPr wrap="none">
+            <a:spAutoFit/>
+          </a:bodyPr>
+          <a:lstStyle/>
+          <a:p>
+            <a:pPr algn="ctr">
+              <a:defRPr sz="1600" b="1">
+                <a:solidFill>
+                  <a:srgbClr val="1B2B41"/>
+                </a:solidFill>
+                <a:latin typeface="Aptos"/>
+              </a:defRPr>
+            </a:pPr>
+            <a:r>
+              <a:t>Briannah Chelangat</a:t>
+            </a:r>
+          </a:p>
+        </p:txBody>
+      </p:sp>
+      <p:sp>
+        <p:nvSpPr>
+          <p:cNvPr id="9" name="TextBox 8"/>
+          <p:cNvSpPr txBox="1"/>
+          <p:nvPr/>
+        </p:nvSpPr>
+        <p:spPr>
+          <a:xfrm>
+            <a:off x="4343400" y="1892808"/>
+            <a:ext cx="2880360" cy="461665"/>
+          </a:xfrm>
+          <a:prstGeom prst="rect">
+            <a:avLst/>
+          </a:prstGeom>
+          <a:noFill/>
+        </p:spPr>
+        <p:txBody>
+          <a:bodyPr wrap="square">
+            <a:spAutoFit/>
+          </a:bodyPr>
+          <a:lstStyle/>
+          <a:p>
+            <a:pPr algn="ctr">
+              <a:defRPr sz="1200">
+                <a:solidFill>
+                  <a:srgbClr val="46505C"/>
+                </a:solidFill>
+                <a:latin typeface="Aptos"/>
+              </a:defRPr>
+            </a:pPr>
+            <a:r>
+              <a:rPr lang="en-US" dirty="0"/>
+              <a:t>Backend, Government Dashboard UI, Deployment &amp; Data collection.</a:t>
+            </a:r>
+            <a:endParaRPr dirty="0"/>
+          </a:p>
+        </p:txBody>
+      </p:sp>
+      <p:sp>
+        <p:nvSpPr>
+          <p:cNvPr id="10" name="Rounded Rectangle 9"/>
+          <p:cNvSpPr/>
+          <p:nvPr/>
+        </p:nvSpPr>
+        <p:spPr>
+          <a:xfrm>
+            <a:off x="7726679" y="1143000"/>
+            <a:ext cx="3246120" cy="1965960"/>
+          </a:xfrm>
+          <a:prstGeom prst="roundRect">
+            <a:avLst/>
+          </a:prstGeom>
+          <a:solidFill>
+            <a:srgbClr val="F8F9FB"/>
+          </a:solidFill>
+          <a:ln w="15240">
+            <a:solidFill>
+              <a:srgbClr val="1B2B41"/>
+            </a:solidFill>
+          </a:ln>
+        </p:spPr>
+        <p:style>
+          <a:lnRef idx="1">
+            <a:schemeClr val="accent1"/>
+          </a:lnRef>
+          <a:fillRef idx="3">
+            <a:schemeClr val="accent1"/>
+          </a:fillRef>
+          <a:effectRef idx="2">
+            <a:schemeClr val="accent1"/>
+          </a:effectRef>
+          <a:fontRef idx="minor">
+            <a:schemeClr val="lt1"/>
+          </a:fontRef>
+        </p:style>
+        <p:txBody>
+          <a:bodyPr rtlCol="0" anchor="ctr"/>
+          <a:lstStyle/>
+          <a:p>
+            <a:pPr algn="ctr"/>
+            <a:endParaRPr/>
+          </a:p>
+        </p:txBody>
+      </p:sp>
+      <p:sp>
+        <p:nvSpPr>
+          <p:cNvPr id="11" name="TextBox 10"/>
+          <p:cNvSpPr txBox="1"/>
+          <p:nvPr/>
+        </p:nvSpPr>
+        <p:spPr>
+          <a:xfrm>
+            <a:off x="7909559" y="1344168"/>
+            <a:ext cx="2880360" cy="411480"/>
+          </a:xfrm>
+          <a:prstGeom prst="rect">
+            <a:avLst/>
+          </a:prstGeom>
+          <a:noFill/>
+        </p:spPr>
+        <p:txBody>
+          <a:bodyPr wrap="none">
+            <a:spAutoFit/>
+          </a:bodyPr>
+          <a:lstStyle/>
+          <a:p>
+            <a:pPr algn="ctr">
+              <a:defRPr sz="1600" b="1">
+                <a:solidFill>
+                  <a:srgbClr val="1B2B41"/>
+                </a:solidFill>
+                <a:latin typeface="Aptos"/>
+              </a:defRPr>
+            </a:pPr>
+            <a:r>
+              <a:t>Christopher Kariuki</a:t>
+            </a:r>
+          </a:p>
+        </p:txBody>
+      </p:sp>
+      <p:sp>
+        <p:nvSpPr>
+          <p:cNvPr id="12" name="TextBox 11"/>
+          <p:cNvSpPr txBox="1"/>
+          <p:nvPr/>
+        </p:nvSpPr>
+        <p:spPr>
+          <a:xfrm>
+            <a:off x="7909559" y="1892808"/>
+            <a:ext cx="2880360" cy="646331"/>
+          </a:xfrm>
+          <a:prstGeom prst="rect">
+            <a:avLst/>
+          </a:prstGeom>
+          <a:noFill/>
+        </p:spPr>
+        <p:txBody>
+          <a:bodyPr wrap="square">
+            <a:spAutoFit/>
+          </a:bodyPr>
+          <a:lstStyle/>
+          <a:p>
+            <a:pPr algn="ctr">
+              <a:defRPr sz="1200">
+                <a:solidFill>
+                  <a:srgbClr val="46505C"/>
+                </a:solidFill>
+                <a:latin typeface="Aptos"/>
+              </a:defRPr>
+            </a:pPr>
+            <a:r>
+              <a:rPr dirty="0"/>
+              <a:t>EDA</a:t>
+            </a:r>
+            <a:r>
+              <a:rPr lang="en-US" dirty="0"/>
+              <a:t>, Data collection, </a:t>
+            </a:r>
+            <a:r>
+              <a:rPr dirty="0"/>
+              <a:t>Project Documentation &amp; PowerPoint </a:t>
+            </a:r>
+            <a:r>
+              <a:rPr lang="en-US" dirty="0"/>
+              <a:t> Deck </a:t>
+            </a:r>
+            <a:r>
+              <a:rPr dirty="0"/>
+              <a:t>creation</a:t>
+            </a:r>
+          </a:p>
+        </p:txBody>
+      </p:sp>
+      <p:sp>
+        <p:nvSpPr>
+          <p:cNvPr id="13" name="Rounded Rectangle 12"/>
+          <p:cNvSpPr/>
+          <p:nvPr/>
+        </p:nvSpPr>
+        <p:spPr>
+          <a:xfrm>
+            <a:off x="2331720" y="3657600"/>
+            <a:ext cx="3246120" cy="1965960"/>
+          </a:xfrm>
+          <a:prstGeom prst="roundRect">
+            <a:avLst/>
+          </a:prstGeom>
+          <a:solidFill>
+            <a:srgbClr val="F8F9FB"/>
+          </a:solidFill>
+          <a:ln w="15240">
+            <a:solidFill>
+              <a:srgbClr val="1B2B41"/>
+            </a:solidFill>
+          </a:ln>
+        </p:spPr>
+        <p:style>
+          <a:lnRef idx="1">
+            <a:schemeClr val="accent1"/>
+          </a:lnRef>
+          <a:fillRef idx="3">
+            <a:schemeClr val="accent1"/>
+          </a:fillRef>
+          <a:effectRef idx="2">
+            <a:schemeClr val="accent1"/>
+          </a:effectRef>
+          <a:fontRef idx="minor">
+            <a:schemeClr val="lt1"/>
+          </a:fontRef>
+        </p:style>
+        <p:txBody>
+          <a:bodyPr rtlCol="0" anchor="ctr"/>
+          <a:lstStyle/>
+          <a:p>
+            <a:pPr algn="ctr"/>
+            <a:endParaRPr/>
+          </a:p>
+        </p:txBody>
+      </p:sp>
+      <p:sp>
+        <p:nvSpPr>
+          <p:cNvPr id="14" name="TextBox 13"/>
+          <p:cNvSpPr txBox="1"/>
+          <p:nvPr/>
+        </p:nvSpPr>
+        <p:spPr>
+          <a:xfrm>
+            <a:off x="2514600" y="3858768"/>
+            <a:ext cx="2880360" cy="411480"/>
+          </a:xfrm>
+          <a:prstGeom prst="rect">
+            <a:avLst/>
+          </a:prstGeom>
+          <a:noFill/>
+        </p:spPr>
+        <p:txBody>
+          <a:bodyPr wrap="none">
+            <a:spAutoFit/>
+          </a:bodyPr>
+          <a:lstStyle/>
+          <a:p>
+            <a:pPr algn="ctr">
+              <a:defRPr sz="1600" b="1">
+                <a:solidFill>
+                  <a:srgbClr val="1B2B41"/>
+                </a:solidFill>
+                <a:latin typeface="Aptos"/>
+              </a:defRPr>
+            </a:pPr>
+            <a:r>
+              <a:t>Cleopas Karanja</a:t>
+            </a:r>
+          </a:p>
+        </p:txBody>
+      </p:sp>
+      <p:sp>
+        <p:nvSpPr>
+          <p:cNvPr id="15" name="TextBox 14"/>
+          <p:cNvSpPr txBox="1"/>
+          <p:nvPr/>
+        </p:nvSpPr>
+        <p:spPr>
+          <a:xfrm>
+            <a:off x="2514600" y="4407408"/>
+            <a:ext cx="2880360" cy="276999"/>
+          </a:xfrm>
+          <a:prstGeom prst="rect">
+            <a:avLst/>
+          </a:prstGeom>
+          <a:noFill/>
+        </p:spPr>
+        <p:txBody>
+          <a:bodyPr wrap="square">
+            <a:spAutoFit/>
+          </a:bodyPr>
+          <a:lstStyle/>
+          <a:p>
+            <a:pPr algn="ctr">
+              <a:defRPr sz="1200">
+                <a:solidFill>
+                  <a:srgbClr val="46505C"/>
+                </a:solidFill>
+                <a:latin typeface="Aptos"/>
+              </a:defRPr>
+            </a:pPr>
+            <a:r>
+              <a:rPr dirty="0"/>
+              <a:t>Modelling</a:t>
+            </a:r>
+            <a:r>
+              <a:rPr lang="en-US" dirty="0"/>
+              <a:t> &amp; Data collection.</a:t>
+            </a:r>
+            <a:endParaRPr dirty="0"/>
+          </a:p>
+        </p:txBody>
+      </p:sp>
+      <p:sp>
+        <p:nvSpPr>
+          <p:cNvPr id="16" name="Rounded Rectangle 15"/>
+          <p:cNvSpPr/>
+          <p:nvPr/>
+        </p:nvSpPr>
+        <p:spPr>
+          <a:xfrm>
+            <a:off x="5897880" y="3657600"/>
+            <a:ext cx="3246120" cy="1965960"/>
+          </a:xfrm>
+          <a:prstGeom prst="roundRect">
+            <a:avLst/>
+          </a:prstGeom>
+          <a:solidFill>
+            <a:srgbClr val="F8F9FB"/>
+          </a:solidFill>
+          <a:ln w="15240">
+            <a:solidFill>
+              <a:srgbClr val="1B2B41"/>
+            </a:solidFill>
+          </a:ln>
+        </p:spPr>
+        <p:style>
+          <a:lnRef idx="1">
+            <a:schemeClr val="accent1"/>
+          </a:lnRef>
+          <a:fillRef idx="3">
+            <a:schemeClr val="accent1"/>
+          </a:fillRef>
+          <a:effectRef idx="2">
+            <a:schemeClr val="accent1"/>
+          </a:effectRef>
+          <a:fontRef idx="minor">
+            <a:schemeClr val="lt1"/>
+          </a:fontRef>
+        </p:style>
+        <p:txBody>
+          <a:bodyPr rtlCol="0" anchor="ctr"/>
+          <a:lstStyle/>
+          <a:p>
+            <a:pPr algn="ctr"/>
+            <a:endParaRPr/>
+          </a:p>
+        </p:txBody>
+      </p:sp>
+      <p:sp>
+        <p:nvSpPr>
+          <p:cNvPr id="17" name="TextBox 16"/>
+          <p:cNvSpPr txBox="1"/>
+          <p:nvPr/>
+        </p:nvSpPr>
+        <p:spPr>
+          <a:xfrm>
+            <a:off x="6080760" y="3858768"/>
+            <a:ext cx="2880360" cy="411480"/>
+          </a:xfrm>
+          <a:prstGeom prst="rect">
+            <a:avLst/>
+          </a:prstGeom>
+          <a:noFill/>
+        </p:spPr>
+        <p:txBody>
+          <a:bodyPr wrap="none">
+            <a:spAutoFit/>
+          </a:bodyPr>
+          <a:lstStyle/>
+          <a:p>
+            <a:pPr algn="ctr">
+              <a:defRPr sz="1600" b="1">
+                <a:solidFill>
+                  <a:srgbClr val="1B2B41"/>
+                </a:solidFill>
+                <a:latin typeface="Aptos"/>
+              </a:defRPr>
+            </a:pPr>
+            <a:r>
+              <a:t>Alex Kinyua</a:t>
+            </a:r>
+          </a:p>
+        </p:txBody>
+      </p:sp>
+      <p:sp>
+        <p:nvSpPr>
+          <p:cNvPr id="18" name="TextBox 17"/>
+          <p:cNvSpPr txBox="1"/>
+          <p:nvPr/>
+        </p:nvSpPr>
+        <p:spPr>
+          <a:xfrm>
+            <a:off x="6080760" y="4407408"/>
+            <a:ext cx="2880360" cy="461665"/>
+          </a:xfrm>
+          <a:prstGeom prst="rect">
+            <a:avLst/>
+          </a:prstGeom>
+          <a:noFill/>
+        </p:spPr>
+        <p:txBody>
+          <a:bodyPr wrap="square">
+            <a:spAutoFit/>
+          </a:bodyPr>
+          <a:lstStyle/>
+          <a:p>
+            <a:pPr algn="ctr">
+              <a:defRPr sz="1200">
+                <a:solidFill>
+                  <a:srgbClr val="46505C"/>
+                </a:solidFill>
+                <a:latin typeface="Aptos"/>
+              </a:defRPr>
+            </a:pPr>
+            <a:r>
+              <a:rPr lang="en-US" dirty="0"/>
+              <a:t>Data collection, </a:t>
+            </a:r>
+            <a:r>
+              <a:rPr dirty="0"/>
+              <a:t>Backend, Repository Admin &amp; Deployment, </a:t>
+            </a:r>
+            <a:r>
+              <a:rPr lang="en-US" dirty="0"/>
+              <a:t>Job seeker UI.</a:t>
+            </a:r>
+            <a:r>
+              <a:rPr dirty="0"/>
+              <a:t> </a:t>
+            </a:r>
+          </a:p>
+        </p:txBody>
+      </p:sp>
+      <p:sp>
+        <p:nvSpPr>
+          <p:cNvPr id="19" name="TextBox 18"/>
+          <p:cNvSpPr txBox="1"/>
+          <p:nvPr/>
+        </p:nvSpPr>
+        <p:spPr>
+          <a:xfrm>
+            <a:off x="731520" y="6172200"/>
+            <a:ext cx="10698480" cy="320040"/>
+          </a:xfrm>
+          <a:prstGeom prst="rect">
+            <a:avLst/>
+          </a:prstGeom>
+          <a:noFill/>
+        </p:spPr>
+        <p:txBody>
+          <a:bodyPr wrap="none">
+            <a:spAutoFit/>
+          </a:bodyPr>
+          <a:lstStyle/>
+          <a:p>
+            <a:pPr algn="ctr">
+              <a:defRPr sz="1000">
+                <a:solidFill>
+                  <a:srgbClr val="46505C"/>
+                </a:solidFill>
+                <a:latin typeface="Aptos"/>
+              </a:defRPr>
+            </a:pPr>
+            <a:r>
+              <a:t>AI-Powered Job Scam Detection System | HAKIKI HIRE</a:t>
+            </a:r>
+          </a:p>
+        </p:txBody>
+      </p:sp>
+    </p:spTree>
+  </p:cSld>
+  <p:clrMapOvr>
+    <a:masterClrMapping/>
+  </p:clrMapOvr>
+</p:sld>
+</file>
+
+<file path=ppt/slides/slide3.xml><?xml version="1.0" encoding="utf-8"?>
+<p:sld xmlns:a="http://schemas.openxmlformats.org/drawingml/2006/main" xmlns:r="http://schemas.openxmlformats.org/officeDocument/2006/relationships" xmlns:p="http://schemas.openxmlformats.org/presentationml/2006/main">
   <p:cSld name="Slide 2">
     <p:bg>
       <p:bgPr>
@@ -5728,8 +6786,8 @@
         </p:nvSpPr>
         <p:spPr>
           <a:xfrm>
-            <a:off x="548640" y="1783080"/>
-            <a:ext cx="6858000" cy="4206240"/>
+            <a:off x="381000" y="1463040"/>
+            <a:ext cx="7025640" cy="4709160"/>
           </a:xfrm>
           <a:prstGeom prst="rect">
             <a:avLst/>
@@ -5743,133 +6801,270 @@
           <a:p>
             <a:pPr marL="342900" indent="-342900" algn="l">
               <a:lnSpc>
-                <a:spcPct val="112000"/>
+                <a:spcPct val="108000"/>
               </a:lnSpc>
               <a:spcAft>
                 <a:spcPts val="1200"/>
               </a:spcAft>
               <a:buSzPct val="100000"/>
               <a:buChar char="●"/>
-            </a:pPr>
-            <a:r>
-              <a:rPr lang="en-US" sz="1500" dirty="0">
+              <a:defRPr sz="1700">
+                <a:solidFill>
+                  <a:srgbClr val="46505C"/>
+                </a:solidFill>
+                <a:latin typeface="Aptos"/>
+              </a:defRPr>
+            </a:pPr>
+            <a:r>
+              <a:rPr sz="1600" dirty="0">
+                <a:latin typeface="Times New Roman" panose="02020603050405020304" pitchFamily="18" charset="0"/>
+                <a:cs typeface="Times New Roman" panose="02020603050405020304" pitchFamily="18" charset="0"/>
+              </a:rPr>
+              <a:t>Traditionally, job seekers often searched for opportunities through newspapers, notice boards, recruitment offices, and personal networks. As internet access became easier, job searching moved increasingly online, making it faster and easier for people to find and apply for jobs from anywhere. However, this wider and easier access has also created new opportunities for scammers to advertise fraudulent jobs and target job seekers online.</a:t>
+            </a:r>
+            <a:endParaRPr lang="en-US" sz="1600" dirty="0">
+              <a:latin typeface="Times New Roman" panose="02020603050405020304" pitchFamily="18" charset="0"/>
+              <a:cs typeface="Times New Roman" panose="02020603050405020304" pitchFamily="18" charset="0"/>
+            </a:endParaRPr>
+          </a:p>
+          <a:p>
+            <a:pPr marL="342900" marR="0" lvl="0" indent="-342900" algn="l" defTabSz="914400" rtl="0" eaLnBrk="1" fontAlgn="auto" latinLnBrk="0" hangingPunct="1">
+              <a:lnSpc>
+                <a:spcPct val="112000"/>
+              </a:lnSpc>
+              <a:spcBef>
+                <a:spcPts val="0"/>
+              </a:spcBef>
+              <a:spcAft>
+                <a:spcPts val="1200"/>
+              </a:spcAft>
+              <a:buClrTx/>
+              <a:buSzPct val="100000"/>
+              <a:buFontTx/>
+              <a:buChar char="●"/>
+              <a:tabLst/>
+              <a:defRPr/>
+            </a:pPr>
+            <a:r>
+              <a:rPr kumimoji="0" lang="en-US" sz="1600" b="0" i="0" u="none" strike="noStrike" kern="1200" cap="none" spc="0" normalizeH="0" baseline="0" noProof="0" dirty="0">
+                <a:ln>
+                  <a:noFill/>
+                </a:ln>
                 <a:solidFill>
                   <a:srgbClr val="33414F"/>
                 </a:solidFill>
+                <a:effectLst/>
+                <a:uLnTx/>
+                <a:uFillTx/>
                 <a:latin typeface="Times New Roman" panose="02020603050405020304" pitchFamily="18" charset="0"/>
                 <a:ea typeface="Calibri" pitchFamily="34" charset="-122"/>
                 <a:cs typeface="Times New Roman" panose="02020603050405020304" pitchFamily="18" charset="0"/>
               </a:rPr>
-              <a:t>Online recruitment has widened access to employment in Kenya — but also created new fraud vectors</a:t>
-            </a:r>
-            <a:endParaRPr lang="en-US" sz="1500" dirty="0">
+              <a:t>Job seekers may encounter upfront-fee requests, vague job descriptions, urgency language, impersonated employers, or suspicious contact channels</a:t>
+            </a:r>
+            <a:endParaRPr kumimoji="0" lang="en-US" sz="1600" b="0" i="0" u="none" strike="noStrike" kern="1200" cap="none" spc="0" normalizeH="0" baseline="0" noProof="0" dirty="0">
+              <a:ln>
+                <a:noFill/>
+              </a:ln>
+              <a:solidFill>
+                <a:prstClr val="black"/>
+              </a:solidFill>
+              <a:effectLst/>
+              <a:uLnTx/>
+              <a:uFillTx/>
               <a:latin typeface="Times New Roman" panose="02020603050405020304" pitchFamily="18" charset="0"/>
+              <a:ea typeface="+mn-ea"/>
               <a:cs typeface="Times New Roman" panose="02020603050405020304" pitchFamily="18" charset="0"/>
             </a:endParaRPr>
           </a:p>
           <a:p>
+            <a:pPr marL="342900" marR="0" lvl="0" indent="-342900" algn="l" defTabSz="914400" rtl="0" eaLnBrk="1" fontAlgn="auto" latinLnBrk="0" hangingPunct="1">
+              <a:lnSpc>
+                <a:spcPct val="112000"/>
+              </a:lnSpc>
+              <a:spcBef>
+                <a:spcPts val="0"/>
+              </a:spcBef>
+              <a:spcAft>
+                <a:spcPts val="1200"/>
+              </a:spcAft>
+              <a:buClrTx/>
+              <a:buSzPct val="100000"/>
+              <a:buFontTx/>
+              <a:buChar char="●"/>
+              <a:tabLst/>
+              <a:defRPr/>
+            </a:pPr>
+            <a:r>
+              <a:rPr kumimoji="0" lang="en-US" sz="1600" b="0" i="0" u="none" strike="noStrike" kern="1200" cap="none" spc="0" normalizeH="0" baseline="0" noProof="0" dirty="0">
+                <a:ln>
+                  <a:noFill/>
+                </a:ln>
+                <a:solidFill>
+                  <a:srgbClr val="33414F"/>
+                </a:solidFill>
+                <a:effectLst/>
+                <a:uLnTx/>
+                <a:uFillTx/>
+                <a:latin typeface="Times New Roman" panose="02020603050405020304" pitchFamily="18" charset="0"/>
+                <a:ea typeface="Calibri" pitchFamily="34" charset="-122"/>
+                <a:cs typeface="Times New Roman" panose="02020603050405020304" pitchFamily="18" charset="0"/>
+              </a:rPr>
+              <a:t>External evidence: FTC-reported US job-scam losses rose from ~$90M (2020) to ~$501M (2024)</a:t>
+            </a:r>
+            <a:endParaRPr kumimoji="0" lang="en-US" sz="1600" b="0" i="0" u="none" strike="noStrike" kern="1200" cap="none" spc="0" normalizeH="0" baseline="0" noProof="0" dirty="0">
+              <a:ln>
+                <a:noFill/>
+              </a:ln>
+              <a:solidFill>
+                <a:prstClr val="black"/>
+              </a:solidFill>
+              <a:effectLst/>
+              <a:uLnTx/>
+              <a:uFillTx/>
+              <a:latin typeface="Times New Roman" panose="02020603050405020304" pitchFamily="18" charset="0"/>
+              <a:ea typeface="+mn-ea"/>
+              <a:cs typeface="Times New Roman" panose="02020603050405020304" pitchFamily="18" charset="0"/>
+            </a:endParaRPr>
+          </a:p>
+          <a:p>
+            <a:pPr marL="342900" marR="0" lvl="0" indent="-342900" algn="l" defTabSz="914400" rtl="0" eaLnBrk="1" fontAlgn="auto" latinLnBrk="0" hangingPunct="1">
+              <a:lnSpc>
+                <a:spcPct val="112000"/>
+              </a:lnSpc>
+              <a:spcBef>
+                <a:spcPts val="0"/>
+              </a:spcBef>
+              <a:spcAft>
+                <a:spcPts val="1200"/>
+              </a:spcAft>
+              <a:buClrTx/>
+              <a:buSzPct val="100000"/>
+              <a:buFontTx/>
+              <a:buChar char="●"/>
+              <a:tabLst/>
+              <a:defRPr/>
+            </a:pPr>
+            <a:r>
+              <a:rPr kumimoji="0" lang="en-US" sz="1600" b="0" i="0" u="none" strike="noStrike" kern="1200" cap="none" spc="0" normalizeH="0" baseline="0" noProof="0" dirty="0">
+                <a:ln>
+                  <a:noFill/>
+                </a:ln>
+                <a:solidFill>
+                  <a:srgbClr val="33414F"/>
+                </a:solidFill>
+                <a:effectLst/>
+                <a:uLnTx/>
+                <a:uFillTx/>
+                <a:latin typeface="Times New Roman" panose="02020603050405020304" pitchFamily="18" charset="0"/>
+                <a:ea typeface="Calibri" pitchFamily="34" charset="-122"/>
+                <a:cs typeface="Times New Roman" panose="02020603050405020304" pitchFamily="18" charset="0"/>
+              </a:rPr>
+              <a:t>External evidence: a 2024 Kenyan DCI case reportedly affected ~1,000 job seekers</a:t>
+            </a:r>
+            <a:endParaRPr kumimoji="0" lang="en-US" sz="1600" b="0" i="0" u="none" strike="noStrike" kern="1200" cap="none" spc="0" normalizeH="0" baseline="0" noProof="0" dirty="0">
+              <a:ln>
+                <a:noFill/>
+              </a:ln>
+              <a:solidFill>
+                <a:prstClr val="black"/>
+              </a:solidFill>
+              <a:effectLst/>
+              <a:uLnTx/>
+              <a:uFillTx/>
+              <a:latin typeface="Times New Roman" panose="02020603050405020304" pitchFamily="18" charset="0"/>
+              <a:ea typeface="+mn-ea"/>
+              <a:cs typeface="Times New Roman" panose="02020603050405020304" pitchFamily="18" charset="0"/>
+            </a:endParaRPr>
+          </a:p>
+          <a:p>
+            <a:pPr marL="342900" marR="0" lvl="0" indent="-342900" algn="l" defTabSz="914400" rtl="0" eaLnBrk="1" fontAlgn="auto" latinLnBrk="0" hangingPunct="1">
+              <a:lnSpc>
+                <a:spcPct val="112000"/>
+              </a:lnSpc>
+              <a:spcBef>
+                <a:spcPts val="0"/>
+              </a:spcBef>
+              <a:spcAft>
+                <a:spcPts val="1200"/>
+              </a:spcAft>
+              <a:buClrTx/>
+              <a:buSzPct val="100000"/>
+              <a:buFontTx/>
+              <a:buChar char="●"/>
+              <a:tabLst/>
+              <a:defRPr/>
+            </a:pPr>
+            <a:r>
+              <a:rPr kumimoji="0" lang="en-US" sz="1600" b="0" i="0" u="none" strike="noStrike" kern="1200" cap="none" spc="0" normalizeH="0" baseline="0" noProof="0" dirty="0">
+                <a:ln>
+                  <a:noFill/>
+                </a:ln>
+                <a:solidFill>
+                  <a:srgbClr val="33414F"/>
+                </a:solidFill>
+                <a:effectLst/>
+                <a:uLnTx/>
+                <a:uFillTx/>
+                <a:latin typeface="Times New Roman" panose="02020603050405020304" pitchFamily="18" charset="0"/>
+                <a:ea typeface="Calibri" pitchFamily="34" charset="-122"/>
+                <a:cs typeface="Times New Roman" panose="02020603050405020304" pitchFamily="18" charset="0"/>
+              </a:rPr>
+              <a:t>The practical gap: job seekers need a way to prioritize verification before engaging with a posting</a:t>
+            </a:r>
+            <a:endParaRPr kumimoji="0" lang="en-US" sz="1600" b="0" i="0" u="none" strike="noStrike" kern="1200" cap="none" spc="0" normalizeH="0" baseline="0" noProof="0" dirty="0">
+              <a:ln>
+                <a:noFill/>
+              </a:ln>
+              <a:solidFill>
+                <a:prstClr val="black"/>
+              </a:solidFill>
+              <a:effectLst/>
+              <a:uLnTx/>
+              <a:uFillTx/>
+              <a:latin typeface="Times New Roman" panose="02020603050405020304" pitchFamily="18" charset="0"/>
+              <a:ea typeface="+mn-ea"/>
+              <a:cs typeface="Times New Roman" panose="02020603050405020304" pitchFamily="18" charset="0"/>
+            </a:endParaRPr>
+          </a:p>
+          <a:p>
             <a:pPr marL="342900" indent="-342900" algn="l">
               <a:lnSpc>
-                <a:spcPct val="112000"/>
+                <a:spcPct val="108000"/>
               </a:lnSpc>
               <a:spcAft>
                 <a:spcPts val="1200"/>
               </a:spcAft>
               <a:buSzPct val="100000"/>
               <a:buChar char="●"/>
-            </a:pPr>
-            <a:r>
-              <a:rPr lang="en-US" sz="1500" dirty="0">
-                <a:solidFill>
-                  <a:srgbClr val="33414F"/>
-                </a:solidFill>
-                <a:latin typeface="Times New Roman" panose="02020603050405020304" pitchFamily="18" charset="0"/>
-                <a:ea typeface="Calibri" pitchFamily="34" charset="-122"/>
-                <a:cs typeface="Times New Roman" panose="02020603050405020304" pitchFamily="18" charset="0"/>
-              </a:rPr>
-              <a:t>Job seekers may encounter upfront-fee requests, vague job descriptions, urgency language, impersonated employers, or suspicious contact channels</a:t>
-            </a:r>
-            <a:endParaRPr lang="en-US" sz="1500" dirty="0">
+              <a:defRPr sz="1700">
+                <a:solidFill>
+                  <a:srgbClr val="46505C"/>
+                </a:solidFill>
+                <a:latin typeface="Aptos"/>
+              </a:defRPr>
+            </a:pPr>
+            <a:endParaRPr lang="en-US" dirty="0">
               <a:latin typeface="Times New Roman" panose="02020603050405020304" pitchFamily="18" charset="0"/>
               <a:cs typeface="Times New Roman" panose="02020603050405020304" pitchFamily="18" charset="0"/>
             </a:endParaRPr>
           </a:p>
           <a:p>
-            <a:pPr marL="342900" indent="-342900" algn="l">
+            <a:pPr algn="l">
               <a:lnSpc>
-                <a:spcPct val="112000"/>
+                <a:spcPct val="108000"/>
               </a:lnSpc>
               <a:spcAft>
                 <a:spcPts val="1200"/>
               </a:spcAft>
               <a:buSzPct val="100000"/>
-              <a:buChar char="●"/>
-            </a:pPr>
-            <a:r>
-              <a:rPr lang="en-US" sz="1500" dirty="0">
-                <a:solidFill>
-                  <a:srgbClr val="33414F"/>
-                </a:solidFill>
-                <a:latin typeface="Times New Roman" panose="02020603050405020304" pitchFamily="18" charset="0"/>
-                <a:ea typeface="Calibri" pitchFamily="34" charset="-122"/>
-                <a:cs typeface="Times New Roman" panose="02020603050405020304" pitchFamily="18" charset="0"/>
-              </a:rPr>
-              <a:t>External evidence: FTC-reported US job-scam losses rose from ~$90M (2020) to ~$501M (2024)</a:t>
-            </a:r>
-            <a:endParaRPr lang="en-US" sz="1500" dirty="0">
-              <a:latin typeface="Times New Roman" panose="02020603050405020304" pitchFamily="18" charset="0"/>
-              <a:cs typeface="Times New Roman" panose="02020603050405020304" pitchFamily="18" charset="0"/>
-            </a:endParaRPr>
-          </a:p>
-          <a:p>
-            <a:pPr marL="342900" indent="-342900" algn="l">
-              <a:lnSpc>
-                <a:spcPct val="112000"/>
-              </a:lnSpc>
-              <a:spcAft>
-                <a:spcPts val="1200"/>
-              </a:spcAft>
-              <a:buSzPct val="100000"/>
-              <a:buChar char="●"/>
-            </a:pPr>
-            <a:r>
-              <a:rPr lang="en-US" sz="1500" dirty="0">
-                <a:solidFill>
-                  <a:srgbClr val="33414F"/>
-                </a:solidFill>
-                <a:latin typeface="Times New Roman" panose="02020603050405020304" pitchFamily="18" charset="0"/>
-                <a:ea typeface="Calibri" pitchFamily="34" charset="-122"/>
-                <a:cs typeface="Times New Roman" panose="02020603050405020304" pitchFamily="18" charset="0"/>
-              </a:rPr>
-              <a:t>External evidence: a 2024 Kenyan DCI case reportedly affected ~1,000 job seekers</a:t>
-            </a:r>
-            <a:endParaRPr lang="en-US" sz="1500" dirty="0">
-              <a:latin typeface="Times New Roman" panose="02020603050405020304" pitchFamily="18" charset="0"/>
-              <a:cs typeface="Times New Roman" panose="02020603050405020304" pitchFamily="18" charset="0"/>
-            </a:endParaRPr>
-          </a:p>
-          <a:p>
-            <a:pPr marL="342900" indent="-342900" algn="l">
-              <a:lnSpc>
-                <a:spcPct val="112000"/>
-              </a:lnSpc>
-              <a:spcAft>
-                <a:spcPts val="1200"/>
-              </a:spcAft>
-              <a:buSzPct val="100000"/>
-              <a:buChar char="●"/>
-            </a:pPr>
-            <a:r>
-              <a:rPr lang="en-US" sz="1500" dirty="0">
-                <a:solidFill>
-                  <a:srgbClr val="33414F"/>
-                </a:solidFill>
-                <a:latin typeface="Times New Roman" panose="02020603050405020304" pitchFamily="18" charset="0"/>
-                <a:ea typeface="Calibri" pitchFamily="34" charset="-122"/>
-                <a:cs typeface="Times New Roman" panose="02020603050405020304" pitchFamily="18" charset="0"/>
-              </a:rPr>
-              <a:t>The practical gap: job seekers need a way to prioritize verification before engaging with a posting</a:t>
-            </a:r>
+              <a:defRPr sz="1700">
+                <a:solidFill>
+                  <a:srgbClr val="46505C"/>
+                </a:solidFill>
+                <a:latin typeface="Aptos"/>
+              </a:defRPr>
+            </a:pPr>
             <a:endParaRPr lang="en-US" sz="1500" dirty="0">
               <a:latin typeface="Times New Roman" panose="02020603050405020304" pitchFamily="18" charset="0"/>
               <a:cs typeface="Times New Roman" panose="02020603050405020304" pitchFamily="18" charset="0"/>
@@ -6067,8 +7262,8 @@
         </p:nvSpPr>
         <p:spPr>
           <a:xfrm>
-            <a:off x="548640" y="6510528"/>
-            <a:ext cx="11064240" cy="274320"/>
+            <a:off x="548640" y="6217920"/>
+            <a:ext cx="11064240" cy="566928"/>
           </a:xfrm>
           <a:prstGeom prst="rect">
             <a:avLst/>
@@ -6081,11 +7276,25 @@
           <a:lstStyle/>
           <a:p>
             <a:r>
-              <a:rPr>
+              <a:rPr dirty="0">
                 <a:latin typeface="Times New Roman" panose="02020603050405020304" pitchFamily="18" charset="0"/>
                 <a:cs typeface="Times New Roman" panose="02020603050405020304" pitchFamily="18" charset="0"/>
               </a:rPr>
-              <a:t>External statistics: Commission, F.T. (2024), Federal Trade Commission; DCI (2024), Ministry of Interior and National Administration.</a:t>
+              <a:t>External statistics: Commission, F.T. (2024), Federal Trade Commission; DCI (202</a:t>
+            </a:r>
+            <a:r>
+              <a:rPr lang="en-US" dirty="0">
+                <a:latin typeface="Times New Roman" panose="02020603050405020304" pitchFamily="18" charset="0"/>
+                <a:cs typeface="Times New Roman" panose="02020603050405020304" pitchFamily="18" charset="0"/>
+              </a:rPr>
+              <a:t>5</a:t>
+            </a:r>
+            <a:r>
+              <a:rPr dirty="0">
+                <a:latin typeface="Times New Roman" panose="02020603050405020304" pitchFamily="18" charset="0"/>
+                <a:cs typeface="Times New Roman" panose="02020603050405020304" pitchFamily="18" charset="0"/>
+              </a:rPr>
+              <a:t>), Ministry of Interior and National Administration.</a:t>
             </a:r>
           </a:p>
         </p:txBody>
@@ -6098,7 +7307,7 @@
 </p:sld>
 </file>
 
-<file path=ppt/slides/slide3.xml><?xml version="1.0" encoding="utf-8"?>
+<file path=ppt/slides/slide4.xml><?xml version="1.0" encoding="utf-8"?>
 <p:sld xmlns:a="http://schemas.openxmlformats.org/drawingml/2006/main" xmlns:r="http://schemas.openxmlformats.org/officeDocument/2006/relationships" xmlns:p="http://schemas.openxmlformats.org/presentationml/2006/main">
   <p:cSld name="Slide 3">
     <p:bg>
@@ -6995,13 +8204,13 @@
 </p:sld>
 </file>
 
-<file path=ppt/slides/slide4.xml><?xml version="1.0" encoding="utf-8"?>
+<file path=ppt/slides/slide5.xml><?xml version="1.0" encoding="utf-8"?>
 <p:sld xmlns:a="http://schemas.openxmlformats.org/drawingml/2006/main" xmlns:r="http://schemas.openxmlformats.org/officeDocument/2006/relationships" xmlns:p="http://schemas.openxmlformats.org/presentationml/2006/main">
   <p:cSld name="Slide 4">
     <p:bg>
       <p:bgPr>
         <a:solidFill>
-          <a:srgbClr val="F5F7FA"/>
+          <a:srgbClr val="FFFFFF"/>
         </a:solidFill>
         <a:effectLst/>
       </p:bgPr>
@@ -7022,293 +8231,814 @@
       </p:grpSpPr>
       <p:sp>
         <p:nvSpPr>
-          <p:cNvPr id="2" name="Text 0"/>
+          <p:cNvPr id="2" name="Rectangle 1"/>
+          <p:cNvSpPr/>
+          <p:nvPr/>
+        </p:nvSpPr>
+        <p:spPr>
+          <a:xfrm>
+            <a:off x="0" y="0"/>
+            <a:ext cx="12192000" cy="109728"/>
+          </a:xfrm>
+          <a:prstGeom prst="rect">
+            <a:avLst/>
+          </a:prstGeom>
+          <a:solidFill>
+            <a:srgbClr val="1B2B41"/>
+          </a:solidFill>
+          <a:ln>
+            <a:noFill/>
+          </a:ln>
+        </p:spPr>
+        <p:style>
+          <a:lnRef idx="1">
+            <a:schemeClr val="accent1"/>
+          </a:lnRef>
+          <a:fillRef idx="3">
+            <a:schemeClr val="accent1"/>
+          </a:fillRef>
+          <a:effectRef idx="2">
+            <a:schemeClr val="accent1"/>
+          </a:effectRef>
+          <a:fontRef idx="minor">
+            <a:schemeClr val="lt1"/>
+          </a:fontRef>
+        </p:style>
+        <p:txBody>
+          <a:bodyPr rtlCol="0" anchor="ctr"/>
+          <a:lstStyle/>
+          <a:p>
+            <a:pPr algn="ctr"/>
+            <a:endParaRPr/>
+          </a:p>
+        </p:txBody>
+      </p:sp>
+      <p:sp>
+        <p:nvSpPr>
+          <p:cNvPr id="3" name="TextBox 2"/>
           <p:cNvSpPr txBox="1"/>
           <p:nvPr/>
         </p:nvSpPr>
         <p:spPr>
           <a:xfrm>
-            <a:off x="548640" y="411480"/>
-            <a:ext cx="8961120" cy="685800"/>
+            <a:off x="515620" y="256032"/>
+            <a:ext cx="1705980" cy="477054"/>
           </a:xfrm>
           <a:prstGeom prst="rect">
             <a:avLst/>
           </a:prstGeom>
           <a:noFill/>
-          <a:ln/>
-        </p:spPr>
-        <p:txBody>
-          <a:bodyPr wrap="square" lIns="0" tIns="0" rIns="0" bIns="0" rtlCol="0" anchor="t"/>
-          <a:lstStyle/>
-          <a:p>
-            <a:pPr marL="0" indent="0">
-              <a:buNone/>
-            </a:pPr>
-            <a:r>
-              <a:rPr lang="en-US" sz="3000" b="1" dirty="0">
-                <a:solidFill>
-                  <a:srgbClr val="1B2A4A"/>
-                </a:solidFill>
-                <a:latin typeface="Times New Roman" panose="02020603050405020304" pitchFamily="18" charset="0"/>
-                <a:ea typeface="Cambria" pitchFamily="34" charset="-122"/>
-                <a:cs typeface="Times New Roman" panose="02020603050405020304" pitchFamily="18" charset="0"/>
-              </a:rPr>
-              <a:t>Objectives &amp; Success Criteria</a:t>
-            </a:r>
-            <a:endParaRPr lang="en-US" sz="3000" dirty="0">
-              <a:latin typeface="Times New Roman" panose="02020603050405020304" pitchFamily="18" charset="0"/>
-              <a:cs typeface="Times New Roman" panose="02020603050405020304" pitchFamily="18" charset="0"/>
-            </a:endParaRPr>
-          </a:p>
-        </p:txBody>
-      </p:sp>
-      <p:sp>
-        <p:nvSpPr>
-          <p:cNvPr id="3" name="Shape 1"/>
+        </p:spPr>
+        <p:txBody>
+          <a:bodyPr wrap="none">
+            <a:spAutoFit/>
+          </a:bodyPr>
+          <a:lstStyle/>
+          <a:p>
+            <a:pPr>
+              <a:defRPr sz="2500" b="1">
+                <a:solidFill>
+                  <a:srgbClr val="1B2B41"/>
+                </a:solidFill>
+                <a:latin typeface="Aptos Display"/>
+              </a:defRPr>
+            </a:pPr>
+            <a:r>
+              <a:rPr dirty="0"/>
+              <a:t>Objectives </a:t>
+            </a:r>
+          </a:p>
+        </p:txBody>
+      </p:sp>
+      <p:sp>
+        <p:nvSpPr>
+          <p:cNvPr id="4" name="Rounded Rectangle 3"/>
           <p:cNvSpPr/>
           <p:nvPr/>
         </p:nvSpPr>
         <p:spPr>
           <a:xfrm>
-            <a:off x="10424160" y="411480"/>
-            <a:ext cx="594360" cy="594360"/>
-          </a:xfrm>
-          <a:prstGeom prst="ellipse">
+            <a:off x="502920" y="960120"/>
+            <a:ext cx="5623560" cy="2240280"/>
+          </a:xfrm>
+          <a:prstGeom prst="roundRect">
             <a:avLst/>
           </a:prstGeom>
           <a:solidFill>
-            <a:srgbClr val="4A6FA5"/>
+            <a:srgbClr val="F8F9FB"/>
           </a:solidFill>
-          <a:ln/>
-        </p:spPr>
-      </p:sp>
-      <p:pic>
-        <p:nvPicPr>
-          <p:cNvPr id="4" name="Image 0" descr="preencoded.png"/>
-          <p:cNvPicPr>
-            <a:picLocks noChangeAspect="1"/>
-          </p:cNvPicPr>
-          <p:nvPr/>
-        </p:nvPicPr>
-        <p:blipFill>
-          <a:blip r:embed="rId3"/>
-          <a:stretch>
-            <a:fillRect/>
-          </a:stretch>
-        </p:blipFill>
-        <p:spPr>
-          <a:xfrm>
-            <a:off x="10588752" y="576072"/>
-            <a:ext cx="265176" cy="265176"/>
-          </a:xfrm>
-          <a:prstGeom prst="rect">
-            <a:avLst/>
-          </a:prstGeom>
-        </p:spPr>
-      </p:pic>
-      <p:sp>
-        <p:nvSpPr>
-          <p:cNvPr id="5" name="Text 2"/>
+          <a:ln w="15875">
+            <a:solidFill>
+              <a:srgbClr val="1B2B41"/>
+            </a:solidFill>
+          </a:ln>
+        </p:spPr>
+        <p:style>
+          <a:lnRef idx="1">
+            <a:schemeClr val="accent1"/>
+          </a:lnRef>
+          <a:fillRef idx="3">
+            <a:schemeClr val="accent1"/>
+          </a:fillRef>
+          <a:effectRef idx="2">
+            <a:schemeClr val="accent1"/>
+          </a:effectRef>
+          <a:fontRef idx="minor">
+            <a:schemeClr val="lt1"/>
+          </a:fontRef>
+        </p:style>
+        <p:txBody>
+          <a:bodyPr rtlCol="0" anchor="ctr"/>
+          <a:lstStyle/>
+          <a:p>
+            <a:pPr algn="ctr"/>
+            <a:endParaRPr/>
+          </a:p>
+        </p:txBody>
+      </p:sp>
+      <p:sp>
+        <p:nvSpPr>
+          <p:cNvPr id="5" name="Rounded Rectangle 4"/>
+          <p:cNvSpPr/>
+          <p:nvPr/>
+        </p:nvSpPr>
+        <p:spPr>
+          <a:xfrm>
+            <a:off x="667512" y="1115568"/>
+            <a:ext cx="438912" cy="347472"/>
+          </a:xfrm>
+          <a:prstGeom prst="roundRect">
+            <a:avLst/>
+          </a:prstGeom>
+          <a:solidFill>
+            <a:srgbClr val="1B2B41"/>
+          </a:solidFill>
+          <a:ln>
+            <a:noFill/>
+          </a:ln>
+        </p:spPr>
+        <p:style>
+          <a:lnRef idx="1">
+            <a:schemeClr val="accent1"/>
+          </a:lnRef>
+          <a:fillRef idx="3">
+            <a:schemeClr val="accent1"/>
+          </a:fillRef>
+          <a:effectRef idx="2">
+            <a:schemeClr val="accent1"/>
+          </a:effectRef>
+          <a:fontRef idx="minor">
+            <a:schemeClr val="lt1"/>
+          </a:fontRef>
+        </p:style>
+        <p:txBody>
+          <a:bodyPr rtlCol="0" anchor="ctr"/>
+          <a:lstStyle/>
+          <a:p>
+            <a:pPr algn="ctr">
+              <a:defRPr sz="1300" b="1">
+                <a:solidFill>
+                  <a:srgbClr val="FFFFFF"/>
+                </a:solidFill>
+                <a:latin typeface="Aptos"/>
+              </a:defRPr>
+            </a:pPr>
+            <a:r>
+              <a:t>1</a:t>
+            </a:r>
+          </a:p>
+        </p:txBody>
+      </p:sp>
+      <p:sp>
+        <p:nvSpPr>
+          <p:cNvPr id="6" name="TextBox 5"/>
           <p:cNvSpPr txBox="1"/>
           <p:nvPr/>
         </p:nvSpPr>
         <p:spPr>
           <a:xfrm>
-            <a:off x="548640" y="1463040"/>
-            <a:ext cx="5394960" cy="4206240"/>
+            <a:off x="1216152" y="1088136"/>
+            <a:ext cx="4709160" cy="530352"/>
           </a:xfrm>
           <a:prstGeom prst="rect">
             <a:avLst/>
           </a:prstGeom>
           <a:noFill/>
-          <a:ln/>
-        </p:spPr>
-        <p:txBody>
-          <a:bodyPr wrap="square" lIns="0" tIns="0" rIns="0" bIns="0" rtlCol="0" anchor="t"/>
-          <a:lstStyle/>
-          <a:p>
-            <a:pPr marL="342900" indent="-342900" algn="l">
+        </p:spPr>
+        <p:txBody>
+          <a:bodyPr wrap="none">
+            <a:spAutoFit/>
+          </a:bodyPr>
+          <a:lstStyle/>
+          <a:p>
+            <a:pPr>
+              <a:defRPr sz="1500" b="1">
+                <a:solidFill>
+                  <a:srgbClr val="1B2B41"/>
+                </a:solidFill>
+                <a:latin typeface="Aptos"/>
+              </a:defRPr>
+            </a:pPr>
+            <a:r>
+              <a:t>Objective 1: Detect Fraudulent Job Advertisements</a:t>
+            </a:r>
+          </a:p>
+        </p:txBody>
+      </p:sp>
+      <p:sp>
+        <p:nvSpPr>
+          <p:cNvPr id="7" name="TextBox 6"/>
+          <p:cNvSpPr txBox="1"/>
+          <p:nvPr/>
+        </p:nvSpPr>
+        <p:spPr>
+          <a:xfrm>
+            <a:off x="731520" y="1673352"/>
+            <a:ext cx="5166360" cy="1298448"/>
+          </a:xfrm>
+          <a:prstGeom prst="rect">
+            <a:avLst/>
+          </a:prstGeom>
+          <a:noFill/>
+        </p:spPr>
+        <p:txBody>
+          <a:bodyPr wrap="square">
+            <a:spAutoFit/>
+          </a:bodyPr>
+          <a:lstStyle/>
+          <a:p>
+            <a:pPr>
               <a:lnSpc>
-                <a:spcPct val="112000"/>
+                <a:spcPct val="105000"/>
               </a:lnSpc>
-              <a:spcAft>
-                <a:spcPts val="1200"/>
-              </a:spcAft>
-              <a:buSzPct val="100000"/>
-              <a:buChar char="●"/>
-            </a:pPr>
-            <a:r>
-              <a:rPr lang="en-US" sz="1400" dirty="0">
-                <a:solidFill>
-                  <a:srgbClr val="33414F"/>
-                </a:solidFill>
-                <a:latin typeface="Times New Roman" panose="02020603050405020304" pitchFamily="18" charset="0"/>
-                <a:ea typeface="Calibri" pitchFamily="34" charset="-122"/>
-                <a:cs typeface="Times New Roman" panose="02020603050405020304" pitchFamily="18" charset="0"/>
-              </a:rPr>
-              <a:t>Detect fraud-risk postings from text and structured metadata</a:t>
-            </a:r>
-            <a:endParaRPr lang="en-US" sz="1400" dirty="0">
-              <a:latin typeface="Times New Roman" panose="02020603050405020304" pitchFamily="18" charset="0"/>
-              <a:cs typeface="Times New Roman" panose="02020603050405020304" pitchFamily="18" charset="0"/>
-            </a:endParaRPr>
-          </a:p>
-          <a:p>
-            <a:pPr marL="342900" indent="-342900" algn="l">
+              <a:defRPr sz="1250">
+                <a:solidFill>
+                  <a:srgbClr val="46505C"/>
+                </a:solidFill>
+                <a:latin typeface="Aptos"/>
+              </a:defRPr>
+            </a:pPr>
+            <a:r>
+              <a:t>Develop a machine learning model that classifies job advertisements as Genuine (0) or Fraudulent (1) using textual and structured job-posting information.</a:t>
+            </a:r>
+          </a:p>
+        </p:txBody>
+      </p:sp>
+      <p:sp>
+        <p:nvSpPr>
+          <p:cNvPr id="8" name="Rounded Rectangle 7"/>
+          <p:cNvSpPr/>
+          <p:nvPr/>
+        </p:nvSpPr>
+        <p:spPr>
+          <a:xfrm>
+            <a:off x="6355080" y="960120"/>
+            <a:ext cx="5623560" cy="2240280"/>
+          </a:xfrm>
+          <a:prstGeom prst="roundRect">
+            <a:avLst/>
+          </a:prstGeom>
+          <a:solidFill>
+            <a:srgbClr val="F8F9FB"/>
+          </a:solidFill>
+          <a:ln w="15875">
+            <a:solidFill>
+              <a:srgbClr val="1B2B41"/>
+            </a:solidFill>
+          </a:ln>
+        </p:spPr>
+        <p:style>
+          <a:lnRef idx="1">
+            <a:schemeClr val="accent1"/>
+          </a:lnRef>
+          <a:fillRef idx="3">
+            <a:schemeClr val="accent1"/>
+          </a:fillRef>
+          <a:effectRef idx="2">
+            <a:schemeClr val="accent1"/>
+          </a:effectRef>
+          <a:fontRef idx="minor">
+            <a:schemeClr val="lt1"/>
+          </a:fontRef>
+        </p:style>
+        <p:txBody>
+          <a:bodyPr rtlCol="0" anchor="ctr"/>
+          <a:lstStyle/>
+          <a:p>
+            <a:pPr algn="ctr"/>
+            <a:endParaRPr/>
+          </a:p>
+        </p:txBody>
+      </p:sp>
+      <p:sp>
+        <p:nvSpPr>
+          <p:cNvPr id="9" name="Rounded Rectangle 8"/>
+          <p:cNvSpPr/>
+          <p:nvPr/>
+        </p:nvSpPr>
+        <p:spPr>
+          <a:xfrm>
+            <a:off x="6519672" y="1115568"/>
+            <a:ext cx="438912" cy="347472"/>
+          </a:xfrm>
+          <a:prstGeom prst="roundRect">
+            <a:avLst/>
+          </a:prstGeom>
+          <a:solidFill>
+            <a:srgbClr val="1B2B41"/>
+          </a:solidFill>
+          <a:ln>
+            <a:noFill/>
+          </a:ln>
+        </p:spPr>
+        <p:style>
+          <a:lnRef idx="1">
+            <a:schemeClr val="accent1"/>
+          </a:lnRef>
+          <a:fillRef idx="3">
+            <a:schemeClr val="accent1"/>
+          </a:fillRef>
+          <a:effectRef idx="2">
+            <a:schemeClr val="accent1"/>
+          </a:effectRef>
+          <a:fontRef idx="minor">
+            <a:schemeClr val="lt1"/>
+          </a:fontRef>
+        </p:style>
+        <p:txBody>
+          <a:bodyPr rtlCol="0" anchor="ctr"/>
+          <a:lstStyle/>
+          <a:p>
+            <a:pPr algn="ctr">
+              <a:defRPr sz="1300" b="1">
+                <a:solidFill>
+                  <a:srgbClr val="FFFFFF"/>
+                </a:solidFill>
+                <a:latin typeface="Aptos"/>
+              </a:defRPr>
+            </a:pPr>
+            <a:r>
+              <a:t>2</a:t>
+            </a:r>
+          </a:p>
+        </p:txBody>
+      </p:sp>
+      <p:sp>
+        <p:nvSpPr>
+          <p:cNvPr id="10" name="TextBox 9"/>
+          <p:cNvSpPr txBox="1"/>
+          <p:nvPr/>
+        </p:nvSpPr>
+        <p:spPr>
+          <a:xfrm>
+            <a:off x="7068312" y="1088136"/>
+            <a:ext cx="4709160" cy="530352"/>
+          </a:xfrm>
+          <a:prstGeom prst="rect">
+            <a:avLst/>
+          </a:prstGeom>
+          <a:noFill/>
+        </p:spPr>
+        <p:txBody>
+          <a:bodyPr wrap="none">
+            <a:spAutoFit/>
+          </a:bodyPr>
+          <a:lstStyle/>
+          <a:p>
+            <a:pPr>
+              <a:defRPr sz="1500" b="1">
+                <a:solidFill>
+                  <a:srgbClr val="1B2B41"/>
+                </a:solidFill>
+                <a:latin typeface="Aptos"/>
+              </a:defRPr>
+            </a:pPr>
+            <a:r>
+              <a:t>Objective 2: Identify Scam Patterns</a:t>
+            </a:r>
+          </a:p>
+        </p:txBody>
+      </p:sp>
+      <p:sp>
+        <p:nvSpPr>
+          <p:cNvPr id="11" name="TextBox 10"/>
+          <p:cNvSpPr txBox="1"/>
+          <p:nvPr/>
+        </p:nvSpPr>
+        <p:spPr>
+          <a:xfrm>
+            <a:off x="6583680" y="1673352"/>
+            <a:ext cx="5166360" cy="1298448"/>
+          </a:xfrm>
+          <a:prstGeom prst="rect">
+            <a:avLst/>
+          </a:prstGeom>
+          <a:noFill/>
+        </p:spPr>
+        <p:txBody>
+          <a:bodyPr wrap="square">
+            <a:spAutoFit/>
+          </a:bodyPr>
+          <a:lstStyle/>
+          <a:p>
+            <a:pPr>
               <a:lnSpc>
-                <a:spcPct val="112000"/>
+                <a:spcPct val="105000"/>
               </a:lnSpc>
-              <a:spcAft>
-                <a:spcPts val="1200"/>
-              </a:spcAft>
-              <a:buSzPct val="100000"/>
-              <a:buChar char="●"/>
-            </a:pPr>
-            <a:r>
-              <a:rPr lang="en-US" sz="1400" dirty="0">
-                <a:solidFill>
-                  <a:srgbClr val="33414F"/>
-                </a:solidFill>
-                <a:latin typeface="Times New Roman" panose="02020603050405020304" pitchFamily="18" charset="0"/>
-                <a:ea typeface="Calibri" pitchFamily="34" charset="-122"/>
-                <a:cs typeface="Times New Roman" panose="02020603050405020304" pitchFamily="18" charset="0"/>
-              </a:rPr>
-              <a:t>Apply NLP — TF-IDF features with 1–2 word n-grams — to capture linguistic signals</a:t>
-            </a:r>
-            <a:endParaRPr lang="en-US" sz="1400" dirty="0">
-              <a:latin typeface="Times New Roman" panose="02020603050405020304" pitchFamily="18" charset="0"/>
-              <a:cs typeface="Times New Roman" panose="02020603050405020304" pitchFamily="18" charset="0"/>
-            </a:endParaRPr>
-          </a:p>
-          <a:p>
-            <a:pPr marL="342900" indent="-342900" algn="l">
+              <a:defRPr sz="1250">
+                <a:solidFill>
+                  <a:srgbClr val="46505C"/>
+                </a:solidFill>
+                <a:latin typeface="Aptos"/>
+              </a:defRPr>
+            </a:pPr>
+            <a:r>
+              <a:t>Use NLP techniques to identify common scam indicators such as urgent hiring language, upfront payment requests, poorly written descriptions, unrealistic salaries, and suspicious contact information.</a:t>
+            </a:r>
+          </a:p>
+        </p:txBody>
+      </p:sp>
+      <p:sp>
+        <p:nvSpPr>
+          <p:cNvPr id="12" name="Rounded Rectangle 11"/>
+          <p:cNvSpPr/>
+          <p:nvPr/>
+        </p:nvSpPr>
+        <p:spPr>
+          <a:xfrm>
+            <a:off x="502920" y="3383280"/>
+            <a:ext cx="5623560" cy="2240280"/>
+          </a:xfrm>
+          <a:prstGeom prst="roundRect">
+            <a:avLst/>
+          </a:prstGeom>
+          <a:solidFill>
+            <a:srgbClr val="F8F9FB"/>
+          </a:solidFill>
+          <a:ln w="15875">
+            <a:solidFill>
+              <a:srgbClr val="1B2B41"/>
+            </a:solidFill>
+          </a:ln>
+        </p:spPr>
+        <p:style>
+          <a:lnRef idx="1">
+            <a:schemeClr val="accent1"/>
+          </a:lnRef>
+          <a:fillRef idx="3">
+            <a:schemeClr val="accent1"/>
+          </a:fillRef>
+          <a:effectRef idx="2">
+            <a:schemeClr val="accent1"/>
+          </a:effectRef>
+          <a:fontRef idx="minor">
+            <a:schemeClr val="lt1"/>
+          </a:fontRef>
+        </p:style>
+        <p:txBody>
+          <a:bodyPr rtlCol="0" anchor="ctr"/>
+          <a:lstStyle/>
+          <a:p>
+            <a:pPr algn="ctr"/>
+            <a:endParaRPr/>
+          </a:p>
+        </p:txBody>
+      </p:sp>
+      <p:sp>
+        <p:nvSpPr>
+          <p:cNvPr id="13" name="Rounded Rectangle 12"/>
+          <p:cNvSpPr/>
+          <p:nvPr/>
+        </p:nvSpPr>
+        <p:spPr>
+          <a:xfrm>
+            <a:off x="667512" y="3538728"/>
+            <a:ext cx="438912" cy="347472"/>
+          </a:xfrm>
+          <a:prstGeom prst="roundRect">
+            <a:avLst/>
+          </a:prstGeom>
+          <a:solidFill>
+            <a:srgbClr val="1B2B41"/>
+          </a:solidFill>
+          <a:ln>
+            <a:noFill/>
+          </a:ln>
+        </p:spPr>
+        <p:style>
+          <a:lnRef idx="1">
+            <a:schemeClr val="accent1"/>
+          </a:lnRef>
+          <a:fillRef idx="3">
+            <a:schemeClr val="accent1"/>
+          </a:fillRef>
+          <a:effectRef idx="2">
+            <a:schemeClr val="accent1"/>
+          </a:effectRef>
+          <a:fontRef idx="minor">
+            <a:schemeClr val="lt1"/>
+          </a:fontRef>
+        </p:style>
+        <p:txBody>
+          <a:bodyPr rtlCol="0" anchor="ctr"/>
+          <a:lstStyle/>
+          <a:p>
+            <a:pPr algn="ctr">
+              <a:defRPr sz="1300" b="1">
+                <a:solidFill>
+                  <a:srgbClr val="FFFFFF"/>
+                </a:solidFill>
+                <a:latin typeface="Aptos"/>
+              </a:defRPr>
+            </a:pPr>
+            <a:r>
+              <a:t>3</a:t>
+            </a:r>
+          </a:p>
+        </p:txBody>
+      </p:sp>
+      <p:sp>
+        <p:nvSpPr>
+          <p:cNvPr id="14" name="TextBox 13"/>
+          <p:cNvSpPr txBox="1"/>
+          <p:nvPr/>
+        </p:nvSpPr>
+        <p:spPr>
+          <a:xfrm>
+            <a:off x="1216152" y="3511296"/>
+            <a:ext cx="4709160" cy="530352"/>
+          </a:xfrm>
+          <a:prstGeom prst="rect">
+            <a:avLst/>
+          </a:prstGeom>
+          <a:noFill/>
+        </p:spPr>
+        <p:txBody>
+          <a:bodyPr wrap="none">
+            <a:spAutoFit/>
+          </a:bodyPr>
+          <a:lstStyle/>
+          <a:p>
+            <a:pPr>
+              <a:defRPr sz="1500" b="1">
+                <a:solidFill>
+                  <a:srgbClr val="1B2B41"/>
+                </a:solidFill>
+                <a:latin typeface="Aptos"/>
+              </a:defRPr>
+            </a:pPr>
+            <a:r>
+              <a:t>Objective 3: Integrate Kenyan Government Verification</a:t>
+            </a:r>
+          </a:p>
+        </p:txBody>
+      </p:sp>
+      <p:sp>
+        <p:nvSpPr>
+          <p:cNvPr id="15" name="TextBox 14"/>
+          <p:cNvSpPr txBox="1"/>
+          <p:nvPr/>
+        </p:nvSpPr>
+        <p:spPr>
+          <a:xfrm>
+            <a:off x="731520" y="4096512"/>
+            <a:ext cx="5166360" cy="1298448"/>
+          </a:xfrm>
+          <a:prstGeom prst="rect">
+            <a:avLst/>
+          </a:prstGeom>
+          <a:noFill/>
+        </p:spPr>
+        <p:txBody>
+          <a:bodyPr wrap="square">
+            <a:spAutoFit/>
+          </a:bodyPr>
+          <a:lstStyle/>
+          <a:p>
+            <a:pPr>
               <a:lnSpc>
-                <a:spcPct val="112000"/>
+                <a:spcPct val="105000"/>
               </a:lnSpc>
-              <a:spcAft>
-                <a:spcPts val="1200"/>
-              </a:spcAft>
-              <a:buSzPct val="100000"/>
-              <a:buChar char="●"/>
-            </a:pPr>
-            <a:r>
-              <a:rPr lang="en-US" sz="1400" dirty="0">
-                <a:solidFill>
-                  <a:srgbClr val="33414F"/>
-                </a:solidFill>
-                <a:latin typeface="Times New Roman" panose="02020603050405020304" pitchFamily="18" charset="0"/>
-                <a:ea typeface="Calibri" pitchFamily="34" charset="-122"/>
-                <a:cs typeface="Times New Roman" panose="02020603050405020304" pitchFamily="18" charset="0"/>
-              </a:rPr>
-              <a:t>Capture signals such as payment language, urgency, vague descriptions, missing fields, and suspicious contact patterns</a:t>
-            </a:r>
-            <a:endParaRPr lang="en-US" sz="1400" dirty="0">
-              <a:latin typeface="Times New Roman" panose="02020603050405020304" pitchFamily="18" charset="0"/>
-              <a:cs typeface="Times New Roman" panose="02020603050405020304" pitchFamily="18" charset="0"/>
-            </a:endParaRPr>
-          </a:p>
-        </p:txBody>
-      </p:sp>
-      <p:sp>
-        <p:nvSpPr>
-          <p:cNvPr id="6" name="Text 3"/>
+              <a:defRPr sz="1250">
+                <a:solidFill>
+                  <a:srgbClr val="46505C"/>
+                </a:solidFill>
+                <a:latin typeface="Aptos"/>
+              </a:defRPr>
+            </a:pPr>
+            <a:r>
+              <a:t>Verify whether a recruitment agency is licensed, whether the agency appears on government blacklists, and whether the company exists in government records.</a:t>
+            </a:r>
+          </a:p>
+        </p:txBody>
+      </p:sp>
+      <p:sp>
+        <p:nvSpPr>
+          <p:cNvPr id="16" name="Rounded Rectangle 15"/>
+          <p:cNvSpPr/>
+          <p:nvPr/>
+        </p:nvSpPr>
+        <p:spPr>
+          <a:xfrm>
+            <a:off x="6355080" y="3383280"/>
+            <a:ext cx="5623560" cy="2240280"/>
+          </a:xfrm>
+          <a:prstGeom prst="roundRect">
+            <a:avLst/>
+          </a:prstGeom>
+          <a:solidFill>
+            <a:srgbClr val="F8F9FB"/>
+          </a:solidFill>
+          <a:ln w="15875">
+            <a:solidFill>
+              <a:srgbClr val="1B2B41"/>
+            </a:solidFill>
+          </a:ln>
+        </p:spPr>
+        <p:style>
+          <a:lnRef idx="1">
+            <a:schemeClr val="accent1"/>
+          </a:lnRef>
+          <a:fillRef idx="3">
+            <a:schemeClr val="accent1"/>
+          </a:fillRef>
+          <a:effectRef idx="2">
+            <a:schemeClr val="accent1"/>
+          </a:effectRef>
+          <a:fontRef idx="minor">
+            <a:schemeClr val="lt1"/>
+          </a:fontRef>
+        </p:style>
+        <p:txBody>
+          <a:bodyPr rtlCol="0" anchor="ctr"/>
+          <a:lstStyle/>
+          <a:p>
+            <a:pPr algn="ctr"/>
+            <a:endParaRPr/>
+          </a:p>
+        </p:txBody>
+      </p:sp>
+      <p:sp>
+        <p:nvSpPr>
+          <p:cNvPr id="17" name="Rounded Rectangle 16"/>
+          <p:cNvSpPr/>
+          <p:nvPr/>
+        </p:nvSpPr>
+        <p:spPr>
+          <a:xfrm>
+            <a:off x="6519672" y="3538728"/>
+            <a:ext cx="438912" cy="347472"/>
+          </a:xfrm>
+          <a:prstGeom prst="roundRect">
+            <a:avLst/>
+          </a:prstGeom>
+          <a:solidFill>
+            <a:srgbClr val="1B2B41"/>
+          </a:solidFill>
+          <a:ln>
+            <a:noFill/>
+          </a:ln>
+        </p:spPr>
+        <p:style>
+          <a:lnRef idx="1">
+            <a:schemeClr val="accent1"/>
+          </a:lnRef>
+          <a:fillRef idx="3">
+            <a:schemeClr val="accent1"/>
+          </a:fillRef>
+          <a:effectRef idx="2">
+            <a:schemeClr val="accent1"/>
+          </a:effectRef>
+          <a:fontRef idx="minor">
+            <a:schemeClr val="lt1"/>
+          </a:fontRef>
+        </p:style>
+        <p:txBody>
+          <a:bodyPr rtlCol="0" anchor="ctr"/>
+          <a:lstStyle/>
+          <a:p>
+            <a:pPr algn="ctr">
+              <a:defRPr sz="1300" b="1">
+                <a:solidFill>
+                  <a:srgbClr val="FFFFFF"/>
+                </a:solidFill>
+                <a:latin typeface="Aptos"/>
+              </a:defRPr>
+            </a:pPr>
+            <a:r>
+              <a:t>4</a:t>
+            </a:r>
+          </a:p>
+        </p:txBody>
+      </p:sp>
+      <p:sp>
+        <p:nvSpPr>
+          <p:cNvPr id="18" name="TextBox 17"/>
           <p:cNvSpPr txBox="1"/>
           <p:nvPr/>
         </p:nvSpPr>
         <p:spPr>
           <a:xfrm>
-            <a:off x="6126480" y="1463040"/>
-            <a:ext cx="5394960" cy="4206240"/>
+            <a:off x="7068312" y="3511296"/>
+            <a:ext cx="4709160" cy="530352"/>
           </a:xfrm>
           <a:prstGeom prst="rect">
             <a:avLst/>
           </a:prstGeom>
           <a:noFill/>
-          <a:ln/>
-        </p:spPr>
-        <p:txBody>
-          <a:bodyPr wrap="square" lIns="0" tIns="0" rIns="0" bIns="0" rtlCol="0" anchor="t"/>
-          <a:lstStyle/>
-          <a:p>
-            <a:pPr marL="342900" indent="-342900" algn="l">
+        </p:spPr>
+        <p:txBody>
+          <a:bodyPr wrap="none">
+            <a:spAutoFit/>
+          </a:bodyPr>
+          <a:lstStyle/>
+          <a:p>
+            <a:pPr>
+              <a:defRPr sz="1500" b="1">
+                <a:solidFill>
+                  <a:srgbClr val="1B2B41"/>
+                </a:solidFill>
+                <a:latin typeface="Aptos"/>
+              </a:defRPr>
+            </a:pPr>
+            <a:r>
+              <a:t>Objective 4: Explain Predictions</a:t>
+            </a:r>
+          </a:p>
+        </p:txBody>
+      </p:sp>
+      <p:sp>
+        <p:nvSpPr>
+          <p:cNvPr id="19" name="TextBox 18"/>
+          <p:cNvSpPr txBox="1"/>
+          <p:nvPr/>
+        </p:nvSpPr>
+        <p:spPr>
+          <a:xfrm>
+            <a:off x="6583680" y="4096512"/>
+            <a:ext cx="5166360" cy="1298448"/>
+          </a:xfrm>
+          <a:prstGeom prst="rect">
+            <a:avLst/>
+          </a:prstGeom>
+          <a:noFill/>
+        </p:spPr>
+        <p:txBody>
+          <a:bodyPr wrap="square">
+            <a:spAutoFit/>
+          </a:bodyPr>
+          <a:lstStyle/>
+          <a:p>
+            <a:pPr>
               <a:lnSpc>
-                <a:spcPct val="112000"/>
+                <a:spcPct val="105000"/>
               </a:lnSpc>
-              <a:spcAft>
-                <a:spcPts val="1200"/>
-              </a:spcAft>
-              <a:buSzPct val="100000"/>
-              <a:buChar char="●"/>
-            </a:pPr>
-            <a:r>
-              <a:rPr lang="en-US" sz="1400" dirty="0">
-                <a:solidFill>
-                  <a:srgbClr val="33414F"/>
-                </a:solidFill>
-                <a:latin typeface="Times New Roman" panose="02020603050405020304" pitchFamily="18" charset="0"/>
-                <a:ea typeface="Calibri" pitchFamily="34" charset="-122"/>
-                <a:cs typeface="Times New Roman" panose="02020603050405020304" pitchFamily="18" charset="0"/>
-              </a:rPr>
-              <a:t>Compare a text-only baseline against hybrid models combining text and engineered features</a:t>
-            </a:r>
-            <a:endParaRPr lang="en-US" sz="1400" dirty="0">
-              <a:latin typeface="Times New Roman" panose="02020603050405020304" pitchFamily="18" charset="0"/>
-              <a:cs typeface="Times New Roman" panose="02020603050405020304" pitchFamily="18" charset="0"/>
-            </a:endParaRPr>
-          </a:p>
-          <a:p>
-            <a:pPr marL="342900" indent="-342900" algn="l">
-              <a:lnSpc>
-                <a:spcPct val="112000"/>
-              </a:lnSpc>
-              <a:spcAft>
-                <a:spcPts val="1200"/>
-              </a:spcAft>
-              <a:buSzPct val="100000"/>
-              <a:buChar char="●"/>
-            </a:pPr>
-            <a:r>
-              <a:rPr lang="en-US" sz="1400" dirty="0">
-                <a:solidFill>
-                  <a:srgbClr val="33414F"/>
-                </a:solidFill>
-                <a:latin typeface="Times New Roman" panose="02020603050405020304" pitchFamily="18" charset="0"/>
-                <a:ea typeface="Calibri" pitchFamily="34" charset="-122"/>
-                <a:cs typeface="Times New Roman" panose="02020603050405020304" pitchFamily="18" charset="0"/>
-              </a:rPr>
-              <a:t>Select an operating threshold on validation data, balancing fraud-risk precision and recall</a:t>
-            </a:r>
-            <a:endParaRPr lang="en-US" sz="1400" dirty="0">
-              <a:latin typeface="Times New Roman" panose="02020603050405020304" pitchFamily="18" charset="0"/>
-              <a:cs typeface="Times New Roman" panose="02020603050405020304" pitchFamily="18" charset="0"/>
-            </a:endParaRPr>
-          </a:p>
-          <a:p>
-            <a:pPr marL="342900" indent="-342900" algn="l">
-              <a:lnSpc>
-                <a:spcPct val="112000"/>
-              </a:lnSpc>
-              <a:spcAft>
-                <a:spcPts val="1200"/>
-              </a:spcAft>
-              <a:buSzPct val="100000"/>
-              <a:buChar char="●"/>
-            </a:pPr>
-            <a:r>
-              <a:rPr lang="en-US" sz="1400" dirty="0">
-                <a:solidFill>
-                  <a:srgbClr val="33414F"/>
-                </a:solidFill>
-                <a:latin typeface="Times New Roman" panose="02020603050405020304" pitchFamily="18" charset="0"/>
-                <a:ea typeface="Calibri" pitchFamily="34" charset="-122"/>
-                <a:cs typeface="Times New Roman" panose="02020603050405020304" pitchFamily="18" charset="0"/>
-              </a:rPr>
-              <a:t>Produce explainable risk signals — not just an unexplained label — and prepare the model for a future web/API or human-review workflow</a:t>
-            </a:r>
-            <a:endParaRPr lang="en-US" sz="1400" dirty="0">
-              <a:latin typeface="Times New Roman" panose="02020603050405020304" pitchFamily="18" charset="0"/>
-              <a:cs typeface="Times New Roman" panose="02020603050405020304" pitchFamily="18" charset="0"/>
-            </a:endParaRPr>
+              <a:defRPr sz="1250">
+                <a:solidFill>
+                  <a:srgbClr val="46505C"/>
+                </a:solidFill>
+                <a:latin typeface="Aptos"/>
+              </a:defRPr>
+            </a:pPr>
+            <a:r>
+              <a:t>Explain why a posting was flagged with reasons such as an agency not found in the NEA registry, visa-processing fee requests, unrealistic overseas salaries, or urgency phrases such as “Apply Immediately.”</a:t>
+            </a:r>
+          </a:p>
+        </p:txBody>
+      </p:sp>
+      <p:sp>
+        <p:nvSpPr>
+          <p:cNvPr id="20" name="TextBox 19"/>
+          <p:cNvSpPr txBox="1"/>
+          <p:nvPr/>
+        </p:nvSpPr>
+        <p:spPr>
+          <a:xfrm>
+            <a:off x="548640" y="6272784"/>
+            <a:ext cx="11064240" cy="320040"/>
+          </a:xfrm>
+          <a:prstGeom prst="rect">
+            <a:avLst/>
+          </a:prstGeom>
+          <a:noFill/>
+        </p:spPr>
+        <p:txBody>
+          <a:bodyPr wrap="none">
+            <a:spAutoFit/>
+          </a:bodyPr>
+          <a:lstStyle/>
+          <a:p>
+            <a:pPr algn="ctr">
+              <a:defRPr sz="950" i="1">
+                <a:solidFill>
+                  <a:srgbClr val="46505C"/>
+                </a:solidFill>
+                <a:latin typeface="Aptos"/>
+              </a:defRPr>
+            </a:pPr>
+            <a:r>
+              <a:t>The system supports verification and human review; the model output is a decision-support signal, not a final determination.</a:t>
+            </a:r>
           </a:p>
         </p:txBody>
       </p:sp>
@@ -7320,7 +9050,7 @@
 </p:sld>
 </file>
 
-<file path=ppt/slides/slide5.xml><?xml version="1.0" encoding="utf-8"?>
+<file path=ppt/slides/slide6.xml><?xml version="1.0" encoding="utf-8"?>
 <p:sld xmlns:a="http://schemas.openxmlformats.org/drawingml/2006/main" xmlns:r="http://schemas.openxmlformats.org/officeDocument/2006/relationships" xmlns:p="http://schemas.openxmlformats.org/presentationml/2006/main">
   <p:cSld name="Slide 5">
     <p:bg>
@@ -8193,7 +9923,7 @@
 </p:sld>
 </file>
 
-<file path=ppt/slides/slide6.xml><?xml version="1.0" encoding="utf-8"?>
+<file path=ppt/slides/slide7.xml><?xml version="1.0" encoding="utf-8"?>
 <p:sld xmlns:a="http://schemas.openxmlformats.org/drawingml/2006/main" xmlns:r="http://schemas.openxmlformats.org/officeDocument/2006/relationships" xmlns:p="http://schemas.openxmlformats.org/presentationml/2006/main">
   <p:cSld name="Slide 6">
     <p:bg>
@@ -10444,1280 +12174,6 @@
           </a:p>
         </p:txBody>
       </p:sp>
-    </p:spTree>
-  </p:cSld>
-  <p:clrMapOvr>
-    <a:masterClrMapping/>
-  </p:clrMapOvr>
-</p:sld>
-</file>
-
-<file path=ppt/slides/slide7.xml><?xml version="1.0" encoding="utf-8"?>
-<p:sld xmlns:a="http://schemas.openxmlformats.org/drawingml/2006/main" xmlns:r="http://schemas.openxmlformats.org/officeDocument/2006/relationships" xmlns:p="http://schemas.openxmlformats.org/presentationml/2006/main">
-  <p:cSld name="Slide 7">
-    <p:bg>
-      <p:bgPr>
-        <a:solidFill>
-          <a:srgbClr val="F5F7FA"/>
-        </a:solidFill>
-        <a:effectLst/>
-      </p:bgPr>
-    </p:bg>
-    <p:spTree>
-      <p:nvGrpSpPr>
-        <p:cNvPr id="1" name=""/>
-        <p:cNvGrpSpPr/>
-        <p:nvPr/>
-      </p:nvGrpSpPr>
-      <p:grpSpPr>
-        <a:xfrm>
-          <a:off x="0" y="0"/>
-          <a:ext cx="0" cy="0"/>
-          <a:chOff x="0" y="0"/>
-          <a:chExt cx="0" cy="0"/>
-        </a:xfrm>
-      </p:grpSpPr>
-      <p:sp>
-        <p:nvSpPr>
-          <p:cNvPr id="2" name="Text 0"/>
-          <p:cNvSpPr txBox="1"/>
-          <p:nvPr/>
-        </p:nvSpPr>
-        <p:spPr>
-          <a:xfrm>
-            <a:off x="548640" y="411480"/>
-            <a:ext cx="8961120" cy="685800"/>
-          </a:xfrm>
-          <a:prstGeom prst="rect">
-            <a:avLst/>
-          </a:prstGeom>
-          <a:noFill/>
-          <a:ln/>
-        </p:spPr>
-        <p:txBody>
-          <a:bodyPr wrap="square" lIns="0" tIns="0" rIns="0" bIns="0" rtlCol="0" anchor="t"/>
-          <a:lstStyle/>
-          <a:p>
-            <a:pPr marL="0" indent="0">
-              <a:buNone/>
-            </a:pPr>
-            <a:r>
-              <a:rPr lang="en-US" sz="3000" b="1" dirty="0">
-                <a:solidFill>
-                  <a:srgbClr val="1B2A4A"/>
-                </a:solidFill>
-                <a:latin typeface="Times New Roman" panose="02020603050405020304" pitchFamily="18" charset="0"/>
-                <a:ea typeface="Cambria" pitchFamily="34" charset="-122"/>
-                <a:cs typeface="Times New Roman" panose="02020603050405020304" pitchFamily="18" charset="0"/>
-              </a:rPr>
-              <a:t>Dataset Structure &amp; Target Definition</a:t>
-            </a:r>
-            <a:endParaRPr lang="en-US" sz="3000" dirty="0">
-              <a:latin typeface="Times New Roman" panose="02020603050405020304" pitchFamily="18" charset="0"/>
-              <a:cs typeface="Times New Roman" panose="02020603050405020304" pitchFamily="18" charset="0"/>
-            </a:endParaRPr>
-          </a:p>
-        </p:txBody>
-      </p:sp>
-      <p:sp>
-        <p:nvSpPr>
-          <p:cNvPr id="3" name="Shape 1"/>
-          <p:cNvSpPr/>
-          <p:nvPr/>
-        </p:nvSpPr>
-        <p:spPr>
-          <a:xfrm>
-            <a:off x="548640" y="1417320"/>
-            <a:ext cx="3017520" cy="594360"/>
-          </a:xfrm>
-          <a:prstGeom prst="roundRect">
-            <a:avLst>
-              <a:gd name="adj" fmla="val 9231"/>
-            </a:avLst>
-          </a:prstGeom>
-          <a:solidFill>
-            <a:srgbClr val="FFFFFF"/>
-          </a:solidFill>
-          <a:ln w="19050">
-            <a:solidFill>
-              <a:srgbClr val="4A6FA5"/>
-            </a:solidFill>
-            <a:prstDash val="solid"/>
-          </a:ln>
-        </p:spPr>
-      </p:sp>
-      <p:sp>
-        <p:nvSpPr>
-          <p:cNvPr id="4" name="Text 2"/>
-          <p:cNvSpPr txBox="1"/>
-          <p:nvPr/>
-        </p:nvSpPr>
-        <p:spPr>
-          <a:xfrm>
-            <a:off x="548640" y="1417320"/>
-            <a:ext cx="3017520" cy="594360"/>
-          </a:xfrm>
-          <a:prstGeom prst="rect">
-            <a:avLst/>
-          </a:prstGeom>
-          <a:noFill/>
-          <a:ln/>
-        </p:spPr>
-        <p:txBody>
-          <a:bodyPr wrap="square" lIns="0" tIns="0" rIns="0" bIns="0" rtlCol="0" anchor="ctr"/>
-          <a:lstStyle/>
-          <a:p>
-            <a:pPr marL="0" indent="0" algn="ctr">
-              <a:buNone/>
-            </a:pPr>
-            <a:r>
-              <a:rPr lang="en-US" sz="1250" b="1" dirty="0">
-                <a:solidFill>
-                  <a:srgbClr val="1B2A4A"/>
-                </a:solidFill>
-                <a:latin typeface="Times New Roman" panose="02020603050405020304" pitchFamily="18" charset="0"/>
-                <a:ea typeface="Calibri" pitchFamily="34" charset="-122"/>
-                <a:cs typeface="Times New Roman" panose="02020603050405020304" pitchFamily="18" charset="0"/>
-              </a:rPr>
-              <a:t>0 — Legitimate</a:t>
-            </a:r>
-            <a:endParaRPr lang="en-US" sz="1250" dirty="0">
-              <a:latin typeface="Times New Roman" panose="02020603050405020304" pitchFamily="18" charset="0"/>
-              <a:cs typeface="Times New Roman" panose="02020603050405020304" pitchFamily="18" charset="0"/>
-            </a:endParaRPr>
-          </a:p>
-        </p:txBody>
-      </p:sp>
-      <p:sp>
-        <p:nvSpPr>
-          <p:cNvPr id="5" name="Shape 3"/>
-          <p:cNvSpPr/>
-          <p:nvPr/>
-        </p:nvSpPr>
-        <p:spPr>
-          <a:xfrm>
-            <a:off x="548640" y="2148840"/>
-            <a:ext cx="3017520" cy="594360"/>
-          </a:xfrm>
-          <a:prstGeom prst="roundRect">
-            <a:avLst>
-              <a:gd name="adj" fmla="val 9231"/>
-            </a:avLst>
-          </a:prstGeom>
-          <a:solidFill>
-            <a:srgbClr val="FFFFFF"/>
-          </a:solidFill>
-          <a:ln w="19050">
-            <a:solidFill>
-              <a:srgbClr val="C0392B"/>
-            </a:solidFill>
-            <a:prstDash val="solid"/>
-          </a:ln>
-        </p:spPr>
-      </p:sp>
-      <p:sp>
-        <p:nvSpPr>
-          <p:cNvPr id="6" name="Text 4"/>
-          <p:cNvSpPr txBox="1"/>
-          <p:nvPr/>
-        </p:nvSpPr>
-        <p:spPr>
-          <a:xfrm>
-            <a:off x="548640" y="2148840"/>
-            <a:ext cx="3017520" cy="594360"/>
-          </a:xfrm>
-          <a:prstGeom prst="rect">
-            <a:avLst/>
-          </a:prstGeom>
-          <a:noFill/>
-          <a:ln/>
-        </p:spPr>
-        <p:txBody>
-          <a:bodyPr wrap="square" lIns="0" tIns="0" rIns="0" bIns="0" rtlCol="0" anchor="ctr"/>
-          <a:lstStyle/>
-          <a:p>
-            <a:pPr marL="0" indent="0" algn="ctr">
-              <a:buNone/>
-            </a:pPr>
-            <a:r>
-              <a:rPr lang="en-US" sz="1250" b="1" dirty="0">
-                <a:solidFill>
-                  <a:srgbClr val="1B2A4A"/>
-                </a:solidFill>
-                <a:latin typeface="Times New Roman" panose="02020603050405020304" pitchFamily="18" charset="0"/>
-                <a:ea typeface="Calibri" pitchFamily="34" charset="-122"/>
-                <a:cs typeface="Times New Roman" panose="02020603050405020304" pitchFamily="18" charset="0"/>
-              </a:rPr>
-              <a:t>1 — Suspicious</a:t>
-            </a:r>
-            <a:endParaRPr lang="en-US" sz="1250" dirty="0">
-              <a:latin typeface="Times New Roman" panose="02020603050405020304" pitchFamily="18" charset="0"/>
-              <a:cs typeface="Times New Roman" panose="02020603050405020304" pitchFamily="18" charset="0"/>
-            </a:endParaRPr>
-          </a:p>
-        </p:txBody>
-      </p:sp>
-      <p:sp>
-        <p:nvSpPr>
-          <p:cNvPr id="7" name="Shape 5"/>
-          <p:cNvSpPr/>
-          <p:nvPr/>
-        </p:nvSpPr>
-        <p:spPr>
-          <a:xfrm>
-            <a:off x="548640" y="2880360"/>
-            <a:ext cx="3017520" cy="594360"/>
-          </a:xfrm>
-          <a:prstGeom prst="roundRect">
-            <a:avLst>
-              <a:gd name="adj" fmla="val 9231"/>
-            </a:avLst>
-          </a:prstGeom>
-          <a:solidFill>
-            <a:srgbClr val="FFFFFF"/>
-          </a:solidFill>
-          <a:ln w="19050">
-            <a:solidFill>
-              <a:srgbClr val="C0392B"/>
-            </a:solidFill>
-            <a:prstDash val="solid"/>
-          </a:ln>
-        </p:spPr>
-      </p:sp>
-      <p:sp>
-        <p:nvSpPr>
-          <p:cNvPr id="8" name="Text 6"/>
-          <p:cNvSpPr txBox="1"/>
-          <p:nvPr/>
-        </p:nvSpPr>
-        <p:spPr>
-          <a:xfrm>
-            <a:off x="548640" y="2880360"/>
-            <a:ext cx="3017520" cy="594360"/>
-          </a:xfrm>
-          <a:prstGeom prst="rect">
-            <a:avLst/>
-          </a:prstGeom>
-          <a:noFill/>
-          <a:ln/>
-        </p:spPr>
-        <p:txBody>
-          <a:bodyPr wrap="square" lIns="0" tIns="0" rIns="0" bIns="0" rtlCol="0" anchor="ctr"/>
-          <a:lstStyle/>
-          <a:p>
-            <a:pPr marL="0" indent="0" algn="ctr">
-              <a:buNone/>
-            </a:pPr>
-            <a:r>
-              <a:rPr lang="en-US" sz="1250" b="1" dirty="0">
-                <a:solidFill>
-                  <a:srgbClr val="1B2A4A"/>
-                </a:solidFill>
-                <a:latin typeface="Times New Roman" panose="02020603050405020304" pitchFamily="18" charset="0"/>
-                <a:ea typeface="Calibri" pitchFamily="34" charset="-122"/>
-                <a:cs typeface="Times New Roman" panose="02020603050405020304" pitchFamily="18" charset="0"/>
-              </a:rPr>
-              <a:t>2 — Fraudulent / Scam</a:t>
-            </a:r>
-            <a:endParaRPr lang="en-US" sz="1250" dirty="0">
-              <a:latin typeface="Times New Roman" panose="02020603050405020304" pitchFamily="18" charset="0"/>
-              <a:cs typeface="Times New Roman" panose="02020603050405020304" pitchFamily="18" charset="0"/>
-            </a:endParaRPr>
-          </a:p>
-        </p:txBody>
-      </p:sp>
-      <p:sp>
-        <p:nvSpPr>
-          <p:cNvPr id="9" name="Shape 7"/>
-          <p:cNvSpPr/>
-          <p:nvPr/>
-        </p:nvSpPr>
-        <p:spPr>
-          <a:xfrm>
-            <a:off x="8138160" y="1417320"/>
-            <a:ext cx="3017520" cy="594360"/>
-          </a:xfrm>
-          <a:prstGeom prst="roundRect">
-            <a:avLst>
-              <a:gd name="adj" fmla="val 9231"/>
-            </a:avLst>
-          </a:prstGeom>
-          <a:solidFill>
-            <a:srgbClr val="4A6FA5"/>
-          </a:solidFill>
-          <a:ln/>
-        </p:spPr>
-      </p:sp>
-      <p:sp>
-        <p:nvSpPr>
-          <p:cNvPr id="10" name="Text 8"/>
-          <p:cNvSpPr txBox="1"/>
-          <p:nvPr/>
-        </p:nvSpPr>
-        <p:spPr>
-          <a:xfrm>
-            <a:off x="8138160" y="1417320"/>
-            <a:ext cx="3017520" cy="594360"/>
-          </a:xfrm>
-          <a:prstGeom prst="rect">
-            <a:avLst/>
-          </a:prstGeom>
-          <a:noFill/>
-          <a:ln/>
-        </p:spPr>
-        <p:txBody>
-          <a:bodyPr wrap="square" lIns="0" tIns="0" rIns="0" bIns="0" rtlCol="0" anchor="ctr"/>
-          <a:lstStyle/>
-          <a:p>
-            <a:pPr marL="0" indent="0" algn="ctr">
-              <a:buNone/>
-            </a:pPr>
-            <a:r>
-              <a:rPr lang="en-US" sz="1250" b="1" dirty="0">
-                <a:solidFill>
-                  <a:srgbClr val="FFFFFF"/>
-                </a:solidFill>
-                <a:latin typeface="Times New Roman" panose="02020603050405020304" pitchFamily="18" charset="0"/>
-                <a:ea typeface="Calibri" pitchFamily="34" charset="-122"/>
-                <a:cs typeface="Times New Roman" panose="02020603050405020304" pitchFamily="18" charset="0"/>
-              </a:rPr>
-              <a:t>0 = Legitimate</a:t>
-            </a:r>
-            <a:endParaRPr lang="en-US" sz="1250" dirty="0">
-              <a:latin typeface="Times New Roman" panose="02020603050405020304" pitchFamily="18" charset="0"/>
-              <a:cs typeface="Times New Roman" panose="02020603050405020304" pitchFamily="18" charset="0"/>
-            </a:endParaRPr>
-          </a:p>
-        </p:txBody>
-      </p:sp>
-      <p:sp>
-        <p:nvSpPr>
-          <p:cNvPr id="11" name="Shape 9"/>
-          <p:cNvSpPr/>
-          <p:nvPr/>
-        </p:nvSpPr>
-        <p:spPr>
-          <a:xfrm>
-            <a:off x="8138160" y="2240280"/>
-            <a:ext cx="3017520" cy="1234440"/>
-          </a:xfrm>
-          <a:prstGeom prst="roundRect">
-            <a:avLst>
-              <a:gd name="adj" fmla="val 4444"/>
-            </a:avLst>
-          </a:prstGeom>
-          <a:solidFill>
-            <a:srgbClr val="C0392B"/>
-          </a:solidFill>
-          <a:ln/>
-        </p:spPr>
-      </p:sp>
-      <p:sp>
-        <p:nvSpPr>
-          <p:cNvPr id="12" name="Text 10"/>
-          <p:cNvSpPr txBox="1"/>
-          <p:nvPr/>
-        </p:nvSpPr>
-        <p:spPr>
-          <a:xfrm>
-            <a:off x="8138160" y="2240280"/>
-            <a:ext cx="3017520" cy="1234440"/>
-          </a:xfrm>
-          <a:prstGeom prst="rect">
-            <a:avLst/>
-          </a:prstGeom>
-          <a:noFill/>
-          <a:ln/>
-        </p:spPr>
-        <p:txBody>
-          <a:bodyPr wrap="square" lIns="0" tIns="0" rIns="0" bIns="0" rtlCol="0" anchor="ctr"/>
-          <a:lstStyle/>
-          <a:p>
-            <a:pPr marL="0" indent="0" algn="ctr">
-              <a:buNone/>
-            </a:pPr>
-            <a:r>
-              <a:rPr lang="en-US" sz="1250" b="1" dirty="0">
-                <a:solidFill>
-                  <a:srgbClr val="FFFFFF"/>
-                </a:solidFill>
-                <a:latin typeface="Times New Roman" panose="02020603050405020304" pitchFamily="18" charset="0"/>
-                <a:ea typeface="Calibri" pitchFamily="34" charset="-122"/>
-                <a:cs typeface="Times New Roman" panose="02020603050405020304" pitchFamily="18" charset="0"/>
-              </a:rPr>
-              <a:t>1 = Fraud-risk</a:t>
-            </a:r>
-            <a:endParaRPr lang="en-US" sz="1250" dirty="0">
-              <a:latin typeface="Times New Roman" panose="02020603050405020304" pitchFamily="18" charset="0"/>
-              <a:cs typeface="Times New Roman" panose="02020603050405020304" pitchFamily="18" charset="0"/>
-            </a:endParaRPr>
-          </a:p>
-          <a:p>
-            <a:pPr marL="0" indent="0" algn="ctr">
-              <a:buNone/>
-            </a:pPr>
-            <a:r>
-              <a:rPr lang="en-US" sz="1250" b="1" dirty="0">
-                <a:solidFill>
-                  <a:srgbClr val="FFFFFF"/>
-                </a:solidFill>
-                <a:latin typeface="Times New Roman" panose="02020603050405020304" pitchFamily="18" charset="0"/>
-                <a:ea typeface="Calibri" pitchFamily="34" charset="-122"/>
-                <a:cs typeface="Times New Roman" panose="02020603050405020304" pitchFamily="18" charset="0"/>
-              </a:rPr>
-              <a:t>(Suspicious + Fraudulent)</a:t>
-            </a:r>
-            <a:endParaRPr lang="en-US" sz="1250" dirty="0">
-              <a:latin typeface="Times New Roman" panose="02020603050405020304" pitchFamily="18" charset="0"/>
-              <a:cs typeface="Times New Roman" panose="02020603050405020304" pitchFamily="18" charset="0"/>
-            </a:endParaRPr>
-          </a:p>
-        </p:txBody>
-      </p:sp>
-      <p:sp>
-        <p:nvSpPr>
-          <p:cNvPr id="13" name="Shape 11"/>
-          <p:cNvSpPr/>
-          <p:nvPr/>
-        </p:nvSpPr>
-        <p:spPr>
-          <a:xfrm flipV="1">
-            <a:off x="3566160" y="1714500"/>
-            <a:ext cx="4572000" cy="9144"/>
-          </a:xfrm>
-          <a:prstGeom prst="line">
-            <a:avLst/>
-          </a:prstGeom>
-          <a:noFill/>
-          <a:ln w="25400">
-            <a:solidFill>
-              <a:srgbClr val="4A6FA5"/>
-            </a:solidFill>
-            <a:prstDash val="solid"/>
-          </a:ln>
-        </p:spPr>
-      </p:sp>
-      <p:sp>
-        <p:nvSpPr>
-          <p:cNvPr id="14" name="Shape 12"/>
-          <p:cNvSpPr/>
-          <p:nvPr/>
-        </p:nvSpPr>
-        <p:spPr>
-          <a:xfrm>
-            <a:off x="3566160" y="2446020"/>
-            <a:ext cx="4572000" cy="205740"/>
-          </a:xfrm>
-          <a:prstGeom prst="line">
-            <a:avLst/>
-          </a:prstGeom>
-          <a:noFill/>
-          <a:ln w="25400">
-            <a:solidFill>
-              <a:srgbClr val="C0392B"/>
-            </a:solidFill>
-            <a:prstDash val="solid"/>
-          </a:ln>
-        </p:spPr>
-      </p:sp>
-      <p:sp>
-        <p:nvSpPr>
-          <p:cNvPr id="15" name="Shape 13"/>
-          <p:cNvSpPr/>
-          <p:nvPr/>
-        </p:nvSpPr>
-        <p:spPr>
-          <a:xfrm flipV="1">
-            <a:off x="3566160" y="3017520"/>
-            <a:ext cx="4572000" cy="160020"/>
-          </a:xfrm>
-          <a:prstGeom prst="line">
-            <a:avLst/>
-          </a:prstGeom>
-          <a:noFill/>
-          <a:ln w="25400">
-            <a:solidFill>
-              <a:srgbClr val="C0392B"/>
-            </a:solidFill>
-            <a:prstDash val="solid"/>
-          </a:ln>
-        </p:spPr>
-      </p:sp>
-      <p:sp>
-        <p:nvSpPr>
-          <p:cNvPr id="16" name="Text 14"/>
-          <p:cNvSpPr txBox="1"/>
-          <p:nvPr/>
-        </p:nvSpPr>
-        <p:spPr>
-          <a:xfrm>
-            <a:off x="548640" y="3657600"/>
-            <a:ext cx="10607040" cy="365760"/>
-          </a:xfrm>
-          <a:prstGeom prst="rect">
-            <a:avLst/>
-          </a:prstGeom>
-          <a:noFill/>
-          <a:ln/>
-        </p:spPr>
-        <p:txBody>
-          <a:bodyPr wrap="square" lIns="0" tIns="0" rIns="0" bIns="0" rtlCol="0" anchor="ctr"/>
-          <a:lstStyle/>
-          <a:p>
-            <a:pPr marL="0" indent="0">
-              <a:buNone/>
-            </a:pPr>
-            <a:r>
-              <a:rPr lang="en-US" sz="1150" i="1" dirty="0">
-                <a:solidFill>
-                  <a:srgbClr val="6B7A8D"/>
-                </a:solidFill>
-                <a:latin typeface="Times New Roman" panose="02020603050405020304" pitchFamily="18" charset="0"/>
-                <a:ea typeface="Calibri" pitchFamily="34" charset="-122"/>
-                <a:cs typeface="Times New Roman" panose="02020603050405020304" pitchFamily="18" charset="0"/>
-              </a:rPr>
-              <a:t>Binary modeling target: Suspicious and Fraudulent/Scam are combined into a single Fraud-risk positive class.</a:t>
-            </a:r>
-            <a:endParaRPr lang="en-US" sz="1150" dirty="0">
-              <a:latin typeface="Times New Roman" panose="02020603050405020304" pitchFamily="18" charset="0"/>
-              <a:cs typeface="Times New Roman" panose="02020603050405020304" pitchFamily="18" charset="0"/>
-            </a:endParaRPr>
-          </a:p>
-        </p:txBody>
-      </p:sp>
-      <p:graphicFrame>
-        <p:nvGraphicFramePr>
-          <p:cNvPr id="17" name="Table 0"/>
-          <p:cNvGraphicFramePr>
-            <a:graphicFrameLocks noGrp="1"/>
-          </p:cNvGraphicFramePr>
-          <p:nvPr>
-            <p:extLst>
-              <p:ext uri="{D42A27DB-BD31-4B8C-83A1-F6EECF244321}">
-                <p14:modId xmlns:p14="http://schemas.microsoft.com/office/powerpoint/2010/main" val="1579011935"/>
-              </p:ext>
-            </p:extLst>
-          </p:nvPr>
-        </p:nvGraphicFramePr>
-        <p:xfrm>
-          <a:off x="548640" y="4160520"/>
-          <a:ext cx="10607040" cy="2286000"/>
-        </p:xfrm>
-        <a:graphic>
-          <a:graphicData uri="http://schemas.openxmlformats.org/drawingml/2006/table">
-            <a:tbl>
-              <a:tblPr/>
-              <a:tblGrid>
-                <a:gridCol w="2103120">
-                  <a:extLst>
-                    <a:ext uri="{9D8B030D-6E8A-4147-A177-3AD203B41FA5}">
-                      <a16:colId xmlns:a16="http://schemas.microsoft.com/office/drawing/2014/main" val="20000"/>
-                    </a:ext>
-                  </a:extLst>
-                </a:gridCol>
-                <a:gridCol w="8503920">
-                  <a:extLst>
-                    <a:ext uri="{9D8B030D-6E8A-4147-A177-3AD203B41FA5}">
-                      <a16:colId xmlns:a16="http://schemas.microsoft.com/office/drawing/2014/main" val="20001"/>
-                    </a:ext>
-                  </a:extLst>
-                </a:gridCol>
-              </a:tblGrid>
-              <a:tr h="457200">
-                <a:tc>
-                  <a:txBody>
-                    <a:bodyPr/>
-                    <a:lstStyle/>
-                    <a:p>
-                      <a:pPr marL="0" indent="0">
-                        <a:buNone/>
-                      </a:pPr>
-                      <a:r>
-                        <a:rPr lang="en-US" sz="1200" b="1" dirty="0">
-                          <a:solidFill>
-                            <a:srgbClr val="FFFFFF"/>
-                          </a:solidFill>
-                          <a:latin typeface="Calibri" pitchFamily="34" charset="0"/>
-                          <a:ea typeface="Calibri" pitchFamily="34" charset="-122"/>
-                          <a:cs typeface="Calibri" pitchFamily="34" charset="-120"/>
-                        </a:rPr>
-                        <a:t>Feature group</a:t>
-                      </a:r>
-                      <a:endParaRPr lang="en-US" sz="1200" dirty="0">
-                        <a:latin typeface="Calibri" charset="0"/>
-                        <a:ea typeface="Calibri" charset="0"/>
-                        <a:cs typeface="Calibri" charset="0"/>
-                      </a:endParaRPr>
-                    </a:p>
-                  </a:txBody>
-                  <a:tcPr anchor="ctr">
-                    <a:lnL w="12700" cap="flat" cmpd="sng" algn="ctr">
-                      <a:solidFill>
-                        <a:srgbClr val="E1E6ED"/>
-                      </a:solidFill>
-                      <a:prstDash val="solid"/>
-                      <a:round/>
-                      <a:headEnd type="none" w="med" len="med"/>
-                      <a:tailEnd type="none" w="med" len="med"/>
-                    </a:lnL>
-                    <a:lnR w="12700" cap="flat" cmpd="sng" algn="ctr">
-                      <a:solidFill>
-                        <a:srgbClr val="E1E6ED"/>
-                      </a:solidFill>
-                      <a:prstDash val="solid"/>
-                      <a:round/>
-                      <a:headEnd type="none" w="med" len="med"/>
-                      <a:tailEnd type="none" w="med" len="med"/>
-                    </a:lnR>
-                    <a:lnT w="12700" cap="flat" cmpd="sng" algn="ctr">
-                      <a:solidFill>
-                        <a:srgbClr val="E1E6ED"/>
-                      </a:solidFill>
-                      <a:prstDash val="solid"/>
-                      <a:round/>
-                      <a:headEnd type="none" w="med" len="med"/>
-                      <a:tailEnd type="none" w="med" len="med"/>
-                    </a:lnT>
-                    <a:lnB w="12700" cap="flat" cmpd="sng" algn="ctr">
-                      <a:solidFill>
-                        <a:srgbClr val="E1E6ED"/>
-                      </a:solidFill>
-                      <a:prstDash val="solid"/>
-                      <a:round/>
-                      <a:headEnd type="none" w="med" len="med"/>
-                      <a:tailEnd type="none" w="med" len="med"/>
-                    </a:lnB>
-                    <a:solidFill>
-                      <a:srgbClr val="1B2A4A"/>
-                    </a:solidFill>
-                  </a:tcPr>
-                </a:tc>
-                <a:tc>
-                  <a:txBody>
-                    <a:bodyPr/>
-                    <a:lstStyle/>
-                    <a:p>
-                      <a:pPr marL="0" indent="0">
-                        <a:buNone/>
-                      </a:pPr>
-                      <a:r>
-                        <a:rPr lang="en-US" sz="1200" b="1" dirty="0">
-                          <a:solidFill>
-                            <a:srgbClr val="FFFFFF"/>
-                          </a:solidFill>
-                          <a:latin typeface="Calibri" pitchFamily="34" charset="0"/>
-                          <a:ea typeface="Calibri" pitchFamily="34" charset="-122"/>
-                          <a:cs typeface="Calibri" pitchFamily="34" charset="-120"/>
-                        </a:rPr>
-                        <a:t>Examples</a:t>
-                      </a:r>
-                      <a:endParaRPr lang="en-US" sz="1200" dirty="0">
-                        <a:latin typeface="Calibri" charset="0"/>
-                        <a:ea typeface="Calibri" charset="0"/>
-                        <a:cs typeface="Calibri" charset="0"/>
-                      </a:endParaRPr>
-                    </a:p>
-                  </a:txBody>
-                  <a:tcPr anchor="ctr">
-                    <a:lnL w="12700" cap="flat" cmpd="sng" algn="ctr">
-                      <a:solidFill>
-                        <a:srgbClr val="E1E6ED"/>
-                      </a:solidFill>
-                      <a:prstDash val="solid"/>
-                      <a:round/>
-                      <a:headEnd type="none" w="med" len="med"/>
-                      <a:tailEnd type="none" w="med" len="med"/>
-                    </a:lnL>
-                    <a:lnR w="12700" cap="flat" cmpd="sng" algn="ctr">
-                      <a:solidFill>
-                        <a:srgbClr val="E1E6ED"/>
-                      </a:solidFill>
-                      <a:prstDash val="solid"/>
-                      <a:round/>
-                      <a:headEnd type="none" w="med" len="med"/>
-                      <a:tailEnd type="none" w="med" len="med"/>
-                    </a:lnR>
-                    <a:lnT w="12700" cap="flat" cmpd="sng" algn="ctr">
-                      <a:solidFill>
-                        <a:srgbClr val="E1E6ED"/>
-                      </a:solidFill>
-                      <a:prstDash val="solid"/>
-                      <a:round/>
-                      <a:headEnd type="none" w="med" len="med"/>
-                      <a:tailEnd type="none" w="med" len="med"/>
-                    </a:lnT>
-                    <a:lnB w="12700" cap="flat" cmpd="sng" algn="ctr">
-                      <a:solidFill>
-                        <a:srgbClr val="E1E6ED"/>
-                      </a:solidFill>
-                      <a:prstDash val="solid"/>
-                      <a:round/>
-                      <a:headEnd type="none" w="med" len="med"/>
-                      <a:tailEnd type="none" w="med" len="med"/>
-                    </a:lnB>
-                    <a:solidFill>
-                      <a:srgbClr val="1B2A4A"/>
-                    </a:solidFill>
-                  </a:tcPr>
-                </a:tc>
-                <a:extLst>
-                  <a:ext uri="{0D108BD9-81ED-4DB2-BD59-A6C34878D82A}">
-                    <a16:rowId xmlns:a16="http://schemas.microsoft.com/office/drawing/2014/main" val="10000"/>
-                  </a:ext>
-                </a:extLst>
-              </a:tr>
-              <a:tr h="457200">
-                <a:tc>
-                  <a:txBody>
-                    <a:bodyPr/>
-                    <a:lstStyle/>
-                    <a:p>
-                      <a:pPr marL="0" indent="0">
-                        <a:buNone/>
-                      </a:pPr>
-                      <a:r>
-                        <a:rPr lang="en-US" sz="1100" dirty="0">
-                          <a:solidFill>
-                            <a:srgbClr val="33414F"/>
-                          </a:solidFill>
-                          <a:latin typeface="Calibri" pitchFamily="34" charset="0"/>
-                          <a:ea typeface="Calibri" pitchFamily="34" charset="-122"/>
-                          <a:cs typeface="Calibri" pitchFamily="34" charset="-120"/>
-                        </a:rPr>
-                        <a:t>Text</a:t>
-                      </a:r>
-                      <a:endParaRPr lang="en-US" sz="1100" dirty="0">
-                        <a:latin typeface="Calibri" charset="0"/>
-                        <a:ea typeface="Calibri" charset="0"/>
-                        <a:cs typeface="Calibri" charset="0"/>
-                      </a:endParaRPr>
-                    </a:p>
-                  </a:txBody>
-                  <a:tcPr anchor="ctr">
-                    <a:lnL w="12700" cap="flat" cmpd="sng" algn="ctr">
-                      <a:solidFill>
-                        <a:srgbClr val="E1E6ED"/>
-                      </a:solidFill>
-                      <a:prstDash val="solid"/>
-                      <a:round/>
-                      <a:headEnd type="none" w="med" len="med"/>
-                      <a:tailEnd type="none" w="med" len="med"/>
-                    </a:lnL>
-                    <a:lnR w="12700" cap="flat" cmpd="sng" algn="ctr">
-                      <a:solidFill>
-                        <a:srgbClr val="E1E6ED"/>
-                      </a:solidFill>
-                      <a:prstDash val="solid"/>
-                      <a:round/>
-                      <a:headEnd type="none" w="med" len="med"/>
-                      <a:tailEnd type="none" w="med" len="med"/>
-                    </a:lnR>
-                    <a:lnT w="12700" cap="flat" cmpd="sng" algn="ctr">
-                      <a:solidFill>
-                        <a:srgbClr val="E1E6ED"/>
-                      </a:solidFill>
-                      <a:prstDash val="solid"/>
-                      <a:round/>
-                      <a:headEnd type="none" w="med" len="med"/>
-                      <a:tailEnd type="none" w="med" len="med"/>
-                    </a:lnT>
-                    <a:lnB w="12700" cap="flat" cmpd="sng" algn="ctr">
-                      <a:solidFill>
-                        <a:srgbClr val="E1E6ED"/>
-                      </a:solidFill>
-                      <a:prstDash val="solid"/>
-                      <a:round/>
-                      <a:headEnd type="none" w="med" len="med"/>
-                      <a:tailEnd type="none" w="med" len="med"/>
-                    </a:lnB>
-                  </a:tcPr>
-                </a:tc>
-                <a:tc>
-                  <a:txBody>
-                    <a:bodyPr/>
-                    <a:lstStyle/>
-                    <a:p>
-                      <a:pPr marL="0" indent="0">
-                        <a:buNone/>
-                      </a:pPr>
-                      <a:r>
-                        <a:rPr lang="en-US" sz="1100" dirty="0">
-                          <a:solidFill>
-                            <a:srgbClr val="33414F"/>
-                          </a:solidFill>
-                          <a:latin typeface="Calibri" pitchFamily="34" charset="0"/>
-                          <a:ea typeface="Calibri" pitchFamily="34" charset="-122"/>
-                          <a:cs typeface="Calibri" pitchFamily="34" charset="-120"/>
-                        </a:rPr>
-                        <a:t>title + description + requirements → TF-IDF, 1–2 n-grams, 50K-word vocabulary</a:t>
-                      </a:r>
-                      <a:endParaRPr lang="en-US" sz="1100" dirty="0">
-                        <a:latin typeface="Calibri" charset="0"/>
-                        <a:ea typeface="Calibri" charset="0"/>
-                        <a:cs typeface="Calibri" charset="0"/>
-                      </a:endParaRPr>
-                    </a:p>
-                  </a:txBody>
-                  <a:tcPr anchor="ctr">
-                    <a:lnL w="12700" cap="flat" cmpd="sng" algn="ctr">
-                      <a:solidFill>
-                        <a:srgbClr val="E1E6ED"/>
-                      </a:solidFill>
-                      <a:prstDash val="solid"/>
-                      <a:round/>
-                      <a:headEnd type="none" w="med" len="med"/>
-                      <a:tailEnd type="none" w="med" len="med"/>
-                    </a:lnL>
-                    <a:lnR w="12700" cap="flat" cmpd="sng" algn="ctr">
-                      <a:solidFill>
-                        <a:srgbClr val="E1E6ED"/>
-                      </a:solidFill>
-                      <a:prstDash val="solid"/>
-                      <a:round/>
-                      <a:headEnd type="none" w="med" len="med"/>
-                      <a:tailEnd type="none" w="med" len="med"/>
-                    </a:lnR>
-                    <a:lnT w="12700" cap="flat" cmpd="sng" algn="ctr">
-                      <a:solidFill>
-                        <a:srgbClr val="E1E6ED"/>
-                      </a:solidFill>
-                      <a:prstDash val="solid"/>
-                      <a:round/>
-                      <a:headEnd type="none" w="med" len="med"/>
-                      <a:tailEnd type="none" w="med" len="med"/>
-                    </a:lnT>
-                    <a:lnB w="12700" cap="flat" cmpd="sng" algn="ctr">
-                      <a:solidFill>
-                        <a:srgbClr val="E1E6ED"/>
-                      </a:solidFill>
-                      <a:prstDash val="solid"/>
-                      <a:round/>
-                      <a:headEnd type="none" w="med" len="med"/>
-                      <a:tailEnd type="none" w="med" len="med"/>
-                    </a:lnB>
-                  </a:tcPr>
-                </a:tc>
-                <a:extLst>
-                  <a:ext uri="{0D108BD9-81ED-4DB2-BD59-A6C34878D82A}">
-                    <a16:rowId xmlns:a16="http://schemas.microsoft.com/office/drawing/2014/main" val="10001"/>
-                  </a:ext>
-                </a:extLst>
-              </a:tr>
-              <a:tr h="457200">
-                <a:tc>
-                  <a:txBody>
-                    <a:bodyPr/>
-                    <a:lstStyle/>
-                    <a:p>
-                      <a:pPr marL="0" indent="0">
-                        <a:buNone/>
-                      </a:pPr>
-                      <a:r>
-                        <a:rPr lang="en-US" sz="1100" dirty="0">
-                          <a:solidFill>
-                            <a:srgbClr val="33414F"/>
-                          </a:solidFill>
-                          <a:latin typeface="Calibri" pitchFamily="34" charset="0"/>
-                          <a:ea typeface="Calibri" pitchFamily="34" charset="-122"/>
-                          <a:cs typeface="Calibri" pitchFamily="34" charset="-120"/>
-                        </a:rPr>
-                        <a:t>Structured</a:t>
-                      </a:r>
-                      <a:endParaRPr lang="en-US" sz="1100" dirty="0">
-                        <a:latin typeface="Calibri" charset="0"/>
-                        <a:ea typeface="Calibri" charset="0"/>
-                        <a:cs typeface="Calibri" charset="0"/>
-                      </a:endParaRPr>
-                    </a:p>
-                  </a:txBody>
-                  <a:tcPr anchor="ctr">
-                    <a:lnL w="12700" cap="flat" cmpd="sng" algn="ctr">
-                      <a:solidFill>
-                        <a:srgbClr val="E1E6ED"/>
-                      </a:solidFill>
-                      <a:prstDash val="solid"/>
-                      <a:round/>
-                      <a:headEnd type="none" w="med" len="med"/>
-                      <a:tailEnd type="none" w="med" len="med"/>
-                    </a:lnL>
-                    <a:lnR w="12700" cap="flat" cmpd="sng" algn="ctr">
-                      <a:solidFill>
-                        <a:srgbClr val="E1E6ED"/>
-                      </a:solidFill>
-                      <a:prstDash val="solid"/>
-                      <a:round/>
-                      <a:headEnd type="none" w="med" len="med"/>
-                      <a:tailEnd type="none" w="med" len="med"/>
-                    </a:lnR>
-                    <a:lnT w="12700" cap="flat" cmpd="sng" algn="ctr">
-                      <a:solidFill>
-                        <a:srgbClr val="E1E6ED"/>
-                      </a:solidFill>
-                      <a:prstDash val="solid"/>
-                      <a:round/>
-                      <a:headEnd type="none" w="med" len="med"/>
-                      <a:tailEnd type="none" w="med" len="med"/>
-                    </a:lnT>
-                    <a:lnB w="12700" cap="flat" cmpd="sng" algn="ctr">
-                      <a:solidFill>
-                        <a:srgbClr val="E1E6ED"/>
-                      </a:solidFill>
-                      <a:prstDash val="solid"/>
-                      <a:round/>
-                      <a:headEnd type="none" w="med" len="med"/>
-                      <a:tailEnd type="none" w="med" len="med"/>
-                    </a:lnB>
-                  </a:tcPr>
-                </a:tc>
-                <a:tc>
-                  <a:txBody>
-                    <a:bodyPr/>
-                    <a:lstStyle/>
-                    <a:p>
-                      <a:pPr marL="0" indent="0">
-                        <a:buNone/>
-                      </a:pPr>
-                      <a:r>
-                        <a:rPr lang="en-US" sz="1100" dirty="0">
-                          <a:solidFill>
-                            <a:srgbClr val="33414F"/>
-                          </a:solidFill>
-                          <a:latin typeface="Calibri" pitchFamily="34" charset="0"/>
-                          <a:ea typeface="Calibri" pitchFamily="34" charset="-122"/>
-                          <a:cs typeface="Calibri" pitchFamily="34" charset="-120"/>
-                        </a:rPr>
-                        <a:t>company, location, industry, work type, salary range, experience level, qualification</a:t>
-                      </a:r>
-                      <a:endParaRPr lang="en-US" sz="1100" dirty="0">
-                        <a:latin typeface="Calibri" charset="0"/>
-                        <a:ea typeface="Calibri" charset="0"/>
-                        <a:cs typeface="Calibri" charset="0"/>
-                      </a:endParaRPr>
-                    </a:p>
-                  </a:txBody>
-                  <a:tcPr anchor="ctr">
-                    <a:lnL w="12700" cap="flat" cmpd="sng" algn="ctr">
-                      <a:solidFill>
-                        <a:srgbClr val="E1E6ED"/>
-                      </a:solidFill>
-                      <a:prstDash val="solid"/>
-                      <a:round/>
-                      <a:headEnd type="none" w="med" len="med"/>
-                      <a:tailEnd type="none" w="med" len="med"/>
-                    </a:lnL>
-                    <a:lnR w="12700" cap="flat" cmpd="sng" algn="ctr">
-                      <a:solidFill>
-                        <a:srgbClr val="E1E6ED"/>
-                      </a:solidFill>
-                      <a:prstDash val="solid"/>
-                      <a:round/>
-                      <a:headEnd type="none" w="med" len="med"/>
-                      <a:tailEnd type="none" w="med" len="med"/>
-                    </a:lnR>
-                    <a:lnT w="12700" cap="flat" cmpd="sng" algn="ctr">
-                      <a:solidFill>
-                        <a:srgbClr val="E1E6ED"/>
-                      </a:solidFill>
-                      <a:prstDash val="solid"/>
-                      <a:round/>
-                      <a:headEnd type="none" w="med" len="med"/>
-                      <a:tailEnd type="none" w="med" len="med"/>
-                    </a:lnT>
-                    <a:lnB w="12700" cap="flat" cmpd="sng" algn="ctr">
-                      <a:solidFill>
-                        <a:srgbClr val="E1E6ED"/>
-                      </a:solidFill>
-                      <a:prstDash val="solid"/>
-                      <a:round/>
-                      <a:headEnd type="none" w="med" len="med"/>
-                      <a:tailEnd type="none" w="med" len="med"/>
-                    </a:lnB>
-                  </a:tcPr>
-                </a:tc>
-                <a:extLst>
-                  <a:ext uri="{0D108BD9-81ED-4DB2-BD59-A6C34878D82A}">
-                    <a16:rowId xmlns:a16="http://schemas.microsoft.com/office/drawing/2014/main" val="10002"/>
-                  </a:ext>
-                </a:extLst>
-              </a:tr>
-              <a:tr h="457200">
-                <a:tc>
-                  <a:txBody>
-                    <a:bodyPr/>
-                    <a:lstStyle/>
-                    <a:p>
-                      <a:pPr marL="0" indent="0">
-                        <a:buNone/>
-                      </a:pPr>
-                      <a:r>
-                        <a:rPr lang="en-US" sz="1100" dirty="0">
-                          <a:solidFill>
-                            <a:srgbClr val="33414F"/>
-                          </a:solidFill>
-                          <a:latin typeface="Calibri" pitchFamily="34" charset="0"/>
-                          <a:ea typeface="Calibri" pitchFamily="34" charset="-122"/>
-                          <a:cs typeface="Calibri" pitchFamily="34" charset="-120"/>
-                        </a:rPr>
-                        <a:t>Engineered</a:t>
-                      </a:r>
-                      <a:endParaRPr lang="en-US" sz="1100" dirty="0">
-                        <a:latin typeface="Calibri" charset="0"/>
-                        <a:ea typeface="Calibri" charset="0"/>
-                        <a:cs typeface="Calibri" charset="0"/>
-                      </a:endParaRPr>
-                    </a:p>
-                  </a:txBody>
-                  <a:tcPr anchor="ctr">
-                    <a:lnL w="12700" cap="flat" cmpd="sng" algn="ctr">
-                      <a:solidFill>
-                        <a:srgbClr val="E1E6ED"/>
-                      </a:solidFill>
-                      <a:prstDash val="solid"/>
-                      <a:round/>
-                      <a:headEnd type="none" w="med" len="med"/>
-                      <a:tailEnd type="none" w="med" len="med"/>
-                    </a:lnL>
-                    <a:lnR w="12700" cap="flat" cmpd="sng" algn="ctr">
-                      <a:solidFill>
-                        <a:srgbClr val="E1E6ED"/>
-                      </a:solidFill>
-                      <a:prstDash val="solid"/>
-                      <a:round/>
-                      <a:headEnd type="none" w="med" len="med"/>
-                      <a:tailEnd type="none" w="med" len="med"/>
-                    </a:lnR>
-                    <a:lnT w="12700" cap="flat" cmpd="sng" algn="ctr">
-                      <a:solidFill>
-                        <a:srgbClr val="E1E6ED"/>
-                      </a:solidFill>
-                      <a:prstDash val="solid"/>
-                      <a:round/>
-                      <a:headEnd type="none" w="med" len="med"/>
-                      <a:tailEnd type="none" w="med" len="med"/>
-                    </a:lnT>
-                    <a:lnB w="12700" cap="flat" cmpd="sng" algn="ctr">
-                      <a:solidFill>
-                        <a:srgbClr val="E1E6ED"/>
-                      </a:solidFill>
-                      <a:prstDash val="solid"/>
-                      <a:round/>
-                      <a:headEnd type="none" w="med" len="med"/>
-                      <a:tailEnd type="none" w="med" len="med"/>
-                    </a:lnB>
-                  </a:tcPr>
-                </a:tc>
-                <a:tc>
-                  <a:txBody>
-                    <a:bodyPr/>
-                    <a:lstStyle/>
-                    <a:p>
-                      <a:pPr marL="0" indent="0">
-                        <a:buNone/>
-                      </a:pPr>
-                      <a:r>
-                        <a:rPr lang="en-US" sz="1100" dirty="0">
-                          <a:solidFill>
-                            <a:srgbClr val="33414F"/>
-                          </a:solidFill>
-                          <a:latin typeface="Calibri" pitchFamily="34" charset="0"/>
-                          <a:ea typeface="Calibri" pitchFamily="34" charset="-122"/>
-                          <a:cs typeface="Calibri" pitchFamily="34" charset="-120"/>
-                        </a:rPr>
-                        <a:t>text lengths, word counts, URL/email/phone counts, uppercase-word count, missing-field flags</a:t>
-                      </a:r>
-                      <a:endParaRPr lang="en-US" sz="1100" dirty="0">
-                        <a:latin typeface="Calibri" charset="0"/>
-                        <a:ea typeface="Calibri" charset="0"/>
-                        <a:cs typeface="Calibri" charset="0"/>
-                      </a:endParaRPr>
-                    </a:p>
-                  </a:txBody>
-                  <a:tcPr anchor="ctr">
-                    <a:lnL w="12700" cap="flat" cmpd="sng" algn="ctr">
-                      <a:solidFill>
-                        <a:srgbClr val="E1E6ED"/>
-                      </a:solidFill>
-                      <a:prstDash val="solid"/>
-                      <a:round/>
-                      <a:headEnd type="none" w="med" len="med"/>
-                      <a:tailEnd type="none" w="med" len="med"/>
-                    </a:lnL>
-                    <a:lnR w="12700" cap="flat" cmpd="sng" algn="ctr">
-                      <a:solidFill>
-                        <a:srgbClr val="E1E6ED"/>
-                      </a:solidFill>
-                      <a:prstDash val="solid"/>
-                      <a:round/>
-                      <a:headEnd type="none" w="med" len="med"/>
-                      <a:tailEnd type="none" w="med" len="med"/>
-                    </a:lnR>
-                    <a:lnT w="12700" cap="flat" cmpd="sng" algn="ctr">
-                      <a:solidFill>
-                        <a:srgbClr val="E1E6ED"/>
-                      </a:solidFill>
-                      <a:prstDash val="solid"/>
-                      <a:round/>
-                      <a:headEnd type="none" w="med" len="med"/>
-                      <a:tailEnd type="none" w="med" len="med"/>
-                    </a:lnT>
-                    <a:lnB w="12700" cap="flat" cmpd="sng" algn="ctr">
-                      <a:solidFill>
-                        <a:srgbClr val="E1E6ED"/>
-                      </a:solidFill>
-                      <a:prstDash val="solid"/>
-                      <a:round/>
-                      <a:headEnd type="none" w="med" len="med"/>
-                      <a:tailEnd type="none" w="med" len="med"/>
-                    </a:lnB>
-                  </a:tcPr>
-                </a:tc>
-                <a:extLst>
-                  <a:ext uri="{0D108BD9-81ED-4DB2-BD59-A6C34878D82A}">
-                    <a16:rowId xmlns:a16="http://schemas.microsoft.com/office/drawing/2014/main" val="10003"/>
-                  </a:ext>
-                </a:extLst>
-              </a:tr>
-              <a:tr h="457200">
-                <a:tc>
-                  <a:txBody>
-                    <a:bodyPr/>
-                    <a:lstStyle/>
-                    <a:p>
-                      <a:pPr marL="0" indent="0">
-                        <a:buNone/>
-                      </a:pPr>
-                      <a:r>
-                        <a:rPr lang="en-US" sz="1100" dirty="0">
-                          <a:solidFill>
-                            <a:srgbClr val="33414F"/>
-                          </a:solidFill>
-                          <a:latin typeface="Calibri" pitchFamily="34" charset="0"/>
-                          <a:ea typeface="Calibri" pitchFamily="34" charset="-122"/>
-                          <a:cs typeface="Calibri" pitchFamily="34" charset="-120"/>
-                        </a:rPr>
-                        <a:t>Label</a:t>
-                      </a:r>
-                      <a:endParaRPr lang="en-US" sz="1100" dirty="0">
-                        <a:latin typeface="Calibri" charset="0"/>
-                        <a:ea typeface="Calibri" charset="0"/>
-                        <a:cs typeface="Calibri" charset="0"/>
-                      </a:endParaRPr>
-                    </a:p>
-                  </a:txBody>
-                  <a:tcPr anchor="ctr">
-                    <a:lnL w="12700" cap="flat" cmpd="sng" algn="ctr">
-                      <a:solidFill>
-                        <a:srgbClr val="E1E6ED"/>
-                      </a:solidFill>
-                      <a:prstDash val="solid"/>
-                      <a:round/>
-                      <a:headEnd type="none" w="med" len="med"/>
-                      <a:tailEnd type="none" w="med" len="med"/>
-                    </a:lnL>
-                    <a:lnR w="12700" cap="flat" cmpd="sng" algn="ctr">
-                      <a:solidFill>
-                        <a:srgbClr val="E1E6ED"/>
-                      </a:solidFill>
-                      <a:prstDash val="solid"/>
-                      <a:round/>
-                      <a:headEnd type="none" w="med" len="med"/>
-                      <a:tailEnd type="none" w="med" len="med"/>
-                    </a:lnR>
-                    <a:lnT w="12700" cap="flat" cmpd="sng" algn="ctr">
-                      <a:solidFill>
-                        <a:srgbClr val="E1E6ED"/>
-                      </a:solidFill>
-                      <a:prstDash val="solid"/>
-                      <a:round/>
-                      <a:headEnd type="none" w="med" len="med"/>
-                      <a:tailEnd type="none" w="med" len="med"/>
-                    </a:lnT>
-                    <a:lnB w="12700" cap="flat" cmpd="sng" algn="ctr">
-                      <a:solidFill>
-                        <a:srgbClr val="E1E6ED"/>
-                      </a:solidFill>
-                      <a:prstDash val="solid"/>
-                      <a:round/>
-                      <a:headEnd type="none" w="med" len="med"/>
-                      <a:tailEnd type="none" w="med" len="med"/>
-                    </a:lnB>
-                  </a:tcPr>
-                </a:tc>
-                <a:tc>
-                  <a:txBody>
-                    <a:bodyPr/>
-                    <a:lstStyle/>
-                    <a:p>
-                      <a:pPr marL="0" indent="0">
-                        <a:buNone/>
-                      </a:pPr>
-                      <a:r>
-                        <a:rPr lang="en-US" sz="1100" dirty="0">
-                          <a:solidFill>
-                            <a:srgbClr val="33414F"/>
-                          </a:solidFill>
-                          <a:latin typeface="Calibri" pitchFamily="34" charset="0"/>
-                          <a:ea typeface="Calibri" pitchFamily="34" charset="-122"/>
-                          <a:cs typeface="Calibri" pitchFamily="34" charset="-120"/>
-                        </a:rPr>
-                        <a:t>is_fraud (0/1/2 source scheme) → binary Fraud-risk target for modeling</a:t>
-                      </a:r>
-                      <a:endParaRPr lang="en-US" sz="1100" dirty="0">
-                        <a:latin typeface="Calibri" charset="0"/>
-                        <a:ea typeface="Calibri" charset="0"/>
-                        <a:cs typeface="Calibri" charset="0"/>
-                      </a:endParaRPr>
-                    </a:p>
-                  </a:txBody>
-                  <a:tcPr anchor="ctr">
-                    <a:lnL w="12700" cap="flat" cmpd="sng" algn="ctr">
-                      <a:solidFill>
-                        <a:srgbClr val="E1E6ED"/>
-                      </a:solidFill>
-                      <a:prstDash val="solid"/>
-                      <a:round/>
-                      <a:headEnd type="none" w="med" len="med"/>
-                      <a:tailEnd type="none" w="med" len="med"/>
-                    </a:lnL>
-                    <a:lnR w="12700" cap="flat" cmpd="sng" algn="ctr">
-                      <a:solidFill>
-                        <a:srgbClr val="E1E6ED"/>
-                      </a:solidFill>
-                      <a:prstDash val="solid"/>
-                      <a:round/>
-                      <a:headEnd type="none" w="med" len="med"/>
-                      <a:tailEnd type="none" w="med" len="med"/>
-                    </a:lnR>
-                    <a:lnT w="12700" cap="flat" cmpd="sng" algn="ctr">
-                      <a:solidFill>
-                        <a:srgbClr val="E1E6ED"/>
-                      </a:solidFill>
-                      <a:prstDash val="solid"/>
-                      <a:round/>
-                      <a:headEnd type="none" w="med" len="med"/>
-                      <a:tailEnd type="none" w="med" len="med"/>
-                    </a:lnT>
-                    <a:lnB w="12700" cap="flat" cmpd="sng" algn="ctr">
-                      <a:solidFill>
-                        <a:srgbClr val="E1E6ED"/>
-                      </a:solidFill>
-                      <a:prstDash val="solid"/>
-                      <a:round/>
-                      <a:headEnd type="none" w="med" len="med"/>
-                      <a:tailEnd type="none" w="med" len="med"/>
-                    </a:lnB>
-                  </a:tcPr>
-                </a:tc>
-                <a:extLst>
-                  <a:ext uri="{0D108BD9-81ED-4DB2-BD59-A6C34878D82A}">
-                    <a16:rowId xmlns:a16="http://schemas.microsoft.com/office/drawing/2014/main" val="10004"/>
-                  </a:ext>
-                </a:extLst>
-              </a:tr>
-            </a:tbl>
-          </a:graphicData>
-        </a:graphic>
-      </p:graphicFrame>
     </p:spTree>
   </p:cSld>
   <p:clrMapOvr>
